--- a/docs/KIS-Projekt Präsentation.pptx
+++ b/docs/KIS-Projekt Präsentation.pptx
@@ -5,26 +5,25 @@
     <p:sldMasterId id="2147483684" r:id="rId4"/>
   </p:sldMasterIdLst>
   <p:notesMasterIdLst>
-    <p:notesMasterId r:id="rId19"/>
+    <p:notesMasterId r:id="rId18"/>
   </p:notesMasterIdLst>
   <p:handoutMasterIdLst>
-    <p:handoutMasterId r:id="rId20"/>
+    <p:handoutMasterId r:id="rId19"/>
   </p:handoutMasterIdLst>
   <p:sldIdLst>
     <p:sldId id="278" r:id="rId5"/>
     <p:sldId id="282" r:id="rId6"/>
-    <p:sldId id="271" r:id="rId7"/>
-    <p:sldId id="283" r:id="rId8"/>
-    <p:sldId id="284" r:id="rId9"/>
-    <p:sldId id="286" r:id="rId10"/>
-    <p:sldId id="287" r:id="rId11"/>
-    <p:sldId id="293" r:id="rId12"/>
-    <p:sldId id="285" r:id="rId13"/>
-    <p:sldId id="288" r:id="rId14"/>
-    <p:sldId id="289" r:id="rId15"/>
-    <p:sldId id="290" r:id="rId16"/>
-    <p:sldId id="291" r:id="rId17"/>
-    <p:sldId id="292" r:id="rId18"/>
+    <p:sldId id="295" r:id="rId7"/>
+    <p:sldId id="271" r:id="rId8"/>
+    <p:sldId id="283" r:id="rId9"/>
+    <p:sldId id="284" r:id="rId10"/>
+    <p:sldId id="286" r:id="rId11"/>
+    <p:sldId id="287" r:id="rId12"/>
+    <p:sldId id="293" r:id="rId13"/>
+    <p:sldId id="294" r:id="rId14"/>
+    <p:sldId id="285" r:id="rId15"/>
+    <p:sldId id="288" r:id="rId16"/>
+    <p:sldId id="292" r:id="rId17"/>
   </p:sldIdLst>
   <p:sldSz cx="12192000" cy="6858000"/>
   <p:notesSz cx="6858000" cy="9144000"/>
@@ -801,7 +800,13 @@
   <p:cSld>
     <p:spTree>
       <p:nvGrpSpPr>
-        <p:cNvPr id="1" name=""/>
+        <p:cNvPr id="1" name="">
+          <a:extLst>
+            <a:ext uri="{FF2B5EF4-FFF2-40B4-BE49-F238E27FC236}">
+              <a16:creationId xmlns:a16="http://schemas.microsoft.com/office/drawing/2014/main" id="{63B9B050-E0A1-112D-DD7E-3D430BA68CA0}"/>
+            </a:ext>
+          </a:extLst>
+        </p:cNvPr>
         <p:cNvGrpSpPr/>
         <p:nvPr/>
       </p:nvGrpSpPr>
@@ -815,7 +820,13 @@
       </p:grpSpPr>
       <p:sp>
         <p:nvSpPr>
-          <p:cNvPr id="2" name="Folienbildplatzhalter 1"/>
+          <p:cNvPr id="2" name="Folienbildplatzhalter 1">
+            <a:extLst>
+              <a:ext uri="{FF2B5EF4-FFF2-40B4-BE49-F238E27FC236}">
+                <a16:creationId xmlns:a16="http://schemas.microsoft.com/office/drawing/2014/main" id="{87F1098A-45DA-0AC4-6F81-4D4D85F2BFEA}"/>
+              </a:ext>
+            </a:extLst>
+          </p:cNvPr>
           <p:cNvSpPr>
             <a:spLocks noGrp="1" noRot="1" noChangeAspect="1"/>
           </p:cNvSpPr>
@@ -827,7 +838,13 @@
       </p:sp>
       <p:sp>
         <p:nvSpPr>
-          <p:cNvPr id="3" name="Notizenplatzhalter 2"/>
+          <p:cNvPr id="3" name="Notizenplatzhalter 2">
+            <a:extLst>
+              <a:ext uri="{FF2B5EF4-FFF2-40B4-BE49-F238E27FC236}">
+                <a16:creationId xmlns:a16="http://schemas.microsoft.com/office/drawing/2014/main" id="{81DEB41E-A57D-905C-49FA-CFA9264CD123}"/>
+              </a:ext>
+            </a:extLst>
+          </p:cNvPr>
           <p:cNvSpPr>
             <a:spLocks noGrp="1"/>
           </p:cNvSpPr>
@@ -851,7 +868,13 @@
       </p:sp>
       <p:sp>
         <p:nvSpPr>
-          <p:cNvPr id="4" name="Foliennummernplatzhalter 3"/>
+          <p:cNvPr id="4" name="Foliennummernplatzhalter 3">
+            <a:extLst>
+              <a:ext uri="{FF2B5EF4-FFF2-40B4-BE49-F238E27FC236}">
+                <a16:creationId xmlns:a16="http://schemas.microsoft.com/office/drawing/2014/main" id="{62206B3F-CFFE-6CE4-E3E1-D1BBB6DB3AE9}"/>
+              </a:ext>
+            </a:extLst>
+          </p:cNvPr>
           <p:cNvSpPr>
             <a:spLocks noGrp="1"/>
           </p:cNvSpPr>
@@ -880,7 +903,7 @@
     </p:spTree>
     <p:extLst>
       <p:ext uri="{BB962C8B-B14F-4D97-AF65-F5344CB8AC3E}">
-        <p14:creationId xmlns:p14="http://schemas.microsoft.com/office/powerpoint/2010/main" val="382281238"/>
+        <p14:creationId xmlns:p14="http://schemas.microsoft.com/office/powerpoint/2010/main" val="4095397541"/>
       </p:ext>
     </p:extLst>
   </p:cSld>
@@ -974,7 +997,7 @@
     </p:spTree>
     <p:extLst>
       <p:ext uri="{BB962C8B-B14F-4D97-AF65-F5344CB8AC3E}">
-        <p14:creationId xmlns:p14="http://schemas.microsoft.com/office/powerpoint/2010/main" val="1776108762"/>
+        <p14:creationId xmlns:p14="http://schemas.microsoft.com/office/powerpoint/2010/main" val="433056707"/>
       </p:ext>
     </p:extLst>
   </p:cSld>
@@ -1068,7 +1091,7 @@
     </p:spTree>
     <p:extLst>
       <p:ext uri="{BB962C8B-B14F-4D97-AF65-F5344CB8AC3E}">
-        <p14:creationId xmlns:p14="http://schemas.microsoft.com/office/powerpoint/2010/main" val="4095159570"/>
+        <p14:creationId xmlns:p14="http://schemas.microsoft.com/office/powerpoint/2010/main" val="382281238"/>
       </p:ext>
     </p:extLst>
   </p:cSld>
@@ -1154,100 +1177,6 @@
             <a:fld id="{E7AF00E9-A49D-4007-B3B9-A3783809E505}" type="slidenum">
               <a:rPr lang="de-DE" smtClean="0"/>
               <a:t>13</a:t>
-            </a:fld>
-            <a:endParaRPr lang="de-DE" dirty="0"/>
-          </a:p>
-        </p:txBody>
-      </p:sp>
-    </p:spTree>
-    <p:extLst>
-      <p:ext uri="{BB962C8B-B14F-4D97-AF65-F5344CB8AC3E}">
-        <p14:creationId xmlns:p14="http://schemas.microsoft.com/office/powerpoint/2010/main" val="3564270576"/>
-      </p:ext>
-    </p:extLst>
-  </p:cSld>
-  <p:clrMapOvr>
-    <a:masterClrMapping/>
-  </p:clrMapOvr>
-</p:notes>
-</file>
-
-<file path=ppt/notesSlides/notesSlide14.xml><?xml version="1.0" encoding="utf-8"?>
-<p:notes xmlns:a="http://schemas.openxmlformats.org/drawingml/2006/main" xmlns:r="http://schemas.openxmlformats.org/officeDocument/2006/relationships" xmlns:p="http://schemas.openxmlformats.org/presentationml/2006/main">
-  <p:cSld>
-    <p:spTree>
-      <p:nvGrpSpPr>
-        <p:cNvPr id="1" name=""/>
-        <p:cNvGrpSpPr/>
-        <p:nvPr/>
-      </p:nvGrpSpPr>
-      <p:grpSpPr>
-        <a:xfrm>
-          <a:off x="0" y="0"/>
-          <a:ext cx="0" cy="0"/>
-          <a:chOff x="0" y="0"/>
-          <a:chExt cx="0" cy="0"/>
-        </a:xfrm>
-      </p:grpSpPr>
-      <p:sp>
-        <p:nvSpPr>
-          <p:cNvPr id="2" name="Folienbildplatzhalter 1"/>
-          <p:cNvSpPr>
-            <a:spLocks noGrp="1" noRot="1" noChangeAspect="1"/>
-          </p:cNvSpPr>
-          <p:nvPr>
-            <p:ph type="sldImg"/>
-          </p:nvPr>
-        </p:nvSpPr>
-        <p:spPr/>
-      </p:sp>
-      <p:sp>
-        <p:nvSpPr>
-          <p:cNvPr id="3" name="Notizenplatzhalter 2"/>
-          <p:cNvSpPr>
-            <a:spLocks noGrp="1"/>
-          </p:cNvSpPr>
-          <p:nvPr>
-            <p:ph type="body" idx="1"/>
-          </p:nvPr>
-        </p:nvSpPr>
-        <p:spPr/>
-        <p:txBody>
-          <a:bodyPr rtlCol="0"/>
-          <a:lstStyle>
-            <a:defPPr>
-              <a:defRPr lang="de-DE"/>
-            </a:defPPr>
-          </a:lstStyle>
-          <a:p>
-            <a:pPr rtl="0"/>
-            <a:endParaRPr lang="de-DE" dirty="0"/>
-          </a:p>
-        </p:txBody>
-      </p:sp>
-      <p:sp>
-        <p:nvSpPr>
-          <p:cNvPr id="4" name="Foliennummernplatzhalter 3"/>
-          <p:cNvSpPr>
-            <a:spLocks noGrp="1"/>
-          </p:cNvSpPr>
-          <p:nvPr>
-            <p:ph type="sldNum" sz="quarter" idx="5"/>
-          </p:nvPr>
-        </p:nvSpPr>
-        <p:spPr/>
-        <p:txBody>
-          <a:bodyPr rtlCol="0"/>
-          <a:lstStyle>
-            <a:defPPr>
-              <a:defRPr lang="de-DE"/>
-            </a:defPPr>
-          </a:lstStyle>
-          <a:p>
-            <a:pPr rtl="0"/>
-            <a:fld id="{E7AF00E9-A49D-4007-B3B9-A3783809E505}" type="slidenum">
-              <a:rPr lang="de-DE" smtClean="0"/>
-              <a:t>14</a:t>
             </a:fld>
             <a:endParaRPr lang="de-DE" dirty="0"/>
           </a:p>
@@ -1365,7 +1294,13 @@
   <p:cSld>
     <p:spTree>
       <p:nvGrpSpPr>
-        <p:cNvPr id="1" name=""/>
+        <p:cNvPr id="1" name="">
+          <a:extLst>
+            <a:ext uri="{FF2B5EF4-FFF2-40B4-BE49-F238E27FC236}">
+              <a16:creationId xmlns:a16="http://schemas.microsoft.com/office/drawing/2014/main" id="{D0C630AB-8FFF-CCB0-C6DA-F03F74CD083C}"/>
+            </a:ext>
+          </a:extLst>
+        </p:cNvPr>
         <p:cNvGrpSpPr/>
         <p:nvPr/>
       </p:nvGrpSpPr>
@@ -1379,7 +1314,13 @@
       </p:grpSpPr>
       <p:sp>
         <p:nvSpPr>
-          <p:cNvPr id="2" name="Folienbildplatzhalter 1"/>
+          <p:cNvPr id="2" name="Folienbildplatzhalter 1">
+            <a:extLst>
+              <a:ext uri="{FF2B5EF4-FFF2-40B4-BE49-F238E27FC236}">
+                <a16:creationId xmlns:a16="http://schemas.microsoft.com/office/drawing/2014/main" id="{39A01419-90F7-9ECA-5C8F-FEB75747B517}"/>
+              </a:ext>
+            </a:extLst>
+          </p:cNvPr>
           <p:cNvSpPr>
             <a:spLocks noGrp="1" noRot="1" noChangeAspect="1"/>
           </p:cNvSpPr>
@@ -1391,7 +1332,13 @@
       </p:sp>
       <p:sp>
         <p:nvSpPr>
-          <p:cNvPr id="3" name="Notizenplatzhalter 2"/>
+          <p:cNvPr id="3" name="Notizenplatzhalter 2">
+            <a:extLst>
+              <a:ext uri="{FF2B5EF4-FFF2-40B4-BE49-F238E27FC236}">
+                <a16:creationId xmlns:a16="http://schemas.microsoft.com/office/drawing/2014/main" id="{F020487F-D9CB-B772-7FA6-04B8AA3E03AC}"/>
+              </a:ext>
+            </a:extLst>
+          </p:cNvPr>
           <p:cNvSpPr>
             <a:spLocks noGrp="1"/>
           </p:cNvSpPr>
@@ -1415,7 +1362,13 @@
       </p:sp>
       <p:sp>
         <p:nvSpPr>
-          <p:cNvPr id="4" name="Foliennummernplatzhalter 3"/>
+          <p:cNvPr id="4" name="Foliennummernplatzhalter 3">
+            <a:extLst>
+              <a:ext uri="{FF2B5EF4-FFF2-40B4-BE49-F238E27FC236}">
+                <a16:creationId xmlns:a16="http://schemas.microsoft.com/office/drawing/2014/main" id="{93B73365-5136-1821-C66F-2CCC62D146A5}"/>
+              </a:ext>
+            </a:extLst>
+          </p:cNvPr>
           <p:cNvSpPr>
             <a:spLocks noGrp="1"/>
           </p:cNvSpPr>
@@ -1444,7 +1397,7 @@
     </p:spTree>
     <p:extLst>
       <p:ext uri="{BB962C8B-B14F-4D97-AF65-F5344CB8AC3E}">
-        <p14:creationId xmlns:p14="http://schemas.microsoft.com/office/powerpoint/2010/main" val="603191752"/>
+        <p14:creationId xmlns:p14="http://schemas.microsoft.com/office/powerpoint/2010/main" val="2133023186"/>
       </p:ext>
     </p:extLst>
   </p:cSld>
@@ -1538,7 +1491,7 @@
     </p:spTree>
     <p:extLst>
       <p:ext uri="{BB962C8B-B14F-4D97-AF65-F5344CB8AC3E}">
-        <p14:creationId xmlns:p14="http://schemas.microsoft.com/office/powerpoint/2010/main" val="223163590"/>
+        <p14:creationId xmlns:p14="http://schemas.microsoft.com/office/powerpoint/2010/main" val="603191752"/>
       </p:ext>
     </p:extLst>
   </p:cSld>
@@ -1632,7 +1585,7 @@
     </p:spTree>
     <p:extLst>
       <p:ext uri="{BB962C8B-B14F-4D97-AF65-F5344CB8AC3E}">
-        <p14:creationId xmlns:p14="http://schemas.microsoft.com/office/powerpoint/2010/main" val="386789978"/>
+        <p14:creationId xmlns:p14="http://schemas.microsoft.com/office/powerpoint/2010/main" val="223163590"/>
       </p:ext>
     </p:extLst>
   </p:cSld>
@@ -1726,7 +1679,7 @@
     </p:spTree>
     <p:extLst>
       <p:ext uri="{BB962C8B-B14F-4D97-AF65-F5344CB8AC3E}">
-        <p14:creationId xmlns:p14="http://schemas.microsoft.com/office/powerpoint/2010/main" val="3070488982"/>
+        <p14:creationId xmlns:p14="http://schemas.microsoft.com/office/powerpoint/2010/main" val="386789978"/>
       </p:ext>
     </p:extLst>
   </p:cSld>
@@ -1820,6 +1773,100 @@
     </p:spTree>
     <p:extLst>
       <p:ext uri="{BB962C8B-B14F-4D97-AF65-F5344CB8AC3E}">
+        <p14:creationId xmlns:p14="http://schemas.microsoft.com/office/powerpoint/2010/main" val="3070488982"/>
+      </p:ext>
+    </p:extLst>
+  </p:cSld>
+  <p:clrMapOvr>
+    <a:masterClrMapping/>
+  </p:clrMapOvr>
+</p:notes>
+</file>
+
+<file path=ppt/notesSlides/notesSlide8.xml><?xml version="1.0" encoding="utf-8"?>
+<p:notes xmlns:a="http://schemas.openxmlformats.org/drawingml/2006/main" xmlns:r="http://schemas.openxmlformats.org/officeDocument/2006/relationships" xmlns:p="http://schemas.openxmlformats.org/presentationml/2006/main">
+  <p:cSld>
+    <p:spTree>
+      <p:nvGrpSpPr>
+        <p:cNvPr id="1" name=""/>
+        <p:cNvGrpSpPr/>
+        <p:nvPr/>
+      </p:nvGrpSpPr>
+      <p:grpSpPr>
+        <a:xfrm>
+          <a:off x="0" y="0"/>
+          <a:ext cx="0" cy="0"/>
+          <a:chOff x="0" y="0"/>
+          <a:chExt cx="0" cy="0"/>
+        </a:xfrm>
+      </p:grpSpPr>
+      <p:sp>
+        <p:nvSpPr>
+          <p:cNvPr id="2" name="Folienbildplatzhalter 1"/>
+          <p:cNvSpPr>
+            <a:spLocks noGrp="1" noRot="1" noChangeAspect="1"/>
+          </p:cNvSpPr>
+          <p:nvPr>
+            <p:ph type="sldImg"/>
+          </p:nvPr>
+        </p:nvSpPr>
+        <p:spPr/>
+      </p:sp>
+      <p:sp>
+        <p:nvSpPr>
+          <p:cNvPr id="3" name="Notizenplatzhalter 2"/>
+          <p:cNvSpPr>
+            <a:spLocks noGrp="1"/>
+          </p:cNvSpPr>
+          <p:nvPr>
+            <p:ph type="body" idx="1"/>
+          </p:nvPr>
+        </p:nvSpPr>
+        <p:spPr/>
+        <p:txBody>
+          <a:bodyPr rtlCol="0"/>
+          <a:lstStyle>
+            <a:defPPr>
+              <a:defRPr lang="de-DE"/>
+            </a:defPPr>
+          </a:lstStyle>
+          <a:p>
+            <a:pPr rtl="0"/>
+            <a:endParaRPr lang="de-DE" dirty="0"/>
+          </a:p>
+        </p:txBody>
+      </p:sp>
+      <p:sp>
+        <p:nvSpPr>
+          <p:cNvPr id="4" name="Foliennummernplatzhalter 3"/>
+          <p:cNvSpPr>
+            <a:spLocks noGrp="1"/>
+          </p:cNvSpPr>
+          <p:nvPr>
+            <p:ph type="sldNum" sz="quarter" idx="5"/>
+          </p:nvPr>
+        </p:nvSpPr>
+        <p:spPr/>
+        <p:txBody>
+          <a:bodyPr rtlCol="0"/>
+          <a:lstStyle>
+            <a:defPPr>
+              <a:defRPr lang="de-DE"/>
+            </a:defPPr>
+          </a:lstStyle>
+          <a:p>
+            <a:pPr rtl="0"/>
+            <a:fld id="{E7AF00E9-A49D-4007-B3B9-A3783809E505}" type="slidenum">
+              <a:rPr lang="de-DE" smtClean="0"/>
+              <a:t>8</a:t>
+            </a:fld>
+            <a:endParaRPr lang="de-DE" dirty="0"/>
+          </a:p>
+        </p:txBody>
+      </p:sp>
+    </p:spTree>
+    <p:extLst>
+      <p:ext uri="{BB962C8B-B14F-4D97-AF65-F5344CB8AC3E}">
         <p14:creationId xmlns:p14="http://schemas.microsoft.com/office/powerpoint/2010/main" val="2661674522"/>
       </p:ext>
     </p:extLst>
@@ -1830,7 +1877,7 @@
 </p:notes>
 </file>
 
-<file path=ppt/notesSlides/notesSlide8.xml><?xml version="1.0" encoding="utf-8"?>
+<file path=ppt/notesSlides/notesSlide9.xml><?xml version="1.0" encoding="utf-8"?>
 <p:notes xmlns:a="http://schemas.openxmlformats.org/drawingml/2006/main" xmlns:r="http://schemas.openxmlformats.org/officeDocument/2006/relationships" xmlns:p="http://schemas.openxmlformats.org/presentationml/2006/main">
   <p:cSld>
     <p:spTree>
@@ -1929,7 +1976,7 @@
             <a:pPr rtl="0"/>
             <a:fld id="{E7AF00E9-A49D-4007-B3B9-A3783809E505}" type="slidenum">
               <a:rPr lang="de-DE" smtClean="0"/>
-              <a:t>8</a:t>
+              <a:t>9</a:t>
             </a:fld>
             <a:endParaRPr lang="de-DE" dirty="0"/>
           </a:p>
@@ -1939,100 +1986,6 @@
     <p:extLst>
       <p:ext uri="{BB962C8B-B14F-4D97-AF65-F5344CB8AC3E}">
         <p14:creationId xmlns:p14="http://schemas.microsoft.com/office/powerpoint/2010/main" val="2218620637"/>
-      </p:ext>
-    </p:extLst>
-  </p:cSld>
-  <p:clrMapOvr>
-    <a:masterClrMapping/>
-  </p:clrMapOvr>
-</p:notes>
-</file>
-
-<file path=ppt/notesSlides/notesSlide9.xml><?xml version="1.0" encoding="utf-8"?>
-<p:notes xmlns:a="http://schemas.openxmlformats.org/drawingml/2006/main" xmlns:r="http://schemas.openxmlformats.org/officeDocument/2006/relationships" xmlns:p="http://schemas.openxmlformats.org/presentationml/2006/main">
-  <p:cSld>
-    <p:spTree>
-      <p:nvGrpSpPr>
-        <p:cNvPr id="1" name=""/>
-        <p:cNvGrpSpPr/>
-        <p:nvPr/>
-      </p:nvGrpSpPr>
-      <p:grpSpPr>
-        <a:xfrm>
-          <a:off x="0" y="0"/>
-          <a:ext cx="0" cy="0"/>
-          <a:chOff x="0" y="0"/>
-          <a:chExt cx="0" cy="0"/>
-        </a:xfrm>
-      </p:grpSpPr>
-      <p:sp>
-        <p:nvSpPr>
-          <p:cNvPr id="2" name="Folienbildplatzhalter 1"/>
-          <p:cNvSpPr>
-            <a:spLocks noGrp="1" noRot="1" noChangeAspect="1"/>
-          </p:cNvSpPr>
-          <p:nvPr>
-            <p:ph type="sldImg"/>
-          </p:nvPr>
-        </p:nvSpPr>
-        <p:spPr/>
-      </p:sp>
-      <p:sp>
-        <p:nvSpPr>
-          <p:cNvPr id="3" name="Notizenplatzhalter 2"/>
-          <p:cNvSpPr>
-            <a:spLocks noGrp="1"/>
-          </p:cNvSpPr>
-          <p:nvPr>
-            <p:ph type="body" idx="1"/>
-          </p:nvPr>
-        </p:nvSpPr>
-        <p:spPr/>
-        <p:txBody>
-          <a:bodyPr rtlCol="0"/>
-          <a:lstStyle>
-            <a:defPPr>
-              <a:defRPr lang="de-DE"/>
-            </a:defPPr>
-          </a:lstStyle>
-          <a:p>
-            <a:pPr rtl="0"/>
-            <a:endParaRPr lang="de-DE" dirty="0"/>
-          </a:p>
-        </p:txBody>
-      </p:sp>
-      <p:sp>
-        <p:nvSpPr>
-          <p:cNvPr id="4" name="Foliennummernplatzhalter 3"/>
-          <p:cNvSpPr>
-            <a:spLocks noGrp="1"/>
-          </p:cNvSpPr>
-          <p:nvPr>
-            <p:ph type="sldNum" sz="quarter" idx="5"/>
-          </p:nvPr>
-        </p:nvSpPr>
-        <p:spPr/>
-        <p:txBody>
-          <a:bodyPr rtlCol="0"/>
-          <a:lstStyle>
-            <a:defPPr>
-              <a:defRPr lang="de-DE"/>
-            </a:defPPr>
-          </a:lstStyle>
-          <a:p>
-            <a:pPr rtl="0"/>
-            <a:fld id="{E7AF00E9-A49D-4007-B3B9-A3783809E505}" type="slidenum">
-              <a:rPr lang="de-DE" smtClean="0"/>
-              <a:t>9</a:t>
-            </a:fld>
-            <a:endParaRPr lang="de-DE" dirty="0"/>
-          </a:p>
-        </p:txBody>
-      </p:sp>
-    </p:spTree>
-    <p:extLst>
-      <p:ext uri="{BB962C8B-B14F-4D97-AF65-F5344CB8AC3E}">
-        <p14:creationId xmlns:p14="http://schemas.microsoft.com/office/powerpoint/2010/main" val="433056707"/>
       </p:ext>
     </p:extLst>
   </p:cSld>
@@ -2158,1573 +2111,6 @@
 </file>
 
 <file path=ppt/slideLayouts/slideLayout10.xml><?xml version="1.0" encoding="utf-8"?>
-<p:sldLayout xmlns:a="http://schemas.openxmlformats.org/drawingml/2006/main" xmlns:r="http://schemas.openxmlformats.org/officeDocument/2006/relationships" xmlns:p="http://schemas.openxmlformats.org/presentationml/2006/main" preserve="1" userDrawn="1">
-  <p:cSld name="Zwei Inhalt">
-    <p:spTree>
-      <p:nvGrpSpPr>
-        <p:cNvPr id="1" name=""/>
-        <p:cNvGrpSpPr/>
-        <p:nvPr/>
-      </p:nvGrpSpPr>
-      <p:grpSpPr>
-        <a:xfrm>
-          <a:off x="0" y="0"/>
-          <a:ext cx="0" cy="0"/>
-          <a:chOff x="0" y="0"/>
-          <a:chExt cx="0" cy="0"/>
-        </a:xfrm>
-      </p:grpSpPr>
-      <p:sp>
-        <p:nvSpPr>
-          <p:cNvPr id="22" name="Ellipse 21">
-            <a:extLst>
-              <a:ext uri="{FF2B5EF4-FFF2-40B4-BE49-F238E27FC236}">
-                <a16:creationId xmlns:a16="http://schemas.microsoft.com/office/drawing/2014/main" id="{94729CA3-91C4-4A89-9448-A2F0E409177A}"/>
-              </a:ext>
-              <a:ext uri="{C183D7F6-B498-43B3-948B-1728B52AA6E4}">
-                <adec:decorative xmlns:adec="http://schemas.microsoft.com/office/drawing/2017/decorative" val="1"/>
-              </a:ext>
-            </a:extLst>
-          </p:cNvPr>
-          <p:cNvSpPr>
-            <a:spLocks noChangeAspect="1"/>
-          </p:cNvSpPr>
-          <p:nvPr/>
-        </p:nvSpPr>
-        <p:spPr>
-          <a:xfrm>
-            <a:off x="11069864" y="333375"/>
-            <a:ext cx="360000" cy="360000"/>
-          </a:xfrm>
-          <a:prstGeom prst="ellipse">
-            <a:avLst/>
-          </a:prstGeom>
-          <a:gradFill flip="none" rotWithShape="1">
-            <a:gsLst>
-              <a:gs pos="100000">
-                <a:schemeClr val="bg2">
-                  <a:lumMod val="50000"/>
-                  <a:lumOff val="50000"/>
-                </a:schemeClr>
-              </a:gs>
-              <a:gs pos="60000">
-                <a:schemeClr val="bg2"/>
-              </a:gs>
-            </a:gsLst>
-            <a:path path="circle">
-              <a:fillToRect l="100000" b="100000"/>
-            </a:path>
-            <a:tileRect t="-100000" r="-100000"/>
-          </a:gradFill>
-          <a:ln>
-            <a:noFill/>
-          </a:ln>
-          <a:effectLst>
-            <a:innerShdw blurRad="127000" dist="63500" dir="2700000">
-              <a:schemeClr val="accent1">
-                <a:lumMod val="60000"/>
-                <a:lumOff val="40000"/>
-                <a:alpha val="20000"/>
-              </a:schemeClr>
-            </a:innerShdw>
-            <a:softEdge rad="0"/>
-          </a:effectLst>
-        </p:spPr>
-        <p:style>
-          <a:lnRef idx="2">
-            <a:schemeClr val="accent1">
-              <a:shade val="50000"/>
-            </a:schemeClr>
-          </a:lnRef>
-          <a:fillRef idx="1">
-            <a:schemeClr val="accent1"/>
-          </a:fillRef>
-          <a:effectRef idx="0">
-            <a:schemeClr val="accent1"/>
-          </a:effectRef>
-          <a:fontRef idx="minor">
-            <a:schemeClr val="lt1"/>
-          </a:fontRef>
-        </p:style>
-        <p:txBody>
-          <a:bodyPr rot="0" spcFirstLastPara="0" vertOverflow="overflow" horzOverflow="overflow" vert="horz" wrap="square" lIns="91440" tIns="45720" rIns="91440" bIns="45720" numCol="1" spcCol="0" rtlCol="0" fromWordArt="0" anchor="ctr" anchorCtr="0" forceAA="0" compatLnSpc="1">
-            <a:prstTxWarp prst="textNoShape">
-              <a:avLst/>
-            </a:prstTxWarp>
-            <a:noAutofit/>
-          </a:bodyPr>
-          <a:lstStyle>
-            <a:defPPr>
-              <a:defRPr lang="de-DE"/>
-            </a:defPPr>
-          </a:lstStyle>
-          <a:p>
-            <a:pPr algn="ctr" rtl="0"/>
-            <a:endParaRPr lang="de-DE" dirty="0"/>
-          </a:p>
-        </p:txBody>
-      </p:sp>
-      <p:sp>
-        <p:nvSpPr>
-          <p:cNvPr id="2" name="Titel 1">
-            <a:extLst>
-              <a:ext uri="{FF2B5EF4-FFF2-40B4-BE49-F238E27FC236}">
-                <a16:creationId xmlns:a16="http://schemas.microsoft.com/office/drawing/2014/main" id="{8978E540-142B-4A82-9C3F-E61BC190AEED}"/>
-              </a:ext>
-            </a:extLst>
-          </p:cNvPr>
-          <p:cNvSpPr>
-            <a:spLocks noGrp="1"/>
-          </p:cNvSpPr>
-          <p:nvPr>
-            <p:ph type="title" hasCustomPrompt="1"/>
-          </p:nvPr>
-        </p:nvSpPr>
-        <p:spPr>
-          <a:xfrm>
-            <a:off x="550863" y="488315"/>
-            <a:ext cx="11090274" cy="1332000"/>
-          </a:xfrm>
-        </p:spPr>
-        <p:txBody>
-          <a:bodyPr rtlCol="0">
-            <a:normAutofit/>
-          </a:bodyPr>
-          <a:lstStyle>
-            <a:lvl1pPr>
-              <a:lnSpc>
-                <a:spcPct val="100000"/>
-              </a:lnSpc>
-              <a:defRPr lang="de-DE" sz="4000"/>
-            </a:lvl1pPr>
-          </a:lstStyle>
-          <a:p>
-            <a:pPr rtl="0"/>
-            <a:r>
-              <a:rPr lang="de-DE"/>
-              <a:t>Titel durch Klicken hinzufügen</a:t>
-            </a:r>
-          </a:p>
-        </p:txBody>
-      </p:sp>
-      <p:grpSp>
-        <p:nvGrpSpPr>
-          <p:cNvPr id="11" name="Gruppieren 10">
-            <a:extLst>
-              <a:ext uri="{FF2B5EF4-FFF2-40B4-BE49-F238E27FC236}">
-                <a16:creationId xmlns:a16="http://schemas.microsoft.com/office/drawing/2014/main" id="{6EFC6ED4-22DD-0C3B-D15A-218307AB6DF2}"/>
-              </a:ext>
-              <a:ext uri="{C183D7F6-B498-43B3-948B-1728B52AA6E4}">
-                <adec:decorative xmlns:adec="http://schemas.microsoft.com/office/drawing/2017/decorative" val="1"/>
-              </a:ext>
-            </a:extLst>
-          </p:cNvPr>
-          <p:cNvGrpSpPr/>
-          <p:nvPr userDrawn="1"/>
-        </p:nvGrpSpPr>
-        <p:grpSpPr>
-          <a:xfrm>
-            <a:off x="10379261" y="2030035"/>
-            <a:ext cx="1335600" cy="1262947"/>
-            <a:chOff x="10145015" y="2343978"/>
-            <a:chExt cx="1335600" cy="1262947"/>
-          </a:xfrm>
-        </p:grpSpPr>
-        <p:sp>
-          <p:nvSpPr>
-            <p:cNvPr id="12" name="Freihandform: Form 25">
-              <a:extLst>
-                <a:ext uri="{FF2B5EF4-FFF2-40B4-BE49-F238E27FC236}">
-                  <a16:creationId xmlns:a16="http://schemas.microsoft.com/office/drawing/2014/main" id="{E4CD0F67-4BE8-1120-FCAE-806F9E18DD58}"/>
-                </a:ext>
-              </a:extLst>
-            </p:cNvPr>
-            <p:cNvSpPr>
-              <a:spLocks noChangeAspect="1"/>
-            </p:cNvSpPr>
-            <p:nvPr/>
-          </p:nvSpPr>
-          <p:spPr>
-            <a:xfrm rot="8100000">
-              <a:off x="10400615" y="2343978"/>
-              <a:ext cx="1080000" cy="1262947"/>
-            </a:xfrm>
-            <a:custGeom>
-              <a:avLst/>
-              <a:gdLst>
-                <a:gd name="connsiteX0" fmla="*/ 540000 w 1080000"/>
-                <a:gd name="connsiteY0" fmla="*/ 0 h 1262947"/>
-                <a:gd name="connsiteX1" fmla="*/ 1080000 w 1080000"/>
-                <a:gd name="connsiteY1" fmla="*/ 931034 h 1262947"/>
-                <a:gd name="connsiteX2" fmla="*/ 1064374 w 1080000"/>
-                <a:gd name="connsiteY2" fmla="*/ 931034 h 1262947"/>
-                <a:gd name="connsiteX3" fmla="*/ 1069029 w 1080000"/>
-                <a:gd name="connsiteY3" fmla="*/ 938533 h 1262947"/>
-                <a:gd name="connsiteX4" fmla="*/ 1080000 w 1080000"/>
-                <a:gd name="connsiteY4" fmla="*/ 992947 h 1262947"/>
-                <a:gd name="connsiteX5" fmla="*/ 540000 w 1080000"/>
-                <a:gd name="connsiteY5" fmla="*/ 1262947 h 1262947"/>
-                <a:gd name="connsiteX6" fmla="*/ 0 w 1080000"/>
-                <a:gd name="connsiteY6" fmla="*/ 992947 h 1262947"/>
-                <a:gd name="connsiteX7" fmla="*/ 10971 w 1080000"/>
-                <a:gd name="connsiteY7" fmla="*/ 938533 h 1262947"/>
-                <a:gd name="connsiteX8" fmla="*/ 15626 w 1080000"/>
-                <a:gd name="connsiteY8" fmla="*/ 931034 h 1262947"/>
-                <a:gd name="connsiteX9" fmla="*/ 0 w 1080000"/>
-                <a:gd name="connsiteY9" fmla="*/ 931034 h 1262947"/>
-                <a:gd name="connsiteX0" fmla="*/ 540000 w 1080000"/>
-                <a:gd name="connsiteY0" fmla="*/ 0 h 1262947"/>
-                <a:gd name="connsiteX1" fmla="*/ 1080000 w 1080000"/>
-                <a:gd name="connsiteY1" fmla="*/ 931034 h 1262947"/>
-                <a:gd name="connsiteX2" fmla="*/ 1064374 w 1080000"/>
-                <a:gd name="connsiteY2" fmla="*/ 931034 h 1262947"/>
-                <a:gd name="connsiteX3" fmla="*/ 1069029 w 1080000"/>
-                <a:gd name="connsiteY3" fmla="*/ 938533 h 1262947"/>
-                <a:gd name="connsiteX4" fmla="*/ 1080000 w 1080000"/>
-                <a:gd name="connsiteY4" fmla="*/ 992947 h 1262947"/>
-                <a:gd name="connsiteX5" fmla="*/ 540000 w 1080000"/>
-                <a:gd name="connsiteY5" fmla="*/ 1262947 h 1262947"/>
-                <a:gd name="connsiteX6" fmla="*/ 0 w 1080000"/>
-                <a:gd name="connsiteY6" fmla="*/ 992947 h 1262947"/>
-                <a:gd name="connsiteX7" fmla="*/ 10971 w 1080000"/>
-                <a:gd name="connsiteY7" fmla="*/ 938533 h 1262947"/>
-                <a:gd name="connsiteX8" fmla="*/ 15626 w 1080000"/>
-                <a:gd name="connsiteY8" fmla="*/ 931034 h 1262947"/>
-                <a:gd name="connsiteX9" fmla="*/ 540000 w 1080000"/>
-                <a:gd name="connsiteY9" fmla="*/ 0 h 1262947"/>
-                <a:gd name="connsiteX0" fmla="*/ 540000 w 1080000"/>
-                <a:gd name="connsiteY0" fmla="*/ 0 h 1262947"/>
-                <a:gd name="connsiteX1" fmla="*/ 1064374 w 1080000"/>
-                <a:gd name="connsiteY1" fmla="*/ 931034 h 1262947"/>
-                <a:gd name="connsiteX2" fmla="*/ 1069029 w 1080000"/>
-                <a:gd name="connsiteY2" fmla="*/ 938533 h 1262947"/>
-                <a:gd name="connsiteX3" fmla="*/ 1080000 w 1080000"/>
-                <a:gd name="connsiteY3" fmla="*/ 992947 h 1262947"/>
-                <a:gd name="connsiteX4" fmla="*/ 540000 w 1080000"/>
-                <a:gd name="connsiteY4" fmla="*/ 1262947 h 1262947"/>
-                <a:gd name="connsiteX5" fmla="*/ 0 w 1080000"/>
-                <a:gd name="connsiteY5" fmla="*/ 992947 h 1262947"/>
-                <a:gd name="connsiteX6" fmla="*/ 10971 w 1080000"/>
-                <a:gd name="connsiteY6" fmla="*/ 938533 h 1262947"/>
-                <a:gd name="connsiteX7" fmla="*/ 15626 w 1080000"/>
-                <a:gd name="connsiteY7" fmla="*/ 931034 h 1262947"/>
-                <a:gd name="connsiteX8" fmla="*/ 540000 w 1080000"/>
-                <a:gd name="connsiteY8" fmla="*/ 0 h 1262947"/>
-              </a:gdLst>
-              <a:ahLst/>
-              <a:cxnLst>
-                <a:cxn ang="0">
-                  <a:pos x="connsiteX0" y="connsiteY0"/>
-                </a:cxn>
-                <a:cxn ang="0">
-                  <a:pos x="connsiteX1" y="connsiteY1"/>
-                </a:cxn>
-                <a:cxn ang="0">
-                  <a:pos x="connsiteX2" y="connsiteY2"/>
-                </a:cxn>
-                <a:cxn ang="0">
-                  <a:pos x="connsiteX3" y="connsiteY3"/>
-                </a:cxn>
-                <a:cxn ang="0">
-                  <a:pos x="connsiteX4" y="connsiteY4"/>
-                </a:cxn>
-                <a:cxn ang="0">
-                  <a:pos x="connsiteX5" y="connsiteY5"/>
-                </a:cxn>
-                <a:cxn ang="0">
-                  <a:pos x="connsiteX6" y="connsiteY6"/>
-                </a:cxn>
-                <a:cxn ang="0">
-                  <a:pos x="connsiteX7" y="connsiteY7"/>
-                </a:cxn>
-                <a:cxn ang="0">
-                  <a:pos x="connsiteX8" y="connsiteY8"/>
-                </a:cxn>
-              </a:cxnLst>
-              <a:rect l="l" t="t" r="r" b="b"/>
-              <a:pathLst>
-                <a:path w="1080000" h="1262947">
-                  <a:moveTo>
-                    <a:pt x="540000" y="0"/>
-                  </a:moveTo>
-                  <a:lnTo>
-                    <a:pt x="1064374" y="931034"/>
-                  </a:lnTo>
-                  <a:lnTo>
-                    <a:pt x="1069029" y="938533"/>
-                  </a:lnTo>
-                  <a:cubicBezTo>
-                    <a:pt x="1076223" y="956109"/>
-                    <a:pt x="1080000" y="974307"/>
-                    <a:pt x="1080000" y="992947"/>
-                  </a:cubicBezTo>
-                  <a:cubicBezTo>
-                    <a:pt x="1080000" y="1142064"/>
-                    <a:pt x="838234" y="1262947"/>
-                    <a:pt x="540000" y="1262947"/>
-                  </a:cubicBezTo>
-                  <a:cubicBezTo>
-                    <a:pt x="241766" y="1262947"/>
-                    <a:pt x="0" y="1142064"/>
-                    <a:pt x="0" y="992947"/>
-                  </a:cubicBezTo>
-                  <a:cubicBezTo>
-                    <a:pt x="0" y="974307"/>
-                    <a:pt x="3778" y="956109"/>
-                    <a:pt x="10971" y="938533"/>
-                  </a:cubicBezTo>
-                  <a:lnTo>
-                    <a:pt x="15626" y="931034"/>
-                  </a:lnTo>
-                  <a:lnTo>
-                    <a:pt x="540000" y="0"/>
-                  </a:lnTo>
-                  <a:close/>
-                </a:path>
-              </a:pathLst>
-            </a:custGeom>
-            <a:gradFill>
-              <a:gsLst>
-                <a:gs pos="60000">
-                  <a:schemeClr val="bg2">
-                    <a:lumMod val="90000"/>
-                    <a:lumOff val="10000"/>
-                  </a:schemeClr>
-                </a:gs>
-                <a:gs pos="30000">
-                  <a:schemeClr val="bg2">
-                    <a:lumMod val="90000"/>
-                    <a:lumOff val="10000"/>
-                  </a:schemeClr>
-                </a:gs>
-                <a:gs pos="40000">
-                  <a:schemeClr val="bg2">
-                    <a:lumMod val="80000"/>
-                    <a:lumOff val="20000"/>
-                  </a:schemeClr>
-                </a:gs>
-                <a:gs pos="100000">
-                  <a:schemeClr val="bg2"/>
-                </a:gs>
-              </a:gsLst>
-              <a:lin ang="600000" scaled="0"/>
-            </a:gradFill>
-            <a:ln>
-              <a:noFill/>
-            </a:ln>
-            <a:effectLst>
-              <a:innerShdw blurRad="254000" dist="101600" dir="7320000">
-                <a:schemeClr val="accent1">
-                  <a:lumMod val="60000"/>
-                  <a:lumOff val="40000"/>
-                  <a:alpha val="40000"/>
-                </a:schemeClr>
-              </a:innerShdw>
-            </a:effectLst>
-          </p:spPr>
-          <p:style>
-            <a:lnRef idx="2">
-              <a:schemeClr val="accent1">
-                <a:shade val="50000"/>
-              </a:schemeClr>
-            </a:lnRef>
-            <a:fillRef idx="1">
-              <a:schemeClr val="accent1"/>
-            </a:fillRef>
-            <a:effectRef idx="0">
-              <a:schemeClr val="accent1"/>
-            </a:effectRef>
-            <a:fontRef idx="minor">
-              <a:schemeClr val="lt1"/>
-            </a:fontRef>
-          </p:style>
-          <p:txBody>
-            <a:bodyPr rot="0" spcFirstLastPara="0" vertOverflow="overflow" horzOverflow="overflow" vert="horz" wrap="square" lIns="91440" tIns="45720" rIns="91440" bIns="45720" numCol="1" spcCol="0" rtlCol="0" fromWordArt="0" anchor="ctr" anchorCtr="0" forceAA="0" compatLnSpc="1">
-              <a:prstTxWarp prst="textNoShape">
-                <a:avLst/>
-              </a:prstTxWarp>
-              <a:noAutofit/>
-            </a:bodyPr>
-            <a:lstStyle>
-              <a:defPPr>
-                <a:defRPr lang="de-DE"/>
-              </a:defPPr>
-            </a:lstStyle>
-            <a:p>
-              <a:pPr algn="ctr" rtl="0"/>
-              <a:endParaRPr lang="de-DE" dirty="0"/>
-            </a:p>
-          </p:txBody>
-        </p:sp>
-        <p:sp>
-          <p:nvSpPr>
-            <p:cNvPr id="14" name="Ellipse 13">
-              <a:extLst>
-                <a:ext uri="{FF2B5EF4-FFF2-40B4-BE49-F238E27FC236}">
-                  <a16:creationId xmlns:a16="http://schemas.microsoft.com/office/drawing/2014/main" id="{59B74B85-E3CB-E24E-54C6-AB161411D93A}"/>
-                </a:ext>
-              </a:extLst>
-            </p:cNvPr>
-            <p:cNvSpPr/>
-            <p:nvPr/>
-          </p:nvSpPr>
-          <p:spPr>
-            <a:xfrm rot="13500000">
-              <a:off x="10415015" y="2179851"/>
-              <a:ext cx="540000" cy="1080000"/>
-            </a:xfrm>
-            <a:prstGeom prst="ellipse">
-              <a:avLst/>
-            </a:prstGeom>
-            <a:gradFill>
-              <a:gsLst>
-                <a:gs pos="100000">
-                  <a:schemeClr val="accent1">
-                    <a:lumMod val="60000"/>
-                    <a:lumOff val="40000"/>
-                    <a:alpha val="0"/>
-                  </a:schemeClr>
-                </a:gs>
-                <a:gs pos="0">
-                  <a:schemeClr val="bg2">
-                    <a:lumMod val="75000"/>
-                    <a:lumOff val="25000"/>
-                    <a:alpha val="33000"/>
-                  </a:schemeClr>
-                </a:gs>
-              </a:gsLst>
-              <a:lin ang="5400000" scaled="0"/>
-            </a:gradFill>
-            <a:ln>
-              <a:noFill/>
-            </a:ln>
-            <a:effectLst>
-              <a:innerShdw blurRad="1270000" dist="2540000">
-                <a:schemeClr val="accent1">
-                  <a:lumMod val="60000"/>
-                  <a:lumOff val="40000"/>
-                  <a:alpha val="0"/>
-                </a:schemeClr>
-              </a:innerShdw>
-            </a:effectLst>
-          </p:spPr>
-          <p:style>
-            <a:lnRef idx="2">
-              <a:schemeClr val="accent1">
-                <a:shade val="50000"/>
-              </a:schemeClr>
-            </a:lnRef>
-            <a:fillRef idx="1">
-              <a:schemeClr val="accent1"/>
-            </a:fillRef>
-            <a:effectRef idx="0">
-              <a:schemeClr val="accent1"/>
-            </a:effectRef>
-            <a:fontRef idx="minor">
-              <a:schemeClr val="lt1"/>
-            </a:fontRef>
-          </p:style>
-          <p:txBody>
-            <a:bodyPr rot="0" spcFirstLastPara="0" vertOverflow="overflow" horzOverflow="overflow" vert="horz" wrap="square" lIns="91440" tIns="45720" rIns="91440" bIns="45720" numCol="1" spcCol="0" rtlCol="0" fromWordArt="0" anchor="ctr" anchorCtr="0" forceAA="0" compatLnSpc="1">
-              <a:prstTxWarp prst="textNoShape">
-                <a:avLst/>
-              </a:prstTxWarp>
-              <a:noAutofit/>
-            </a:bodyPr>
-            <a:lstStyle>
-              <a:defPPr>
-                <a:defRPr lang="de-DE"/>
-              </a:defPPr>
-            </a:lstStyle>
-            <a:p>
-              <a:pPr algn="ctr" rtl="0"/>
-              <a:endParaRPr lang="de-DE" dirty="0"/>
-            </a:p>
-          </p:txBody>
-        </p:sp>
-      </p:grpSp>
-      <p:sp>
-        <p:nvSpPr>
-          <p:cNvPr id="15" name="Freihandform: Form 21">
-            <a:extLst>
-              <a:ext uri="{FF2B5EF4-FFF2-40B4-BE49-F238E27FC236}">
-                <a16:creationId xmlns:a16="http://schemas.microsoft.com/office/drawing/2014/main" id="{5781DEED-6608-D622-CA5E-C91FD8645ED6}"/>
-              </a:ext>
-              <a:ext uri="{C183D7F6-B498-43B3-948B-1728B52AA6E4}">
-                <adec:decorative xmlns:adec="http://schemas.microsoft.com/office/drawing/2017/decorative" val="1"/>
-              </a:ext>
-            </a:extLst>
-          </p:cNvPr>
-          <p:cNvSpPr>
-            <a:spLocks noChangeAspect="1"/>
-          </p:cNvSpPr>
-          <p:nvPr userDrawn="1"/>
-        </p:nvSpPr>
-        <p:spPr>
-          <a:xfrm>
-            <a:off x="4295775" y="0"/>
-            <a:ext cx="360000" cy="274638"/>
-          </a:xfrm>
-          <a:custGeom>
-            <a:avLst/>
-            <a:gdLst>
-              <a:gd name="connsiteX0" fmla="*/ 30714 w 360000"/>
-              <a:gd name="connsiteY0" fmla="*/ 0 h 274638"/>
-              <a:gd name="connsiteX1" fmla="*/ 329286 w 360000"/>
-              <a:gd name="connsiteY1" fmla="*/ 0 h 274638"/>
-              <a:gd name="connsiteX2" fmla="*/ 345855 w 360000"/>
-              <a:gd name="connsiteY2" fmla="*/ 24574 h 274638"/>
-              <a:gd name="connsiteX3" fmla="*/ 360000 w 360000"/>
-              <a:gd name="connsiteY3" fmla="*/ 94638 h 274638"/>
-              <a:gd name="connsiteX4" fmla="*/ 180000 w 360000"/>
-              <a:gd name="connsiteY4" fmla="*/ 274638 h 274638"/>
-              <a:gd name="connsiteX5" fmla="*/ 0 w 360000"/>
-              <a:gd name="connsiteY5" fmla="*/ 94638 h 274638"/>
-              <a:gd name="connsiteX6" fmla="*/ 14145 w 360000"/>
-              <a:gd name="connsiteY6" fmla="*/ 24574 h 274638"/>
-            </a:gdLst>
-            <a:ahLst/>
-            <a:cxnLst>
-              <a:cxn ang="0">
-                <a:pos x="connsiteX0" y="connsiteY0"/>
-              </a:cxn>
-              <a:cxn ang="0">
-                <a:pos x="connsiteX1" y="connsiteY1"/>
-              </a:cxn>
-              <a:cxn ang="0">
-                <a:pos x="connsiteX2" y="connsiteY2"/>
-              </a:cxn>
-              <a:cxn ang="0">
-                <a:pos x="connsiteX3" y="connsiteY3"/>
-              </a:cxn>
-              <a:cxn ang="0">
-                <a:pos x="connsiteX4" y="connsiteY4"/>
-              </a:cxn>
-              <a:cxn ang="0">
-                <a:pos x="connsiteX5" y="connsiteY5"/>
-              </a:cxn>
-              <a:cxn ang="0">
-                <a:pos x="connsiteX6" y="connsiteY6"/>
-              </a:cxn>
-            </a:cxnLst>
-            <a:rect l="l" t="t" r="r" b="b"/>
-            <a:pathLst>
-              <a:path w="360000" h="274638">
-                <a:moveTo>
-                  <a:pt x="30714" y="0"/>
-                </a:moveTo>
-                <a:lnTo>
-                  <a:pt x="329286" y="0"/>
-                </a:lnTo>
-                <a:lnTo>
-                  <a:pt x="345855" y="24574"/>
-                </a:lnTo>
-                <a:cubicBezTo>
-                  <a:pt x="354963" y="46109"/>
-                  <a:pt x="360000" y="69785"/>
-                  <a:pt x="360000" y="94638"/>
-                </a:cubicBezTo>
-                <a:cubicBezTo>
-                  <a:pt x="360000" y="194049"/>
-                  <a:pt x="279411" y="274638"/>
-                  <a:pt x="180000" y="274638"/>
-                </a:cubicBezTo>
-                <a:cubicBezTo>
-                  <a:pt x="80589" y="274638"/>
-                  <a:pt x="0" y="194049"/>
-                  <a:pt x="0" y="94638"/>
-                </a:cubicBezTo>
-                <a:cubicBezTo>
-                  <a:pt x="0" y="69785"/>
-                  <a:pt x="5037" y="46109"/>
-                  <a:pt x="14145" y="24574"/>
-                </a:cubicBezTo>
-                <a:close/>
-              </a:path>
-            </a:pathLst>
-          </a:custGeom>
-          <a:gradFill flip="none" rotWithShape="1">
-            <a:gsLst>
-              <a:gs pos="100000">
-                <a:schemeClr val="bg2">
-                  <a:lumMod val="50000"/>
-                  <a:lumOff val="50000"/>
-                </a:schemeClr>
-              </a:gs>
-              <a:gs pos="60000">
-                <a:schemeClr val="bg2"/>
-              </a:gs>
-            </a:gsLst>
-            <a:path path="circle">
-              <a:fillToRect l="100000" b="100000"/>
-            </a:path>
-            <a:tileRect t="-100000" r="-100000"/>
-          </a:gradFill>
-          <a:ln>
-            <a:noFill/>
-          </a:ln>
-          <a:effectLst>
-            <a:innerShdw blurRad="127000" dist="63500" dir="2700000">
-              <a:schemeClr val="accent1">
-                <a:lumMod val="60000"/>
-                <a:lumOff val="40000"/>
-                <a:alpha val="20000"/>
-              </a:schemeClr>
-            </a:innerShdw>
-            <a:softEdge rad="0"/>
-          </a:effectLst>
-        </p:spPr>
-        <p:style>
-          <a:lnRef idx="2">
-            <a:schemeClr val="accent1">
-              <a:shade val="50000"/>
-            </a:schemeClr>
-          </a:lnRef>
-          <a:fillRef idx="1">
-            <a:schemeClr val="accent1"/>
-          </a:fillRef>
-          <a:effectRef idx="0">
-            <a:schemeClr val="accent1"/>
-          </a:effectRef>
-          <a:fontRef idx="minor">
-            <a:schemeClr val="lt1"/>
-          </a:fontRef>
-        </p:style>
-        <p:txBody>
-          <a:bodyPr rot="0" spcFirstLastPara="0" vertOverflow="overflow" horzOverflow="overflow" vert="horz" wrap="square" lIns="91440" tIns="45720" rIns="91440" bIns="45720" numCol="1" spcCol="0" rtlCol="0" fromWordArt="0" anchor="ctr" anchorCtr="0" forceAA="0" compatLnSpc="1">
-            <a:prstTxWarp prst="textNoShape">
-              <a:avLst/>
-            </a:prstTxWarp>
-            <a:noAutofit/>
-          </a:bodyPr>
-          <a:lstStyle>
-            <a:defPPr>
-              <a:defRPr lang="de-DE"/>
-            </a:defPPr>
-          </a:lstStyle>
-          <a:p>
-            <a:pPr algn="ctr" rtl="0"/>
-            <a:endParaRPr lang="de-DE" dirty="0"/>
-          </a:p>
-        </p:txBody>
-      </p:sp>
-      <p:grpSp>
-        <p:nvGrpSpPr>
-          <p:cNvPr id="13" name="Gruppieren 12">
-            <a:extLst>
-              <a:ext uri="{FF2B5EF4-FFF2-40B4-BE49-F238E27FC236}">
-                <a16:creationId xmlns:a16="http://schemas.microsoft.com/office/drawing/2014/main" id="{168347B7-45FA-4A01-924D-DC385B720B3E}"/>
-              </a:ext>
-              <a:ext uri="{C183D7F6-B498-43B3-948B-1728B52AA6E4}">
-                <adec:decorative xmlns:adec="http://schemas.microsoft.com/office/drawing/2017/decorative" val="1"/>
-              </a:ext>
-            </a:extLst>
-          </p:cNvPr>
-          <p:cNvGrpSpPr/>
-          <p:nvPr/>
-        </p:nvGrpSpPr>
-        <p:grpSpPr>
-          <a:xfrm>
-            <a:off x="331786" y="5528198"/>
-            <a:ext cx="631474" cy="667800"/>
-            <a:chOff x="2994153" y="1378666"/>
-            <a:chExt cx="631474" cy="667800"/>
-          </a:xfrm>
-        </p:grpSpPr>
-        <p:sp>
-          <p:nvSpPr>
-            <p:cNvPr id="20" name="Freihandform: Form 19">
-              <a:extLst>
-                <a:ext uri="{FF2B5EF4-FFF2-40B4-BE49-F238E27FC236}">
-                  <a16:creationId xmlns:a16="http://schemas.microsoft.com/office/drawing/2014/main" id="{31167DA1-25D1-4E60-A62E-42B6F56A96EC}"/>
-                </a:ext>
-              </a:extLst>
-            </p:cNvPr>
-            <p:cNvSpPr>
-              <a:spLocks noChangeAspect="1"/>
-            </p:cNvSpPr>
-            <p:nvPr/>
-          </p:nvSpPr>
-          <p:spPr>
-            <a:xfrm rot="2700000">
-              <a:off x="3039890" y="1332929"/>
-              <a:ext cx="540000" cy="631474"/>
-            </a:xfrm>
-            <a:custGeom>
-              <a:avLst/>
-              <a:gdLst>
-                <a:gd name="connsiteX0" fmla="*/ 540000 w 1080000"/>
-                <a:gd name="connsiteY0" fmla="*/ 0 h 1262947"/>
-                <a:gd name="connsiteX1" fmla="*/ 1080000 w 1080000"/>
-                <a:gd name="connsiteY1" fmla="*/ 931034 h 1262947"/>
-                <a:gd name="connsiteX2" fmla="*/ 1064374 w 1080000"/>
-                <a:gd name="connsiteY2" fmla="*/ 931034 h 1262947"/>
-                <a:gd name="connsiteX3" fmla="*/ 1069029 w 1080000"/>
-                <a:gd name="connsiteY3" fmla="*/ 938533 h 1262947"/>
-                <a:gd name="connsiteX4" fmla="*/ 1080000 w 1080000"/>
-                <a:gd name="connsiteY4" fmla="*/ 992947 h 1262947"/>
-                <a:gd name="connsiteX5" fmla="*/ 540000 w 1080000"/>
-                <a:gd name="connsiteY5" fmla="*/ 1262947 h 1262947"/>
-                <a:gd name="connsiteX6" fmla="*/ 0 w 1080000"/>
-                <a:gd name="connsiteY6" fmla="*/ 992947 h 1262947"/>
-                <a:gd name="connsiteX7" fmla="*/ 10971 w 1080000"/>
-                <a:gd name="connsiteY7" fmla="*/ 938533 h 1262947"/>
-                <a:gd name="connsiteX8" fmla="*/ 15626 w 1080000"/>
-                <a:gd name="connsiteY8" fmla="*/ 931034 h 1262947"/>
-                <a:gd name="connsiteX9" fmla="*/ 0 w 1080000"/>
-                <a:gd name="connsiteY9" fmla="*/ 931034 h 1262947"/>
-                <a:gd name="connsiteX0" fmla="*/ 540000 w 1080000"/>
-                <a:gd name="connsiteY0" fmla="*/ 0 h 1262947"/>
-                <a:gd name="connsiteX1" fmla="*/ 1080000 w 1080000"/>
-                <a:gd name="connsiteY1" fmla="*/ 931034 h 1262947"/>
-                <a:gd name="connsiteX2" fmla="*/ 1064374 w 1080000"/>
-                <a:gd name="connsiteY2" fmla="*/ 931034 h 1262947"/>
-                <a:gd name="connsiteX3" fmla="*/ 1069029 w 1080000"/>
-                <a:gd name="connsiteY3" fmla="*/ 938533 h 1262947"/>
-                <a:gd name="connsiteX4" fmla="*/ 1080000 w 1080000"/>
-                <a:gd name="connsiteY4" fmla="*/ 992947 h 1262947"/>
-                <a:gd name="connsiteX5" fmla="*/ 540000 w 1080000"/>
-                <a:gd name="connsiteY5" fmla="*/ 1262947 h 1262947"/>
-                <a:gd name="connsiteX6" fmla="*/ 0 w 1080000"/>
-                <a:gd name="connsiteY6" fmla="*/ 992947 h 1262947"/>
-                <a:gd name="connsiteX7" fmla="*/ 10971 w 1080000"/>
-                <a:gd name="connsiteY7" fmla="*/ 938533 h 1262947"/>
-                <a:gd name="connsiteX8" fmla="*/ 15626 w 1080000"/>
-                <a:gd name="connsiteY8" fmla="*/ 931034 h 1262947"/>
-                <a:gd name="connsiteX9" fmla="*/ 540000 w 1080000"/>
-                <a:gd name="connsiteY9" fmla="*/ 0 h 1262947"/>
-                <a:gd name="connsiteX0" fmla="*/ 540000 w 1080000"/>
-                <a:gd name="connsiteY0" fmla="*/ 0 h 1262947"/>
-                <a:gd name="connsiteX1" fmla="*/ 1064374 w 1080000"/>
-                <a:gd name="connsiteY1" fmla="*/ 931034 h 1262947"/>
-                <a:gd name="connsiteX2" fmla="*/ 1069029 w 1080000"/>
-                <a:gd name="connsiteY2" fmla="*/ 938533 h 1262947"/>
-                <a:gd name="connsiteX3" fmla="*/ 1080000 w 1080000"/>
-                <a:gd name="connsiteY3" fmla="*/ 992947 h 1262947"/>
-                <a:gd name="connsiteX4" fmla="*/ 540000 w 1080000"/>
-                <a:gd name="connsiteY4" fmla="*/ 1262947 h 1262947"/>
-                <a:gd name="connsiteX5" fmla="*/ 0 w 1080000"/>
-                <a:gd name="connsiteY5" fmla="*/ 992947 h 1262947"/>
-                <a:gd name="connsiteX6" fmla="*/ 10971 w 1080000"/>
-                <a:gd name="connsiteY6" fmla="*/ 938533 h 1262947"/>
-                <a:gd name="connsiteX7" fmla="*/ 15626 w 1080000"/>
-                <a:gd name="connsiteY7" fmla="*/ 931034 h 1262947"/>
-                <a:gd name="connsiteX8" fmla="*/ 540000 w 1080000"/>
-                <a:gd name="connsiteY8" fmla="*/ 0 h 1262947"/>
-              </a:gdLst>
-              <a:ahLst/>
-              <a:cxnLst>
-                <a:cxn ang="0">
-                  <a:pos x="connsiteX0" y="connsiteY0"/>
-                </a:cxn>
-                <a:cxn ang="0">
-                  <a:pos x="connsiteX1" y="connsiteY1"/>
-                </a:cxn>
-                <a:cxn ang="0">
-                  <a:pos x="connsiteX2" y="connsiteY2"/>
-                </a:cxn>
-                <a:cxn ang="0">
-                  <a:pos x="connsiteX3" y="connsiteY3"/>
-                </a:cxn>
-                <a:cxn ang="0">
-                  <a:pos x="connsiteX4" y="connsiteY4"/>
-                </a:cxn>
-                <a:cxn ang="0">
-                  <a:pos x="connsiteX5" y="connsiteY5"/>
-                </a:cxn>
-                <a:cxn ang="0">
-                  <a:pos x="connsiteX6" y="connsiteY6"/>
-                </a:cxn>
-                <a:cxn ang="0">
-                  <a:pos x="connsiteX7" y="connsiteY7"/>
-                </a:cxn>
-                <a:cxn ang="0">
-                  <a:pos x="connsiteX8" y="connsiteY8"/>
-                </a:cxn>
-              </a:cxnLst>
-              <a:rect l="l" t="t" r="r" b="b"/>
-              <a:pathLst>
-                <a:path w="1080000" h="1262947">
-                  <a:moveTo>
-                    <a:pt x="540000" y="0"/>
-                  </a:moveTo>
-                  <a:lnTo>
-                    <a:pt x="1064374" y="931034"/>
-                  </a:lnTo>
-                  <a:lnTo>
-                    <a:pt x="1069029" y="938533"/>
-                  </a:lnTo>
-                  <a:cubicBezTo>
-                    <a:pt x="1076223" y="956109"/>
-                    <a:pt x="1080000" y="974307"/>
-                    <a:pt x="1080000" y="992947"/>
-                  </a:cubicBezTo>
-                  <a:cubicBezTo>
-                    <a:pt x="1080000" y="1142064"/>
-                    <a:pt x="838234" y="1262947"/>
-                    <a:pt x="540000" y="1262947"/>
-                  </a:cubicBezTo>
-                  <a:cubicBezTo>
-                    <a:pt x="241766" y="1262947"/>
-                    <a:pt x="0" y="1142064"/>
-                    <a:pt x="0" y="992947"/>
-                  </a:cubicBezTo>
-                  <a:cubicBezTo>
-                    <a:pt x="0" y="974307"/>
-                    <a:pt x="3778" y="956109"/>
-                    <a:pt x="10971" y="938533"/>
-                  </a:cubicBezTo>
-                  <a:lnTo>
-                    <a:pt x="15626" y="931034"/>
-                  </a:lnTo>
-                  <a:lnTo>
-                    <a:pt x="540000" y="0"/>
-                  </a:lnTo>
-                  <a:close/>
-                </a:path>
-              </a:pathLst>
-            </a:custGeom>
-            <a:gradFill>
-              <a:gsLst>
-                <a:gs pos="60000">
-                  <a:schemeClr val="bg2">
-                    <a:lumMod val="90000"/>
-                    <a:lumOff val="10000"/>
-                  </a:schemeClr>
-                </a:gs>
-                <a:gs pos="30000">
-                  <a:schemeClr val="bg2">
-                    <a:lumMod val="90000"/>
-                    <a:lumOff val="10000"/>
-                  </a:schemeClr>
-                </a:gs>
-                <a:gs pos="40000">
-                  <a:schemeClr val="bg2">
-                    <a:lumMod val="75000"/>
-                    <a:lumOff val="25000"/>
-                  </a:schemeClr>
-                </a:gs>
-                <a:gs pos="100000">
-                  <a:schemeClr val="bg2"/>
-                </a:gs>
-              </a:gsLst>
-              <a:lin ang="600000" scaled="0"/>
-            </a:gradFill>
-            <a:ln>
-              <a:noFill/>
-            </a:ln>
-            <a:effectLst>
-              <a:innerShdw blurRad="254000" dist="101600" dir="2700000">
-                <a:schemeClr val="accent1">
-                  <a:lumMod val="60000"/>
-                  <a:lumOff val="40000"/>
-                  <a:alpha val="20000"/>
-                </a:schemeClr>
-              </a:innerShdw>
-            </a:effectLst>
-          </p:spPr>
-          <p:style>
-            <a:lnRef idx="2">
-              <a:schemeClr val="accent1">
-                <a:shade val="50000"/>
-              </a:schemeClr>
-            </a:lnRef>
-            <a:fillRef idx="1">
-              <a:schemeClr val="accent1"/>
-            </a:fillRef>
-            <a:effectRef idx="0">
-              <a:schemeClr val="accent1"/>
-            </a:effectRef>
-            <a:fontRef idx="minor">
-              <a:schemeClr val="lt1"/>
-            </a:fontRef>
-          </p:style>
-          <p:txBody>
-            <a:bodyPr rot="0" spcFirstLastPara="0" vertOverflow="overflow" horzOverflow="overflow" vert="horz" wrap="square" lIns="91440" tIns="45720" rIns="91440" bIns="45720" numCol="1" spcCol="0" rtlCol="0" fromWordArt="0" anchor="ctr" anchorCtr="0" forceAA="0" compatLnSpc="1">
-              <a:prstTxWarp prst="textNoShape">
-                <a:avLst/>
-              </a:prstTxWarp>
-              <a:noAutofit/>
-            </a:bodyPr>
-            <a:lstStyle>
-              <a:defPPr>
-                <a:defRPr lang="de-DE"/>
-              </a:defPPr>
-            </a:lstStyle>
-            <a:p>
-              <a:pPr algn="ctr" rtl="0"/>
-              <a:endParaRPr lang="de-DE" dirty="0"/>
-            </a:p>
-          </p:txBody>
-        </p:sp>
-        <p:sp>
-          <p:nvSpPr>
-            <p:cNvPr id="21" name="Ellipse 20">
-              <a:extLst>
-                <a:ext uri="{FF2B5EF4-FFF2-40B4-BE49-F238E27FC236}">
-                  <a16:creationId xmlns:a16="http://schemas.microsoft.com/office/drawing/2014/main" id="{6B7B7215-A661-477E-91D0-CDBE5564D2B9}"/>
-                </a:ext>
-              </a:extLst>
-            </p:cNvPr>
-            <p:cNvSpPr/>
-            <p:nvPr/>
-          </p:nvSpPr>
-          <p:spPr>
-            <a:xfrm rot="8100000">
-              <a:off x="3047090" y="1506466"/>
-              <a:ext cx="270000" cy="540000"/>
-            </a:xfrm>
-            <a:prstGeom prst="ellipse">
-              <a:avLst/>
-            </a:prstGeom>
-            <a:gradFill>
-              <a:gsLst>
-                <a:gs pos="100000">
-                  <a:schemeClr val="bg2">
-                    <a:lumMod val="90000"/>
-                    <a:lumOff val="10000"/>
-                  </a:schemeClr>
-                </a:gs>
-                <a:gs pos="50000">
-                  <a:schemeClr val="bg2">
-                    <a:lumMod val="95000"/>
-                    <a:lumOff val="5000"/>
-                  </a:schemeClr>
-                </a:gs>
-              </a:gsLst>
-              <a:lin ang="5400000" scaled="0"/>
-            </a:gradFill>
-            <a:ln>
-              <a:noFill/>
-            </a:ln>
-            <a:effectLst>
-              <a:innerShdw blurRad="1270000" dist="2540000">
-                <a:schemeClr val="accent1">
-                  <a:lumMod val="60000"/>
-                  <a:lumOff val="40000"/>
-                  <a:alpha val="0"/>
-                </a:schemeClr>
-              </a:innerShdw>
-            </a:effectLst>
-          </p:spPr>
-          <p:style>
-            <a:lnRef idx="2">
-              <a:schemeClr val="accent1">
-                <a:shade val="50000"/>
-              </a:schemeClr>
-            </a:lnRef>
-            <a:fillRef idx="1">
-              <a:schemeClr val="accent1"/>
-            </a:fillRef>
-            <a:effectRef idx="0">
-              <a:schemeClr val="accent1"/>
-            </a:effectRef>
-            <a:fontRef idx="minor">
-              <a:schemeClr val="lt1"/>
-            </a:fontRef>
-          </p:style>
-          <p:txBody>
-            <a:bodyPr rot="0" spcFirstLastPara="0" vertOverflow="overflow" horzOverflow="overflow" vert="horz" wrap="square" lIns="91440" tIns="45720" rIns="91440" bIns="45720" numCol="1" spcCol="0" rtlCol="0" fromWordArt="0" anchor="ctr" anchorCtr="0" forceAA="0" compatLnSpc="1">
-              <a:prstTxWarp prst="textNoShape">
-                <a:avLst/>
-              </a:prstTxWarp>
-              <a:noAutofit/>
-            </a:bodyPr>
-            <a:lstStyle>
-              <a:defPPr>
-                <a:defRPr lang="de-DE"/>
-              </a:defPPr>
-            </a:lstStyle>
-            <a:p>
-              <a:pPr algn="ctr" rtl="0"/>
-              <a:endParaRPr lang="de-DE" dirty="0"/>
-            </a:p>
-          </p:txBody>
-        </p:sp>
-      </p:grpSp>
-      <p:sp>
-        <p:nvSpPr>
-          <p:cNvPr id="3" name="Inhaltsplatzhalter 2">
-            <a:extLst>
-              <a:ext uri="{FF2B5EF4-FFF2-40B4-BE49-F238E27FC236}">
-                <a16:creationId xmlns:a16="http://schemas.microsoft.com/office/drawing/2014/main" id="{02C6BF36-D4F5-4363-B440-BDAE50BBD4B6}"/>
-              </a:ext>
-            </a:extLst>
-          </p:cNvPr>
-          <p:cNvSpPr>
-            <a:spLocks noGrp="1"/>
-          </p:cNvSpPr>
-          <p:nvPr>
-            <p:ph sz="half" idx="1" hasCustomPrompt="1"/>
-          </p:nvPr>
-        </p:nvSpPr>
-        <p:spPr>
-          <a:xfrm>
-            <a:off x="550862" y="1965095"/>
-            <a:ext cx="5435600" cy="3995650"/>
-          </a:xfrm>
-        </p:spPr>
-        <p:txBody>
-          <a:bodyPr rtlCol="0">
-            <a:normAutofit/>
-          </a:bodyPr>
-          <a:lstStyle>
-            <a:lvl1pPr marL="0" indent="0">
-              <a:buNone/>
-              <a:defRPr lang="de-DE" sz="1800">
-                <a:solidFill>
-                  <a:schemeClr val="tx1"/>
-                </a:solidFill>
-              </a:defRPr>
-            </a:lvl1pPr>
-            <a:lvl2pPr>
-              <a:defRPr lang="de-DE" sz="1800">
-                <a:solidFill>
-                  <a:schemeClr val="tx1"/>
-                </a:solidFill>
-              </a:defRPr>
-            </a:lvl2pPr>
-            <a:lvl3pPr>
-              <a:defRPr lang="de-DE" sz="1800">
-                <a:solidFill>
-                  <a:schemeClr val="tx1"/>
-                </a:solidFill>
-              </a:defRPr>
-            </a:lvl3pPr>
-            <a:lvl4pPr>
-              <a:defRPr lang="de-DE" sz="1800">
-                <a:solidFill>
-                  <a:schemeClr val="tx1"/>
-                </a:solidFill>
-              </a:defRPr>
-            </a:lvl4pPr>
-            <a:lvl5pPr>
-              <a:defRPr lang="de-DE" sz="1800">
-                <a:solidFill>
-                  <a:schemeClr val="tx1"/>
-                </a:solidFill>
-              </a:defRPr>
-            </a:lvl5pPr>
-          </a:lstStyle>
-          <a:p>
-            <a:pPr lvl="0" rtl="0"/>
-            <a:r>
-              <a:rPr lang="de-DE"/>
-              <a:t>Klicken, um Inhalt hinzuzufügen</a:t>
-            </a:r>
-          </a:p>
-          <a:p>
-            <a:pPr lvl="1" rtl="0"/>
-            <a:r>
-              <a:rPr lang="de-DE"/>
-              <a:t>Zweite Ebene</a:t>
-            </a:r>
-          </a:p>
-          <a:p>
-            <a:pPr lvl="2" rtl="0"/>
-            <a:r>
-              <a:rPr lang="de-DE"/>
-              <a:t>Dritte Ebene</a:t>
-            </a:r>
-          </a:p>
-          <a:p>
-            <a:pPr lvl="3" rtl="0"/>
-            <a:r>
-              <a:rPr lang="de-DE"/>
-              <a:t>Vierte Ebene</a:t>
-            </a:r>
-          </a:p>
-          <a:p>
-            <a:pPr lvl="4" rtl="0"/>
-            <a:r>
-              <a:rPr lang="de-DE"/>
-              <a:t>Fünfte Ebene</a:t>
-            </a:r>
-          </a:p>
-        </p:txBody>
-      </p:sp>
-      <p:sp>
-        <p:nvSpPr>
-          <p:cNvPr id="16" name="Inhaltsplatzhalter 2">
-            <a:extLst>
-              <a:ext uri="{FF2B5EF4-FFF2-40B4-BE49-F238E27FC236}">
-                <a16:creationId xmlns:a16="http://schemas.microsoft.com/office/drawing/2014/main" id="{C4B946DE-F802-2F36-2789-09D7F8604081}"/>
-              </a:ext>
-            </a:extLst>
-          </p:cNvPr>
-          <p:cNvSpPr>
-            <a:spLocks noGrp="1"/>
-          </p:cNvSpPr>
-          <p:nvPr>
-            <p:ph sz="half" idx="13" hasCustomPrompt="1"/>
-          </p:nvPr>
-        </p:nvSpPr>
-        <p:spPr>
-          <a:xfrm>
-            <a:off x="6301305" y="1965095"/>
-            <a:ext cx="5339397" cy="3995650"/>
-          </a:xfrm>
-        </p:spPr>
-        <p:txBody>
-          <a:bodyPr rtlCol="0">
-            <a:normAutofit/>
-          </a:bodyPr>
-          <a:lstStyle>
-            <a:lvl1pPr marL="0" indent="0">
-              <a:buNone/>
-              <a:defRPr lang="de-DE" sz="1800">
-                <a:solidFill>
-                  <a:schemeClr val="tx1"/>
-                </a:solidFill>
-              </a:defRPr>
-            </a:lvl1pPr>
-            <a:lvl2pPr>
-              <a:defRPr lang="de-DE" sz="1800">
-                <a:solidFill>
-                  <a:schemeClr val="tx1"/>
-                </a:solidFill>
-              </a:defRPr>
-            </a:lvl2pPr>
-            <a:lvl3pPr>
-              <a:defRPr lang="de-DE" sz="1800">
-                <a:solidFill>
-                  <a:schemeClr val="tx1"/>
-                </a:solidFill>
-              </a:defRPr>
-            </a:lvl3pPr>
-            <a:lvl4pPr>
-              <a:defRPr lang="de-DE" sz="1800">
-                <a:solidFill>
-                  <a:schemeClr val="tx1"/>
-                </a:solidFill>
-              </a:defRPr>
-            </a:lvl4pPr>
-            <a:lvl5pPr>
-              <a:defRPr lang="de-DE" sz="1800">
-                <a:solidFill>
-                  <a:schemeClr val="tx1"/>
-                </a:solidFill>
-              </a:defRPr>
-            </a:lvl5pPr>
-          </a:lstStyle>
-          <a:p>
-            <a:pPr lvl="0" rtl="0"/>
-            <a:r>
-              <a:rPr lang="de-DE"/>
-              <a:t>Klicken, um Inhalt hinzuzufügen</a:t>
-            </a:r>
-          </a:p>
-          <a:p>
-            <a:pPr lvl="1" rtl="0"/>
-            <a:r>
-              <a:rPr lang="de-DE"/>
-              <a:t>Zweite Ebene</a:t>
-            </a:r>
-          </a:p>
-          <a:p>
-            <a:pPr lvl="2" rtl="0"/>
-            <a:r>
-              <a:rPr lang="de-DE"/>
-              <a:t>Dritte Ebene</a:t>
-            </a:r>
-          </a:p>
-          <a:p>
-            <a:pPr lvl="3" rtl="0"/>
-            <a:r>
-              <a:rPr lang="de-DE"/>
-              <a:t>Vierte Ebene</a:t>
-            </a:r>
-          </a:p>
-          <a:p>
-            <a:pPr lvl="4" rtl="0"/>
-            <a:r>
-              <a:rPr lang="de-DE"/>
-              <a:t>Fünfte Ebene</a:t>
-            </a:r>
-          </a:p>
-        </p:txBody>
-      </p:sp>
-      <p:sp>
-        <p:nvSpPr>
-          <p:cNvPr id="5" name="Datumsplatzhalter 4">
-            <a:extLst>
-              <a:ext uri="{FF2B5EF4-FFF2-40B4-BE49-F238E27FC236}">
-                <a16:creationId xmlns:a16="http://schemas.microsoft.com/office/drawing/2014/main" id="{BB99A8AF-0998-4613-B1D8-C14ECBFFDF67}"/>
-              </a:ext>
-            </a:extLst>
-          </p:cNvPr>
-          <p:cNvSpPr>
-            <a:spLocks noGrp="1"/>
-          </p:cNvSpPr>
-          <p:nvPr>
-            <p:ph type="dt" sz="half" idx="10"/>
-          </p:nvPr>
-        </p:nvSpPr>
-        <p:spPr/>
-        <p:txBody>
-          <a:bodyPr rtlCol="0"/>
-          <a:lstStyle>
-            <a:defPPr>
-              <a:defRPr lang="de-DE"/>
-            </a:defPPr>
-          </a:lstStyle>
-          <a:p>
-            <a:pPr rtl="0"/>
-            <a:r>
-              <a:rPr lang="de-DE"/>
-              <a:t>20XX</a:t>
-            </a:r>
-            <a:endParaRPr lang="de-DE" dirty="0"/>
-          </a:p>
-        </p:txBody>
-      </p:sp>
-      <p:sp>
-        <p:nvSpPr>
-          <p:cNvPr id="6" name="Fußzeilenplatzhalter 5">
-            <a:extLst>
-              <a:ext uri="{FF2B5EF4-FFF2-40B4-BE49-F238E27FC236}">
-                <a16:creationId xmlns:a16="http://schemas.microsoft.com/office/drawing/2014/main" id="{66E44EAA-B8A9-4428-A9DF-1174DA940990}"/>
-              </a:ext>
-            </a:extLst>
-          </p:cNvPr>
-          <p:cNvSpPr>
-            <a:spLocks noGrp="1"/>
-          </p:cNvSpPr>
-          <p:nvPr>
-            <p:ph type="ftr" sz="quarter" idx="11"/>
-          </p:nvPr>
-        </p:nvSpPr>
-        <p:spPr/>
-        <p:txBody>
-          <a:bodyPr rtlCol="0"/>
-          <a:lstStyle>
-            <a:defPPr>
-              <a:defRPr lang="de-DE"/>
-            </a:defPPr>
-          </a:lstStyle>
-          <a:p>
-            <a:pPr rtl="0"/>
-            <a:endParaRPr lang="de-DE" dirty="0"/>
-          </a:p>
-        </p:txBody>
-      </p:sp>
-      <p:sp>
-        <p:nvSpPr>
-          <p:cNvPr id="7" name="Foliennummernplatzhalter 6">
-            <a:extLst>
-              <a:ext uri="{FF2B5EF4-FFF2-40B4-BE49-F238E27FC236}">
-                <a16:creationId xmlns:a16="http://schemas.microsoft.com/office/drawing/2014/main" id="{19E5C381-C899-4BF9-B584-2D78074D1CB2}"/>
-              </a:ext>
-            </a:extLst>
-          </p:cNvPr>
-          <p:cNvSpPr>
-            <a:spLocks noGrp="1"/>
-          </p:cNvSpPr>
-          <p:nvPr>
-            <p:ph type="sldNum" sz="quarter" idx="12"/>
-          </p:nvPr>
-        </p:nvSpPr>
-        <p:spPr/>
-        <p:txBody>
-          <a:bodyPr rtlCol="0"/>
-          <a:lstStyle>
-            <a:defPPr>
-              <a:defRPr lang="de-DE"/>
-            </a:defPPr>
-          </a:lstStyle>
-          <a:p>
-            <a:pPr rtl="0"/>
-            <a:fld id="{DBA1B0FB-D917-4C8C-928F-313BD683BF39}" type="slidenum">
-              <a:rPr lang="de-DE" smtClean="0"/>
-              <a:t>‹Nr.›</a:t>
-            </a:fld>
-            <a:endParaRPr lang="de-DE" dirty="0"/>
-          </a:p>
-        </p:txBody>
-      </p:sp>
-    </p:spTree>
-    <p:extLst>
-      <p:ext uri="{BB962C8B-B14F-4D97-AF65-F5344CB8AC3E}">
-        <p14:creationId xmlns:p14="http://schemas.microsoft.com/office/powerpoint/2010/main" val="3617165047"/>
-      </p:ext>
-    </p:extLst>
-  </p:cSld>
-  <p:clrMapOvr>
-    <a:masterClrMapping/>
-  </p:clrMapOvr>
-</p:sldLayout>
-</file>
-
-<file path=ppt/slideLayouts/slideLayout11.xml><?xml version="1.0" encoding="utf-8"?>
-<p:sldLayout xmlns:a="http://schemas.openxmlformats.org/drawingml/2006/main" xmlns:r="http://schemas.openxmlformats.org/officeDocument/2006/relationships" xmlns:p="http://schemas.openxmlformats.org/presentationml/2006/main" userDrawn="1">
-  <p:cSld name="Tabelle">
-    <p:spTree>
-      <p:nvGrpSpPr>
-        <p:cNvPr id="1" name=""/>
-        <p:cNvGrpSpPr/>
-        <p:nvPr/>
-      </p:nvGrpSpPr>
-      <p:grpSpPr>
-        <a:xfrm>
-          <a:off x="0" y="0"/>
-          <a:ext cx="0" cy="0"/>
-          <a:chOff x="0" y="0"/>
-          <a:chExt cx="0" cy="0"/>
-        </a:xfrm>
-      </p:grpSpPr>
-      <p:sp>
-        <p:nvSpPr>
-          <p:cNvPr id="2" name="Titel 1">
-            <a:extLst>
-              <a:ext uri="{FF2B5EF4-FFF2-40B4-BE49-F238E27FC236}">
-                <a16:creationId xmlns:a16="http://schemas.microsoft.com/office/drawing/2014/main" id="{F657BD59-35CC-9BB3-8621-6FA3356F81AA}"/>
-              </a:ext>
-            </a:extLst>
-          </p:cNvPr>
-          <p:cNvSpPr>
-            <a:spLocks noGrp="1"/>
-          </p:cNvSpPr>
-          <p:nvPr>
-            <p:ph type="title" hasCustomPrompt="1"/>
-          </p:nvPr>
-        </p:nvSpPr>
-        <p:spPr>
-          <a:xfrm>
-            <a:off x="550863" y="560961"/>
-            <a:ext cx="11090275" cy="1186560"/>
-          </a:xfrm>
-        </p:spPr>
-        <p:txBody>
-          <a:bodyPr rtlCol="0" anchor="t" anchorCtr="0">
-            <a:noAutofit/>
-          </a:bodyPr>
-          <a:lstStyle>
-            <a:lvl1pPr>
-              <a:defRPr lang="de-DE" sz="4000"/>
-            </a:lvl1pPr>
-          </a:lstStyle>
-          <a:p>
-            <a:pPr rtl="0"/>
-            <a:r>
-              <a:rPr lang="de-DE"/>
-              <a:t>Titel durch Klicken hinzufügen</a:t>
-            </a:r>
-          </a:p>
-        </p:txBody>
-      </p:sp>
-      <p:sp>
-        <p:nvSpPr>
-          <p:cNvPr id="4" name="Datumsplatzhalter 3">
-            <a:extLst>
-              <a:ext uri="{FF2B5EF4-FFF2-40B4-BE49-F238E27FC236}">
-                <a16:creationId xmlns:a16="http://schemas.microsoft.com/office/drawing/2014/main" id="{8C56EB0F-63C8-5F75-A333-3413A9DC6F76}"/>
-              </a:ext>
-            </a:extLst>
-          </p:cNvPr>
-          <p:cNvSpPr>
-            <a:spLocks noGrp="1"/>
-          </p:cNvSpPr>
-          <p:nvPr>
-            <p:ph type="dt" sz="half" idx="10"/>
-          </p:nvPr>
-        </p:nvSpPr>
-        <p:spPr/>
-        <p:txBody>
-          <a:bodyPr rtlCol="0"/>
-          <a:lstStyle>
-            <a:defPPr>
-              <a:defRPr lang="de-DE"/>
-            </a:defPPr>
-          </a:lstStyle>
-          <a:p>
-            <a:pPr rtl="0"/>
-            <a:r>
-              <a:rPr lang="de-DE"/>
-              <a:t>20XX</a:t>
-            </a:r>
-            <a:endParaRPr lang="de-DE" dirty="0"/>
-          </a:p>
-        </p:txBody>
-      </p:sp>
-      <p:sp>
-        <p:nvSpPr>
-          <p:cNvPr id="5" name="Fußzeilenplatzhalter 4">
-            <a:extLst>
-              <a:ext uri="{FF2B5EF4-FFF2-40B4-BE49-F238E27FC236}">
-                <a16:creationId xmlns:a16="http://schemas.microsoft.com/office/drawing/2014/main" id="{4D4DE333-25B4-E092-1CC4-C3D20BA25168}"/>
-              </a:ext>
-            </a:extLst>
-          </p:cNvPr>
-          <p:cNvSpPr>
-            <a:spLocks noGrp="1"/>
-          </p:cNvSpPr>
-          <p:nvPr>
-            <p:ph type="ftr" sz="quarter" idx="11"/>
-          </p:nvPr>
-        </p:nvSpPr>
-        <p:spPr/>
-        <p:txBody>
-          <a:bodyPr rtlCol="0"/>
-          <a:lstStyle>
-            <a:defPPr>
-              <a:defRPr lang="de-DE"/>
-            </a:defPPr>
-          </a:lstStyle>
-          <a:p>
-            <a:pPr rtl="0"/>
-            <a:endParaRPr lang="de-DE" dirty="0"/>
-          </a:p>
-        </p:txBody>
-      </p:sp>
-      <p:sp>
-        <p:nvSpPr>
-          <p:cNvPr id="6" name="Foliennummernplatzhalter 5">
-            <a:extLst>
-              <a:ext uri="{FF2B5EF4-FFF2-40B4-BE49-F238E27FC236}">
-                <a16:creationId xmlns:a16="http://schemas.microsoft.com/office/drawing/2014/main" id="{8F1AF200-E81F-A326-0EDB-4B93C71D9BF4}"/>
-              </a:ext>
-            </a:extLst>
-          </p:cNvPr>
-          <p:cNvSpPr>
-            <a:spLocks noGrp="1"/>
-          </p:cNvSpPr>
-          <p:nvPr>
-            <p:ph type="sldNum" sz="quarter" idx="12"/>
-          </p:nvPr>
-        </p:nvSpPr>
-        <p:spPr/>
-        <p:txBody>
-          <a:bodyPr rtlCol="0"/>
-          <a:lstStyle>
-            <a:defPPr>
-              <a:defRPr lang="de-DE"/>
-            </a:defPPr>
-          </a:lstStyle>
-          <a:p>
-            <a:pPr rtl="0"/>
-            <a:fld id="{CBD12358-51D2-46B3-9BDE-DF29528B9454}" type="slidenum">
-              <a:rPr lang="de-DE" smtClean="0"/>
-              <a:t>‹Nr.›</a:t>
-            </a:fld>
-            <a:endParaRPr lang="de-DE" dirty="0"/>
-          </a:p>
-        </p:txBody>
-      </p:sp>
-      <p:sp>
-        <p:nvSpPr>
-          <p:cNvPr id="3" name="Inhaltsplatzhalter 2">
-            <a:extLst>
-              <a:ext uri="{FF2B5EF4-FFF2-40B4-BE49-F238E27FC236}">
-                <a16:creationId xmlns:a16="http://schemas.microsoft.com/office/drawing/2014/main" id="{2AC28186-3489-427F-79D0-B78444023624}"/>
-              </a:ext>
-            </a:extLst>
-          </p:cNvPr>
-          <p:cNvSpPr>
-            <a:spLocks noGrp="1"/>
-          </p:cNvSpPr>
-          <p:nvPr>
-            <p:ph sz="half" idx="1" hasCustomPrompt="1"/>
-          </p:nvPr>
-        </p:nvSpPr>
-        <p:spPr>
-          <a:xfrm>
-            <a:off x="550861" y="1917064"/>
-            <a:ext cx="11090275" cy="4297679"/>
-          </a:xfrm>
-        </p:spPr>
-        <p:txBody>
-          <a:bodyPr rtlCol="0">
-            <a:normAutofit/>
-          </a:bodyPr>
-          <a:lstStyle>
-            <a:lvl1pPr marL="0" indent="0">
-              <a:buNone/>
-              <a:defRPr lang="de-DE" sz="1800">
-                <a:solidFill>
-                  <a:schemeClr val="tx1"/>
-                </a:solidFill>
-              </a:defRPr>
-            </a:lvl1pPr>
-            <a:lvl2pPr>
-              <a:defRPr lang="de-DE" sz="1800">
-                <a:solidFill>
-                  <a:schemeClr val="tx1"/>
-                </a:solidFill>
-              </a:defRPr>
-            </a:lvl2pPr>
-            <a:lvl3pPr>
-              <a:defRPr lang="de-DE" sz="1800">
-                <a:solidFill>
-                  <a:schemeClr val="tx1"/>
-                </a:solidFill>
-              </a:defRPr>
-            </a:lvl3pPr>
-            <a:lvl4pPr>
-              <a:defRPr lang="de-DE" sz="1800">
-                <a:solidFill>
-                  <a:schemeClr val="tx1"/>
-                </a:solidFill>
-              </a:defRPr>
-            </a:lvl4pPr>
-            <a:lvl5pPr>
-              <a:defRPr lang="de-DE" sz="1800">
-                <a:solidFill>
-                  <a:schemeClr val="tx1"/>
-                </a:solidFill>
-              </a:defRPr>
-            </a:lvl5pPr>
-          </a:lstStyle>
-          <a:p>
-            <a:pPr lvl="0" rtl="0"/>
-            <a:r>
-              <a:rPr lang="de-DE"/>
-              <a:t>Klicken, um Inhalt hinzuzufügen</a:t>
-            </a:r>
-          </a:p>
-          <a:p>
-            <a:pPr lvl="1" rtl="0"/>
-            <a:r>
-              <a:rPr lang="de-DE"/>
-              <a:t>Zweite Ebene</a:t>
-            </a:r>
-          </a:p>
-          <a:p>
-            <a:pPr lvl="2" rtl="0"/>
-            <a:r>
-              <a:rPr lang="de-DE"/>
-              <a:t>Dritte Ebene</a:t>
-            </a:r>
-          </a:p>
-          <a:p>
-            <a:pPr lvl="3" rtl="0"/>
-            <a:r>
-              <a:rPr lang="de-DE"/>
-              <a:t>Vierte Ebene</a:t>
-            </a:r>
-          </a:p>
-          <a:p>
-            <a:pPr lvl="4" rtl="0"/>
-            <a:r>
-              <a:rPr lang="de-DE"/>
-              <a:t>Fünfte Ebene</a:t>
-            </a:r>
-          </a:p>
-        </p:txBody>
-      </p:sp>
-    </p:spTree>
-    <p:extLst>
-      <p:ext uri="{BB962C8B-B14F-4D97-AF65-F5344CB8AC3E}">
-        <p14:creationId xmlns:p14="http://schemas.microsoft.com/office/powerpoint/2010/main" val="100879375"/>
-      </p:ext>
-    </p:extLst>
-  </p:cSld>
-  <p:clrMapOvr>
-    <a:masterClrMapping/>
-  </p:clrMapOvr>
-</p:sldLayout>
-</file>
-
-<file path=ppt/slideLayouts/slideLayout12.xml><?xml version="1.0" encoding="utf-8"?>
 <p:sldLayout xmlns:a="http://schemas.openxmlformats.org/drawingml/2006/main" xmlns:r="http://schemas.openxmlformats.org/officeDocument/2006/relationships" xmlns:p="http://schemas.openxmlformats.org/presentationml/2006/main" preserve="1" userDrawn="1">
   <p:cSld name="Schlussbemerkung">
     <p:spTree>
@@ -4936,7 +3322,7 @@
 </p:sldLayout>
 </file>
 
-<file path=ppt/slideLayouts/slideLayout13.xml><?xml version="1.0" encoding="utf-8"?>
+<file path=ppt/slideLayouts/slideLayout11.xml><?xml version="1.0" encoding="utf-8"?>
 <p:sldLayout xmlns:a="http://schemas.openxmlformats.org/drawingml/2006/main" xmlns:r="http://schemas.openxmlformats.org/officeDocument/2006/relationships" xmlns:p="http://schemas.openxmlformats.org/presentationml/2006/main" type="title" preserve="1">
   <p:cSld name="Titelfolie">
     <p:spTree>
@@ -12729,8 +11115,8 @@
 </file>
 
 <file path=ppt/slideLayouts/slideLayout9.xml><?xml version="1.0" encoding="utf-8"?>
-<p:sldLayout xmlns:a="http://schemas.openxmlformats.org/drawingml/2006/main" xmlns:r="http://schemas.openxmlformats.org/officeDocument/2006/relationships" xmlns:p="http://schemas.openxmlformats.org/presentationml/2006/main" userDrawn="1">
-  <p:cSld name="Inhalt + Tabelle">
+<p:sldLayout xmlns:a="http://schemas.openxmlformats.org/drawingml/2006/main" xmlns:r="http://schemas.openxmlformats.org/officeDocument/2006/relationships" xmlns:p="http://schemas.openxmlformats.org/presentationml/2006/main" preserve="1" userDrawn="1">
+  <p:cSld name="Zwei Inhalt">
     <p:spTree>
       <p:nvGrpSpPr>
         <p:cNvPr id="1" name=""/>
@@ -12747,10 +11133,100 @@
       </p:grpSpPr>
       <p:sp>
         <p:nvSpPr>
+          <p:cNvPr id="22" name="Ellipse 21">
+            <a:extLst>
+              <a:ext uri="{FF2B5EF4-FFF2-40B4-BE49-F238E27FC236}">
+                <a16:creationId xmlns:a16="http://schemas.microsoft.com/office/drawing/2014/main" id="{94729CA3-91C4-4A89-9448-A2F0E409177A}"/>
+              </a:ext>
+              <a:ext uri="{C183D7F6-B498-43B3-948B-1728B52AA6E4}">
+                <adec:decorative xmlns:adec="http://schemas.microsoft.com/office/drawing/2017/decorative" val="1"/>
+              </a:ext>
+            </a:extLst>
+          </p:cNvPr>
+          <p:cNvSpPr>
+            <a:spLocks noChangeAspect="1"/>
+          </p:cNvSpPr>
+          <p:nvPr/>
+        </p:nvSpPr>
+        <p:spPr>
+          <a:xfrm>
+            <a:off x="11069864" y="333375"/>
+            <a:ext cx="360000" cy="360000"/>
+          </a:xfrm>
+          <a:prstGeom prst="ellipse">
+            <a:avLst/>
+          </a:prstGeom>
+          <a:gradFill flip="none" rotWithShape="1">
+            <a:gsLst>
+              <a:gs pos="100000">
+                <a:schemeClr val="bg2">
+                  <a:lumMod val="50000"/>
+                  <a:lumOff val="50000"/>
+                </a:schemeClr>
+              </a:gs>
+              <a:gs pos="60000">
+                <a:schemeClr val="bg2"/>
+              </a:gs>
+            </a:gsLst>
+            <a:path path="circle">
+              <a:fillToRect l="100000" b="100000"/>
+            </a:path>
+            <a:tileRect t="-100000" r="-100000"/>
+          </a:gradFill>
+          <a:ln>
+            <a:noFill/>
+          </a:ln>
+          <a:effectLst>
+            <a:innerShdw blurRad="127000" dist="63500" dir="2700000">
+              <a:schemeClr val="accent1">
+                <a:lumMod val="60000"/>
+                <a:lumOff val="40000"/>
+                <a:alpha val="20000"/>
+              </a:schemeClr>
+            </a:innerShdw>
+            <a:softEdge rad="0"/>
+          </a:effectLst>
+        </p:spPr>
+        <p:style>
+          <a:lnRef idx="2">
+            <a:schemeClr val="accent1">
+              <a:shade val="50000"/>
+            </a:schemeClr>
+          </a:lnRef>
+          <a:fillRef idx="1">
+            <a:schemeClr val="accent1"/>
+          </a:fillRef>
+          <a:effectRef idx="0">
+            <a:schemeClr val="accent1"/>
+          </a:effectRef>
+          <a:fontRef idx="minor">
+            <a:schemeClr val="lt1"/>
+          </a:fontRef>
+        </p:style>
+        <p:txBody>
+          <a:bodyPr rot="0" spcFirstLastPara="0" vertOverflow="overflow" horzOverflow="overflow" vert="horz" wrap="square" lIns="91440" tIns="45720" rIns="91440" bIns="45720" numCol="1" spcCol="0" rtlCol="0" fromWordArt="0" anchor="ctr" anchorCtr="0" forceAA="0" compatLnSpc="1">
+            <a:prstTxWarp prst="textNoShape">
+              <a:avLst/>
+            </a:prstTxWarp>
+            <a:noAutofit/>
+          </a:bodyPr>
+          <a:lstStyle>
+            <a:defPPr>
+              <a:defRPr lang="de-DE"/>
+            </a:defPPr>
+          </a:lstStyle>
+          <a:p>
+            <a:pPr algn="ctr" rtl="0"/>
+            <a:endParaRPr lang="de-DE" dirty="0"/>
+          </a:p>
+        </p:txBody>
+      </p:sp>
+      <p:sp>
+        <p:nvSpPr>
           <p:cNvPr id="2" name="Titel 1">
             <a:extLst>
               <a:ext uri="{FF2B5EF4-FFF2-40B4-BE49-F238E27FC236}">
-                <a16:creationId xmlns:a16="http://schemas.microsoft.com/office/drawing/2014/main" id="{0C40C44A-93E6-6C58-5E88-AFDC594EC27A}"/>
+                <a16:creationId xmlns:a16="http://schemas.microsoft.com/office/drawing/2014/main" id="{8978E540-142B-4A82-9C3F-E61BC190AEED}"/>
               </a:ext>
             </a:extLst>
           </p:cNvPr>
@@ -12763,16 +11239,19 @@
         </p:nvSpPr>
         <p:spPr>
           <a:xfrm>
-            <a:off x="550863" y="550801"/>
-            <a:ext cx="11090275" cy="1237360"/>
+            <a:off x="550863" y="488315"/>
+            <a:ext cx="11090274" cy="1332000"/>
           </a:xfrm>
         </p:spPr>
         <p:txBody>
-          <a:bodyPr rtlCol="0" anchor="t" anchorCtr="0">
-            <a:noAutofit/>
+          <a:bodyPr rtlCol="0">
+            <a:normAutofit/>
           </a:bodyPr>
           <a:lstStyle>
             <a:lvl1pPr>
+              <a:lnSpc>
+                <a:spcPct val="100000"/>
+              </a:lnSpc>
               <a:defRPr lang="de-DE" sz="4000"/>
             </a:lvl1pPr>
           </a:lstStyle>
@@ -12785,12 +11264,847 @@
           </a:p>
         </p:txBody>
       </p:sp>
+      <p:grpSp>
+        <p:nvGrpSpPr>
+          <p:cNvPr id="11" name="Gruppieren 10">
+            <a:extLst>
+              <a:ext uri="{FF2B5EF4-FFF2-40B4-BE49-F238E27FC236}">
+                <a16:creationId xmlns:a16="http://schemas.microsoft.com/office/drawing/2014/main" id="{6EFC6ED4-22DD-0C3B-D15A-218307AB6DF2}"/>
+              </a:ext>
+              <a:ext uri="{C183D7F6-B498-43B3-948B-1728B52AA6E4}">
+                <adec:decorative xmlns:adec="http://schemas.microsoft.com/office/drawing/2017/decorative" val="1"/>
+              </a:ext>
+            </a:extLst>
+          </p:cNvPr>
+          <p:cNvGrpSpPr/>
+          <p:nvPr userDrawn="1"/>
+        </p:nvGrpSpPr>
+        <p:grpSpPr>
+          <a:xfrm>
+            <a:off x="10379261" y="2030035"/>
+            <a:ext cx="1335600" cy="1262947"/>
+            <a:chOff x="10145015" y="2343978"/>
+            <a:chExt cx="1335600" cy="1262947"/>
+          </a:xfrm>
+        </p:grpSpPr>
+        <p:sp>
+          <p:nvSpPr>
+            <p:cNvPr id="12" name="Freihandform: Form 25">
+              <a:extLst>
+                <a:ext uri="{FF2B5EF4-FFF2-40B4-BE49-F238E27FC236}">
+                  <a16:creationId xmlns:a16="http://schemas.microsoft.com/office/drawing/2014/main" id="{E4CD0F67-4BE8-1120-FCAE-806F9E18DD58}"/>
+                </a:ext>
+              </a:extLst>
+            </p:cNvPr>
+            <p:cNvSpPr>
+              <a:spLocks noChangeAspect="1"/>
+            </p:cNvSpPr>
+            <p:nvPr/>
+          </p:nvSpPr>
+          <p:spPr>
+            <a:xfrm rot="8100000">
+              <a:off x="10400615" y="2343978"/>
+              <a:ext cx="1080000" cy="1262947"/>
+            </a:xfrm>
+            <a:custGeom>
+              <a:avLst/>
+              <a:gdLst>
+                <a:gd name="connsiteX0" fmla="*/ 540000 w 1080000"/>
+                <a:gd name="connsiteY0" fmla="*/ 0 h 1262947"/>
+                <a:gd name="connsiteX1" fmla="*/ 1080000 w 1080000"/>
+                <a:gd name="connsiteY1" fmla="*/ 931034 h 1262947"/>
+                <a:gd name="connsiteX2" fmla="*/ 1064374 w 1080000"/>
+                <a:gd name="connsiteY2" fmla="*/ 931034 h 1262947"/>
+                <a:gd name="connsiteX3" fmla="*/ 1069029 w 1080000"/>
+                <a:gd name="connsiteY3" fmla="*/ 938533 h 1262947"/>
+                <a:gd name="connsiteX4" fmla="*/ 1080000 w 1080000"/>
+                <a:gd name="connsiteY4" fmla="*/ 992947 h 1262947"/>
+                <a:gd name="connsiteX5" fmla="*/ 540000 w 1080000"/>
+                <a:gd name="connsiteY5" fmla="*/ 1262947 h 1262947"/>
+                <a:gd name="connsiteX6" fmla="*/ 0 w 1080000"/>
+                <a:gd name="connsiteY6" fmla="*/ 992947 h 1262947"/>
+                <a:gd name="connsiteX7" fmla="*/ 10971 w 1080000"/>
+                <a:gd name="connsiteY7" fmla="*/ 938533 h 1262947"/>
+                <a:gd name="connsiteX8" fmla="*/ 15626 w 1080000"/>
+                <a:gd name="connsiteY8" fmla="*/ 931034 h 1262947"/>
+                <a:gd name="connsiteX9" fmla="*/ 0 w 1080000"/>
+                <a:gd name="connsiteY9" fmla="*/ 931034 h 1262947"/>
+                <a:gd name="connsiteX0" fmla="*/ 540000 w 1080000"/>
+                <a:gd name="connsiteY0" fmla="*/ 0 h 1262947"/>
+                <a:gd name="connsiteX1" fmla="*/ 1080000 w 1080000"/>
+                <a:gd name="connsiteY1" fmla="*/ 931034 h 1262947"/>
+                <a:gd name="connsiteX2" fmla="*/ 1064374 w 1080000"/>
+                <a:gd name="connsiteY2" fmla="*/ 931034 h 1262947"/>
+                <a:gd name="connsiteX3" fmla="*/ 1069029 w 1080000"/>
+                <a:gd name="connsiteY3" fmla="*/ 938533 h 1262947"/>
+                <a:gd name="connsiteX4" fmla="*/ 1080000 w 1080000"/>
+                <a:gd name="connsiteY4" fmla="*/ 992947 h 1262947"/>
+                <a:gd name="connsiteX5" fmla="*/ 540000 w 1080000"/>
+                <a:gd name="connsiteY5" fmla="*/ 1262947 h 1262947"/>
+                <a:gd name="connsiteX6" fmla="*/ 0 w 1080000"/>
+                <a:gd name="connsiteY6" fmla="*/ 992947 h 1262947"/>
+                <a:gd name="connsiteX7" fmla="*/ 10971 w 1080000"/>
+                <a:gd name="connsiteY7" fmla="*/ 938533 h 1262947"/>
+                <a:gd name="connsiteX8" fmla="*/ 15626 w 1080000"/>
+                <a:gd name="connsiteY8" fmla="*/ 931034 h 1262947"/>
+                <a:gd name="connsiteX9" fmla="*/ 540000 w 1080000"/>
+                <a:gd name="connsiteY9" fmla="*/ 0 h 1262947"/>
+                <a:gd name="connsiteX0" fmla="*/ 540000 w 1080000"/>
+                <a:gd name="connsiteY0" fmla="*/ 0 h 1262947"/>
+                <a:gd name="connsiteX1" fmla="*/ 1064374 w 1080000"/>
+                <a:gd name="connsiteY1" fmla="*/ 931034 h 1262947"/>
+                <a:gd name="connsiteX2" fmla="*/ 1069029 w 1080000"/>
+                <a:gd name="connsiteY2" fmla="*/ 938533 h 1262947"/>
+                <a:gd name="connsiteX3" fmla="*/ 1080000 w 1080000"/>
+                <a:gd name="connsiteY3" fmla="*/ 992947 h 1262947"/>
+                <a:gd name="connsiteX4" fmla="*/ 540000 w 1080000"/>
+                <a:gd name="connsiteY4" fmla="*/ 1262947 h 1262947"/>
+                <a:gd name="connsiteX5" fmla="*/ 0 w 1080000"/>
+                <a:gd name="connsiteY5" fmla="*/ 992947 h 1262947"/>
+                <a:gd name="connsiteX6" fmla="*/ 10971 w 1080000"/>
+                <a:gd name="connsiteY6" fmla="*/ 938533 h 1262947"/>
+                <a:gd name="connsiteX7" fmla="*/ 15626 w 1080000"/>
+                <a:gd name="connsiteY7" fmla="*/ 931034 h 1262947"/>
+                <a:gd name="connsiteX8" fmla="*/ 540000 w 1080000"/>
+                <a:gd name="connsiteY8" fmla="*/ 0 h 1262947"/>
+              </a:gdLst>
+              <a:ahLst/>
+              <a:cxnLst>
+                <a:cxn ang="0">
+                  <a:pos x="connsiteX0" y="connsiteY0"/>
+                </a:cxn>
+                <a:cxn ang="0">
+                  <a:pos x="connsiteX1" y="connsiteY1"/>
+                </a:cxn>
+                <a:cxn ang="0">
+                  <a:pos x="connsiteX2" y="connsiteY2"/>
+                </a:cxn>
+                <a:cxn ang="0">
+                  <a:pos x="connsiteX3" y="connsiteY3"/>
+                </a:cxn>
+                <a:cxn ang="0">
+                  <a:pos x="connsiteX4" y="connsiteY4"/>
+                </a:cxn>
+                <a:cxn ang="0">
+                  <a:pos x="connsiteX5" y="connsiteY5"/>
+                </a:cxn>
+                <a:cxn ang="0">
+                  <a:pos x="connsiteX6" y="connsiteY6"/>
+                </a:cxn>
+                <a:cxn ang="0">
+                  <a:pos x="connsiteX7" y="connsiteY7"/>
+                </a:cxn>
+                <a:cxn ang="0">
+                  <a:pos x="connsiteX8" y="connsiteY8"/>
+                </a:cxn>
+              </a:cxnLst>
+              <a:rect l="l" t="t" r="r" b="b"/>
+              <a:pathLst>
+                <a:path w="1080000" h="1262947">
+                  <a:moveTo>
+                    <a:pt x="540000" y="0"/>
+                  </a:moveTo>
+                  <a:lnTo>
+                    <a:pt x="1064374" y="931034"/>
+                  </a:lnTo>
+                  <a:lnTo>
+                    <a:pt x="1069029" y="938533"/>
+                  </a:lnTo>
+                  <a:cubicBezTo>
+                    <a:pt x="1076223" y="956109"/>
+                    <a:pt x="1080000" y="974307"/>
+                    <a:pt x="1080000" y="992947"/>
+                  </a:cubicBezTo>
+                  <a:cubicBezTo>
+                    <a:pt x="1080000" y="1142064"/>
+                    <a:pt x="838234" y="1262947"/>
+                    <a:pt x="540000" y="1262947"/>
+                  </a:cubicBezTo>
+                  <a:cubicBezTo>
+                    <a:pt x="241766" y="1262947"/>
+                    <a:pt x="0" y="1142064"/>
+                    <a:pt x="0" y="992947"/>
+                  </a:cubicBezTo>
+                  <a:cubicBezTo>
+                    <a:pt x="0" y="974307"/>
+                    <a:pt x="3778" y="956109"/>
+                    <a:pt x="10971" y="938533"/>
+                  </a:cubicBezTo>
+                  <a:lnTo>
+                    <a:pt x="15626" y="931034"/>
+                  </a:lnTo>
+                  <a:lnTo>
+                    <a:pt x="540000" y="0"/>
+                  </a:lnTo>
+                  <a:close/>
+                </a:path>
+              </a:pathLst>
+            </a:custGeom>
+            <a:gradFill>
+              <a:gsLst>
+                <a:gs pos="60000">
+                  <a:schemeClr val="bg2">
+                    <a:lumMod val="90000"/>
+                    <a:lumOff val="10000"/>
+                  </a:schemeClr>
+                </a:gs>
+                <a:gs pos="30000">
+                  <a:schemeClr val="bg2">
+                    <a:lumMod val="90000"/>
+                    <a:lumOff val="10000"/>
+                  </a:schemeClr>
+                </a:gs>
+                <a:gs pos="40000">
+                  <a:schemeClr val="bg2">
+                    <a:lumMod val="80000"/>
+                    <a:lumOff val="20000"/>
+                  </a:schemeClr>
+                </a:gs>
+                <a:gs pos="100000">
+                  <a:schemeClr val="bg2"/>
+                </a:gs>
+              </a:gsLst>
+              <a:lin ang="600000" scaled="0"/>
+            </a:gradFill>
+            <a:ln>
+              <a:noFill/>
+            </a:ln>
+            <a:effectLst>
+              <a:innerShdw blurRad="254000" dist="101600" dir="7320000">
+                <a:schemeClr val="accent1">
+                  <a:lumMod val="60000"/>
+                  <a:lumOff val="40000"/>
+                  <a:alpha val="40000"/>
+                </a:schemeClr>
+              </a:innerShdw>
+            </a:effectLst>
+          </p:spPr>
+          <p:style>
+            <a:lnRef idx="2">
+              <a:schemeClr val="accent1">
+                <a:shade val="50000"/>
+              </a:schemeClr>
+            </a:lnRef>
+            <a:fillRef idx="1">
+              <a:schemeClr val="accent1"/>
+            </a:fillRef>
+            <a:effectRef idx="0">
+              <a:schemeClr val="accent1"/>
+            </a:effectRef>
+            <a:fontRef idx="minor">
+              <a:schemeClr val="lt1"/>
+            </a:fontRef>
+          </p:style>
+          <p:txBody>
+            <a:bodyPr rot="0" spcFirstLastPara="0" vertOverflow="overflow" horzOverflow="overflow" vert="horz" wrap="square" lIns="91440" tIns="45720" rIns="91440" bIns="45720" numCol="1" spcCol="0" rtlCol="0" fromWordArt="0" anchor="ctr" anchorCtr="0" forceAA="0" compatLnSpc="1">
+              <a:prstTxWarp prst="textNoShape">
+                <a:avLst/>
+              </a:prstTxWarp>
+              <a:noAutofit/>
+            </a:bodyPr>
+            <a:lstStyle>
+              <a:defPPr>
+                <a:defRPr lang="de-DE"/>
+              </a:defPPr>
+            </a:lstStyle>
+            <a:p>
+              <a:pPr algn="ctr" rtl="0"/>
+              <a:endParaRPr lang="de-DE" dirty="0"/>
+            </a:p>
+          </p:txBody>
+        </p:sp>
+        <p:sp>
+          <p:nvSpPr>
+            <p:cNvPr id="14" name="Ellipse 13">
+              <a:extLst>
+                <a:ext uri="{FF2B5EF4-FFF2-40B4-BE49-F238E27FC236}">
+                  <a16:creationId xmlns:a16="http://schemas.microsoft.com/office/drawing/2014/main" id="{59B74B85-E3CB-E24E-54C6-AB161411D93A}"/>
+                </a:ext>
+              </a:extLst>
+            </p:cNvPr>
+            <p:cNvSpPr/>
+            <p:nvPr/>
+          </p:nvSpPr>
+          <p:spPr>
+            <a:xfrm rot="13500000">
+              <a:off x="10415015" y="2179851"/>
+              <a:ext cx="540000" cy="1080000"/>
+            </a:xfrm>
+            <a:prstGeom prst="ellipse">
+              <a:avLst/>
+            </a:prstGeom>
+            <a:gradFill>
+              <a:gsLst>
+                <a:gs pos="100000">
+                  <a:schemeClr val="accent1">
+                    <a:lumMod val="60000"/>
+                    <a:lumOff val="40000"/>
+                    <a:alpha val="0"/>
+                  </a:schemeClr>
+                </a:gs>
+                <a:gs pos="0">
+                  <a:schemeClr val="bg2">
+                    <a:lumMod val="75000"/>
+                    <a:lumOff val="25000"/>
+                    <a:alpha val="33000"/>
+                  </a:schemeClr>
+                </a:gs>
+              </a:gsLst>
+              <a:lin ang="5400000" scaled="0"/>
+            </a:gradFill>
+            <a:ln>
+              <a:noFill/>
+            </a:ln>
+            <a:effectLst>
+              <a:innerShdw blurRad="1270000" dist="2540000">
+                <a:schemeClr val="accent1">
+                  <a:lumMod val="60000"/>
+                  <a:lumOff val="40000"/>
+                  <a:alpha val="0"/>
+                </a:schemeClr>
+              </a:innerShdw>
+            </a:effectLst>
+          </p:spPr>
+          <p:style>
+            <a:lnRef idx="2">
+              <a:schemeClr val="accent1">
+                <a:shade val="50000"/>
+              </a:schemeClr>
+            </a:lnRef>
+            <a:fillRef idx="1">
+              <a:schemeClr val="accent1"/>
+            </a:fillRef>
+            <a:effectRef idx="0">
+              <a:schemeClr val="accent1"/>
+            </a:effectRef>
+            <a:fontRef idx="minor">
+              <a:schemeClr val="lt1"/>
+            </a:fontRef>
+          </p:style>
+          <p:txBody>
+            <a:bodyPr rot="0" spcFirstLastPara="0" vertOverflow="overflow" horzOverflow="overflow" vert="horz" wrap="square" lIns="91440" tIns="45720" rIns="91440" bIns="45720" numCol="1" spcCol="0" rtlCol="0" fromWordArt="0" anchor="ctr" anchorCtr="0" forceAA="0" compatLnSpc="1">
+              <a:prstTxWarp prst="textNoShape">
+                <a:avLst/>
+              </a:prstTxWarp>
+              <a:noAutofit/>
+            </a:bodyPr>
+            <a:lstStyle>
+              <a:defPPr>
+                <a:defRPr lang="de-DE"/>
+              </a:defPPr>
+            </a:lstStyle>
+            <a:p>
+              <a:pPr algn="ctr" rtl="0"/>
+              <a:endParaRPr lang="de-DE" dirty="0"/>
+            </a:p>
+          </p:txBody>
+        </p:sp>
+      </p:grpSp>
+      <p:sp>
+        <p:nvSpPr>
+          <p:cNvPr id="15" name="Freihandform: Form 21">
+            <a:extLst>
+              <a:ext uri="{FF2B5EF4-FFF2-40B4-BE49-F238E27FC236}">
+                <a16:creationId xmlns:a16="http://schemas.microsoft.com/office/drawing/2014/main" id="{5781DEED-6608-D622-CA5E-C91FD8645ED6}"/>
+              </a:ext>
+              <a:ext uri="{C183D7F6-B498-43B3-948B-1728B52AA6E4}">
+                <adec:decorative xmlns:adec="http://schemas.microsoft.com/office/drawing/2017/decorative" val="1"/>
+              </a:ext>
+            </a:extLst>
+          </p:cNvPr>
+          <p:cNvSpPr>
+            <a:spLocks noChangeAspect="1"/>
+          </p:cNvSpPr>
+          <p:nvPr userDrawn="1"/>
+        </p:nvSpPr>
+        <p:spPr>
+          <a:xfrm>
+            <a:off x="4295775" y="0"/>
+            <a:ext cx="360000" cy="274638"/>
+          </a:xfrm>
+          <a:custGeom>
+            <a:avLst/>
+            <a:gdLst>
+              <a:gd name="connsiteX0" fmla="*/ 30714 w 360000"/>
+              <a:gd name="connsiteY0" fmla="*/ 0 h 274638"/>
+              <a:gd name="connsiteX1" fmla="*/ 329286 w 360000"/>
+              <a:gd name="connsiteY1" fmla="*/ 0 h 274638"/>
+              <a:gd name="connsiteX2" fmla="*/ 345855 w 360000"/>
+              <a:gd name="connsiteY2" fmla="*/ 24574 h 274638"/>
+              <a:gd name="connsiteX3" fmla="*/ 360000 w 360000"/>
+              <a:gd name="connsiteY3" fmla="*/ 94638 h 274638"/>
+              <a:gd name="connsiteX4" fmla="*/ 180000 w 360000"/>
+              <a:gd name="connsiteY4" fmla="*/ 274638 h 274638"/>
+              <a:gd name="connsiteX5" fmla="*/ 0 w 360000"/>
+              <a:gd name="connsiteY5" fmla="*/ 94638 h 274638"/>
+              <a:gd name="connsiteX6" fmla="*/ 14145 w 360000"/>
+              <a:gd name="connsiteY6" fmla="*/ 24574 h 274638"/>
+            </a:gdLst>
+            <a:ahLst/>
+            <a:cxnLst>
+              <a:cxn ang="0">
+                <a:pos x="connsiteX0" y="connsiteY0"/>
+              </a:cxn>
+              <a:cxn ang="0">
+                <a:pos x="connsiteX1" y="connsiteY1"/>
+              </a:cxn>
+              <a:cxn ang="0">
+                <a:pos x="connsiteX2" y="connsiteY2"/>
+              </a:cxn>
+              <a:cxn ang="0">
+                <a:pos x="connsiteX3" y="connsiteY3"/>
+              </a:cxn>
+              <a:cxn ang="0">
+                <a:pos x="connsiteX4" y="connsiteY4"/>
+              </a:cxn>
+              <a:cxn ang="0">
+                <a:pos x="connsiteX5" y="connsiteY5"/>
+              </a:cxn>
+              <a:cxn ang="0">
+                <a:pos x="connsiteX6" y="connsiteY6"/>
+              </a:cxn>
+            </a:cxnLst>
+            <a:rect l="l" t="t" r="r" b="b"/>
+            <a:pathLst>
+              <a:path w="360000" h="274638">
+                <a:moveTo>
+                  <a:pt x="30714" y="0"/>
+                </a:moveTo>
+                <a:lnTo>
+                  <a:pt x="329286" y="0"/>
+                </a:lnTo>
+                <a:lnTo>
+                  <a:pt x="345855" y="24574"/>
+                </a:lnTo>
+                <a:cubicBezTo>
+                  <a:pt x="354963" y="46109"/>
+                  <a:pt x="360000" y="69785"/>
+                  <a:pt x="360000" y="94638"/>
+                </a:cubicBezTo>
+                <a:cubicBezTo>
+                  <a:pt x="360000" y="194049"/>
+                  <a:pt x="279411" y="274638"/>
+                  <a:pt x="180000" y="274638"/>
+                </a:cubicBezTo>
+                <a:cubicBezTo>
+                  <a:pt x="80589" y="274638"/>
+                  <a:pt x="0" y="194049"/>
+                  <a:pt x="0" y="94638"/>
+                </a:cubicBezTo>
+                <a:cubicBezTo>
+                  <a:pt x="0" y="69785"/>
+                  <a:pt x="5037" y="46109"/>
+                  <a:pt x="14145" y="24574"/>
+                </a:cubicBezTo>
+                <a:close/>
+              </a:path>
+            </a:pathLst>
+          </a:custGeom>
+          <a:gradFill flip="none" rotWithShape="1">
+            <a:gsLst>
+              <a:gs pos="100000">
+                <a:schemeClr val="bg2">
+                  <a:lumMod val="50000"/>
+                  <a:lumOff val="50000"/>
+                </a:schemeClr>
+              </a:gs>
+              <a:gs pos="60000">
+                <a:schemeClr val="bg2"/>
+              </a:gs>
+            </a:gsLst>
+            <a:path path="circle">
+              <a:fillToRect l="100000" b="100000"/>
+            </a:path>
+            <a:tileRect t="-100000" r="-100000"/>
+          </a:gradFill>
+          <a:ln>
+            <a:noFill/>
+          </a:ln>
+          <a:effectLst>
+            <a:innerShdw blurRad="127000" dist="63500" dir="2700000">
+              <a:schemeClr val="accent1">
+                <a:lumMod val="60000"/>
+                <a:lumOff val="40000"/>
+                <a:alpha val="20000"/>
+              </a:schemeClr>
+            </a:innerShdw>
+            <a:softEdge rad="0"/>
+          </a:effectLst>
+        </p:spPr>
+        <p:style>
+          <a:lnRef idx="2">
+            <a:schemeClr val="accent1">
+              <a:shade val="50000"/>
+            </a:schemeClr>
+          </a:lnRef>
+          <a:fillRef idx="1">
+            <a:schemeClr val="accent1"/>
+          </a:fillRef>
+          <a:effectRef idx="0">
+            <a:schemeClr val="accent1"/>
+          </a:effectRef>
+          <a:fontRef idx="minor">
+            <a:schemeClr val="lt1"/>
+          </a:fontRef>
+        </p:style>
+        <p:txBody>
+          <a:bodyPr rot="0" spcFirstLastPara="0" vertOverflow="overflow" horzOverflow="overflow" vert="horz" wrap="square" lIns="91440" tIns="45720" rIns="91440" bIns="45720" numCol="1" spcCol="0" rtlCol="0" fromWordArt="0" anchor="ctr" anchorCtr="0" forceAA="0" compatLnSpc="1">
+            <a:prstTxWarp prst="textNoShape">
+              <a:avLst/>
+            </a:prstTxWarp>
+            <a:noAutofit/>
+          </a:bodyPr>
+          <a:lstStyle>
+            <a:defPPr>
+              <a:defRPr lang="de-DE"/>
+            </a:defPPr>
+          </a:lstStyle>
+          <a:p>
+            <a:pPr algn="ctr" rtl="0"/>
+            <a:endParaRPr lang="de-DE" dirty="0"/>
+          </a:p>
+        </p:txBody>
+      </p:sp>
+      <p:grpSp>
+        <p:nvGrpSpPr>
+          <p:cNvPr id="13" name="Gruppieren 12">
+            <a:extLst>
+              <a:ext uri="{FF2B5EF4-FFF2-40B4-BE49-F238E27FC236}">
+                <a16:creationId xmlns:a16="http://schemas.microsoft.com/office/drawing/2014/main" id="{168347B7-45FA-4A01-924D-DC385B720B3E}"/>
+              </a:ext>
+              <a:ext uri="{C183D7F6-B498-43B3-948B-1728B52AA6E4}">
+                <adec:decorative xmlns:adec="http://schemas.microsoft.com/office/drawing/2017/decorative" val="1"/>
+              </a:ext>
+            </a:extLst>
+          </p:cNvPr>
+          <p:cNvGrpSpPr/>
+          <p:nvPr/>
+        </p:nvGrpSpPr>
+        <p:grpSpPr>
+          <a:xfrm>
+            <a:off x="331786" y="5528198"/>
+            <a:ext cx="631474" cy="667800"/>
+            <a:chOff x="2994153" y="1378666"/>
+            <a:chExt cx="631474" cy="667800"/>
+          </a:xfrm>
+        </p:grpSpPr>
+        <p:sp>
+          <p:nvSpPr>
+            <p:cNvPr id="20" name="Freihandform: Form 19">
+              <a:extLst>
+                <a:ext uri="{FF2B5EF4-FFF2-40B4-BE49-F238E27FC236}">
+                  <a16:creationId xmlns:a16="http://schemas.microsoft.com/office/drawing/2014/main" id="{31167DA1-25D1-4E60-A62E-42B6F56A96EC}"/>
+                </a:ext>
+              </a:extLst>
+            </p:cNvPr>
+            <p:cNvSpPr>
+              <a:spLocks noChangeAspect="1"/>
+            </p:cNvSpPr>
+            <p:nvPr/>
+          </p:nvSpPr>
+          <p:spPr>
+            <a:xfrm rot="2700000">
+              <a:off x="3039890" y="1332929"/>
+              <a:ext cx="540000" cy="631474"/>
+            </a:xfrm>
+            <a:custGeom>
+              <a:avLst/>
+              <a:gdLst>
+                <a:gd name="connsiteX0" fmla="*/ 540000 w 1080000"/>
+                <a:gd name="connsiteY0" fmla="*/ 0 h 1262947"/>
+                <a:gd name="connsiteX1" fmla="*/ 1080000 w 1080000"/>
+                <a:gd name="connsiteY1" fmla="*/ 931034 h 1262947"/>
+                <a:gd name="connsiteX2" fmla="*/ 1064374 w 1080000"/>
+                <a:gd name="connsiteY2" fmla="*/ 931034 h 1262947"/>
+                <a:gd name="connsiteX3" fmla="*/ 1069029 w 1080000"/>
+                <a:gd name="connsiteY3" fmla="*/ 938533 h 1262947"/>
+                <a:gd name="connsiteX4" fmla="*/ 1080000 w 1080000"/>
+                <a:gd name="connsiteY4" fmla="*/ 992947 h 1262947"/>
+                <a:gd name="connsiteX5" fmla="*/ 540000 w 1080000"/>
+                <a:gd name="connsiteY5" fmla="*/ 1262947 h 1262947"/>
+                <a:gd name="connsiteX6" fmla="*/ 0 w 1080000"/>
+                <a:gd name="connsiteY6" fmla="*/ 992947 h 1262947"/>
+                <a:gd name="connsiteX7" fmla="*/ 10971 w 1080000"/>
+                <a:gd name="connsiteY7" fmla="*/ 938533 h 1262947"/>
+                <a:gd name="connsiteX8" fmla="*/ 15626 w 1080000"/>
+                <a:gd name="connsiteY8" fmla="*/ 931034 h 1262947"/>
+                <a:gd name="connsiteX9" fmla="*/ 0 w 1080000"/>
+                <a:gd name="connsiteY9" fmla="*/ 931034 h 1262947"/>
+                <a:gd name="connsiteX0" fmla="*/ 540000 w 1080000"/>
+                <a:gd name="connsiteY0" fmla="*/ 0 h 1262947"/>
+                <a:gd name="connsiteX1" fmla="*/ 1080000 w 1080000"/>
+                <a:gd name="connsiteY1" fmla="*/ 931034 h 1262947"/>
+                <a:gd name="connsiteX2" fmla="*/ 1064374 w 1080000"/>
+                <a:gd name="connsiteY2" fmla="*/ 931034 h 1262947"/>
+                <a:gd name="connsiteX3" fmla="*/ 1069029 w 1080000"/>
+                <a:gd name="connsiteY3" fmla="*/ 938533 h 1262947"/>
+                <a:gd name="connsiteX4" fmla="*/ 1080000 w 1080000"/>
+                <a:gd name="connsiteY4" fmla="*/ 992947 h 1262947"/>
+                <a:gd name="connsiteX5" fmla="*/ 540000 w 1080000"/>
+                <a:gd name="connsiteY5" fmla="*/ 1262947 h 1262947"/>
+                <a:gd name="connsiteX6" fmla="*/ 0 w 1080000"/>
+                <a:gd name="connsiteY6" fmla="*/ 992947 h 1262947"/>
+                <a:gd name="connsiteX7" fmla="*/ 10971 w 1080000"/>
+                <a:gd name="connsiteY7" fmla="*/ 938533 h 1262947"/>
+                <a:gd name="connsiteX8" fmla="*/ 15626 w 1080000"/>
+                <a:gd name="connsiteY8" fmla="*/ 931034 h 1262947"/>
+                <a:gd name="connsiteX9" fmla="*/ 540000 w 1080000"/>
+                <a:gd name="connsiteY9" fmla="*/ 0 h 1262947"/>
+                <a:gd name="connsiteX0" fmla="*/ 540000 w 1080000"/>
+                <a:gd name="connsiteY0" fmla="*/ 0 h 1262947"/>
+                <a:gd name="connsiteX1" fmla="*/ 1064374 w 1080000"/>
+                <a:gd name="connsiteY1" fmla="*/ 931034 h 1262947"/>
+                <a:gd name="connsiteX2" fmla="*/ 1069029 w 1080000"/>
+                <a:gd name="connsiteY2" fmla="*/ 938533 h 1262947"/>
+                <a:gd name="connsiteX3" fmla="*/ 1080000 w 1080000"/>
+                <a:gd name="connsiteY3" fmla="*/ 992947 h 1262947"/>
+                <a:gd name="connsiteX4" fmla="*/ 540000 w 1080000"/>
+                <a:gd name="connsiteY4" fmla="*/ 1262947 h 1262947"/>
+                <a:gd name="connsiteX5" fmla="*/ 0 w 1080000"/>
+                <a:gd name="connsiteY5" fmla="*/ 992947 h 1262947"/>
+                <a:gd name="connsiteX6" fmla="*/ 10971 w 1080000"/>
+                <a:gd name="connsiteY6" fmla="*/ 938533 h 1262947"/>
+                <a:gd name="connsiteX7" fmla="*/ 15626 w 1080000"/>
+                <a:gd name="connsiteY7" fmla="*/ 931034 h 1262947"/>
+                <a:gd name="connsiteX8" fmla="*/ 540000 w 1080000"/>
+                <a:gd name="connsiteY8" fmla="*/ 0 h 1262947"/>
+              </a:gdLst>
+              <a:ahLst/>
+              <a:cxnLst>
+                <a:cxn ang="0">
+                  <a:pos x="connsiteX0" y="connsiteY0"/>
+                </a:cxn>
+                <a:cxn ang="0">
+                  <a:pos x="connsiteX1" y="connsiteY1"/>
+                </a:cxn>
+                <a:cxn ang="0">
+                  <a:pos x="connsiteX2" y="connsiteY2"/>
+                </a:cxn>
+                <a:cxn ang="0">
+                  <a:pos x="connsiteX3" y="connsiteY3"/>
+                </a:cxn>
+                <a:cxn ang="0">
+                  <a:pos x="connsiteX4" y="connsiteY4"/>
+                </a:cxn>
+                <a:cxn ang="0">
+                  <a:pos x="connsiteX5" y="connsiteY5"/>
+                </a:cxn>
+                <a:cxn ang="0">
+                  <a:pos x="connsiteX6" y="connsiteY6"/>
+                </a:cxn>
+                <a:cxn ang="0">
+                  <a:pos x="connsiteX7" y="connsiteY7"/>
+                </a:cxn>
+                <a:cxn ang="0">
+                  <a:pos x="connsiteX8" y="connsiteY8"/>
+                </a:cxn>
+              </a:cxnLst>
+              <a:rect l="l" t="t" r="r" b="b"/>
+              <a:pathLst>
+                <a:path w="1080000" h="1262947">
+                  <a:moveTo>
+                    <a:pt x="540000" y="0"/>
+                  </a:moveTo>
+                  <a:lnTo>
+                    <a:pt x="1064374" y="931034"/>
+                  </a:lnTo>
+                  <a:lnTo>
+                    <a:pt x="1069029" y="938533"/>
+                  </a:lnTo>
+                  <a:cubicBezTo>
+                    <a:pt x="1076223" y="956109"/>
+                    <a:pt x="1080000" y="974307"/>
+                    <a:pt x="1080000" y="992947"/>
+                  </a:cubicBezTo>
+                  <a:cubicBezTo>
+                    <a:pt x="1080000" y="1142064"/>
+                    <a:pt x="838234" y="1262947"/>
+                    <a:pt x="540000" y="1262947"/>
+                  </a:cubicBezTo>
+                  <a:cubicBezTo>
+                    <a:pt x="241766" y="1262947"/>
+                    <a:pt x="0" y="1142064"/>
+                    <a:pt x="0" y="992947"/>
+                  </a:cubicBezTo>
+                  <a:cubicBezTo>
+                    <a:pt x="0" y="974307"/>
+                    <a:pt x="3778" y="956109"/>
+                    <a:pt x="10971" y="938533"/>
+                  </a:cubicBezTo>
+                  <a:lnTo>
+                    <a:pt x="15626" y="931034"/>
+                  </a:lnTo>
+                  <a:lnTo>
+                    <a:pt x="540000" y="0"/>
+                  </a:lnTo>
+                  <a:close/>
+                </a:path>
+              </a:pathLst>
+            </a:custGeom>
+            <a:gradFill>
+              <a:gsLst>
+                <a:gs pos="60000">
+                  <a:schemeClr val="bg2">
+                    <a:lumMod val="90000"/>
+                    <a:lumOff val="10000"/>
+                  </a:schemeClr>
+                </a:gs>
+                <a:gs pos="30000">
+                  <a:schemeClr val="bg2">
+                    <a:lumMod val="90000"/>
+                    <a:lumOff val="10000"/>
+                  </a:schemeClr>
+                </a:gs>
+                <a:gs pos="40000">
+                  <a:schemeClr val="bg2">
+                    <a:lumMod val="75000"/>
+                    <a:lumOff val="25000"/>
+                  </a:schemeClr>
+                </a:gs>
+                <a:gs pos="100000">
+                  <a:schemeClr val="bg2"/>
+                </a:gs>
+              </a:gsLst>
+              <a:lin ang="600000" scaled="0"/>
+            </a:gradFill>
+            <a:ln>
+              <a:noFill/>
+            </a:ln>
+            <a:effectLst>
+              <a:innerShdw blurRad="254000" dist="101600" dir="2700000">
+                <a:schemeClr val="accent1">
+                  <a:lumMod val="60000"/>
+                  <a:lumOff val="40000"/>
+                  <a:alpha val="20000"/>
+                </a:schemeClr>
+              </a:innerShdw>
+            </a:effectLst>
+          </p:spPr>
+          <p:style>
+            <a:lnRef idx="2">
+              <a:schemeClr val="accent1">
+                <a:shade val="50000"/>
+              </a:schemeClr>
+            </a:lnRef>
+            <a:fillRef idx="1">
+              <a:schemeClr val="accent1"/>
+            </a:fillRef>
+            <a:effectRef idx="0">
+              <a:schemeClr val="accent1"/>
+            </a:effectRef>
+            <a:fontRef idx="minor">
+              <a:schemeClr val="lt1"/>
+            </a:fontRef>
+          </p:style>
+          <p:txBody>
+            <a:bodyPr rot="0" spcFirstLastPara="0" vertOverflow="overflow" horzOverflow="overflow" vert="horz" wrap="square" lIns="91440" tIns="45720" rIns="91440" bIns="45720" numCol="1" spcCol="0" rtlCol="0" fromWordArt="0" anchor="ctr" anchorCtr="0" forceAA="0" compatLnSpc="1">
+              <a:prstTxWarp prst="textNoShape">
+                <a:avLst/>
+              </a:prstTxWarp>
+              <a:noAutofit/>
+            </a:bodyPr>
+            <a:lstStyle>
+              <a:defPPr>
+                <a:defRPr lang="de-DE"/>
+              </a:defPPr>
+            </a:lstStyle>
+            <a:p>
+              <a:pPr algn="ctr" rtl="0"/>
+              <a:endParaRPr lang="de-DE" dirty="0"/>
+            </a:p>
+          </p:txBody>
+        </p:sp>
+        <p:sp>
+          <p:nvSpPr>
+            <p:cNvPr id="21" name="Ellipse 20">
+              <a:extLst>
+                <a:ext uri="{FF2B5EF4-FFF2-40B4-BE49-F238E27FC236}">
+                  <a16:creationId xmlns:a16="http://schemas.microsoft.com/office/drawing/2014/main" id="{6B7B7215-A661-477E-91D0-CDBE5564D2B9}"/>
+                </a:ext>
+              </a:extLst>
+            </p:cNvPr>
+            <p:cNvSpPr/>
+            <p:nvPr/>
+          </p:nvSpPr>
+          <p:spPr>
+            <a:xfrm rot="8100000">
+              <a:off x="3047090" y="1506466"/>
+              <a:ext cx="270000" cy="540000"/>
+            </a:xfrm>
+            <a:prstGeom prst="ellipse">
+              <a:avLst/>
+            </a:prstGeom>
+            <a:gradFill>
+              <a:gsLst>
+                <a:gs pos="100000">
+                  <a:schemeClr val="bg2">
+                    <a:lumMod val="90000"/>
+                    <a:lumOff val="10000"/>
+                  </a:schemeClr>
+                </a:gs>
+                <a:gs pos="50000">
+                  <a:schemeClr val="bg2">
+                    <a:lumMod val="95000"/>
+                    <a:lumOff val="5000"/>
+                  </a:schemeClr>
+                </a:gs>
+              </a:gsLst>
+              <a:lin ang="5400000" scaled="0"/>
+            </a:gradFill>
+            <a:ln>
+              <a:noFill/>
+            </a:ln>
+            <a:effectLst>
+              <a:innerShdw blurRad="1270000" dist="2540000">
+                <a:schemeClr val="accent1">
+                  <a:lumMod val="60000"/>
+                  <a:lumOff val="40000"/>
+                  <a:alpha val="0"/>
+                </a:schemeClr>
+              </a:innerShdw>
+            </a:effectLst>
+          </p:spPr>
+          <p:style>
+            <a:lnRef idx="2">
+              <a:schemeClr val="accent1">
+                <a:shade val="50000"/>
+              </a:schemeClr>
+            </a:lnRef>
+            <a:fillRef idx="1">
+              <a:schemeClr val="accent1"/>
+            </a:fillRef>
+            <a:effectRef idx="0">
+              <a:schemeClr val="accent1"/>
+            </a:effectRef>
+            <a:fontRef idx="minor">
+              <a:schemeClr val="lt1"/>
+            </a:fontRef>
+          </p:style>
+          <p:txBody>
+            <a:bodyPr rot="0" spcFirstLastPara="0" vertOverflow="overflow" horzOverflow="overflow" vert="horz" wrap="square" lIns="91440" tIns="45720" rIns="91440" bIns="45720" numCol="1" spcCol="0" rtlCol="0" fromWordArt="0" anchor="ctr" anchorCtr="0" forceAA="0" compatLnSpc="1">
+              <a:prstTxWarp prst="textNoShape">
+                <a:avLst/>
+              </a:prstTxWarp>
+              <a:noAutofit/>
+            </a:bodyPr>
+            <a:lstStyle>
+              <a:defPPr>
+                <a:defRPr lang="de-DE"/>
+              </a:defPPr>
+            </a:lstStyle>
+            <a:p>
+              <a:pPr algn="ctr" rtl="0"/>
+              <a:endParaRPr lang="de-DE" dirty="0"/>
+            </a:p>
+          </p:txBody>
+        </p:sp>
+      </p:grpSp>
       <p:sp>
         <p:nvSpPr>
           <p:cNvPr id="3" name="Inhaltsplatzhalter 2">
             <a:extLst>
               <a:ext uri="{FF2B5EF4-FFF2-40B4-BE49-F238E27FC236}">
-                <a16:creationId xmlns:a16="http://schemas.microsoft.com/office/drawing/2014/main" id="{0C813049-5F46-053E-6279-8183259649A6}"/>
+                <a16:creationId xmlns:a16="http://schemas.microsoft.com/office/drawing/2014/main" id="{02C6BF36-D4F5-4363-B440-BDAE50BBD4B6}"/>
               </a:ext>
             </a:extLst>
           </p:cNvPr>
@@ -12803,8 +12117,8 @@
         </p:nvSpPr>
         <p:spPr>
           <a:xfrm>
-            <a:off x="553720" y="1917065"/>
-            <a:ext cx="2921000" cy="4297680"/>
+            <a:off x="550862" y="1965095"/>
+            <a:ext cx="5435600" cy="3995650"/>
           </a:xfrm>
         </p:spPr>
         <p:txBody>
@@ -12821,28 +12135,28 @@
               </a:defRPr>
             </a:lvl1pPr>
             <a:lvl2pPr>
-              <a:defRPr lang="de-DE" sz="1200">
+              <a:defRPr lang="de-DE" sz="1800">
                 <a:solidFill>
                   <a:schemeClr val="tx1"/>
                 </a:solidFill>
               </a:defRPr>
             </a:lvl2pPr>
             <a:lvl3pPr>
-              <a:defRPr lang="de-DE" sz="1200">
+              <a:defRPr lang="de-DE" sz="1800">
                 <a:solidFill>
                   <a:schemeClr val="tx1"/>
                 </a:solidFill>
               </a:defRPr>
             </a:lvl3pPr>
             <a:lvl4pPr>
-              <a:defRPr lang="de-DE" sz="1200">
+              <a:defRPr lang="de-DE" sz="1800">
                 <a:solidFill>
                   <a:schemeClr val="tx1"/>
                 </a:solidFill>
               </a:defRPr>
             </a:lvl4pPr>
             <a:lvl5pPr>
-              <a:defRPr lang="de-DE" sz="1200">
+              <a:defRPr lang="de-DE" sz="1800">
                 <a:solidFill>
                   <a:schemeClr val="tx1"/>
                 </a:solidFill>
@@ -12888,10 +12202,10 @@
       </p:sp>
       <p:sp>
         <p:nvSpPr>
-          <p:cNvPr id="8" name="Tabellenplatzhalter 7">
+          <p:cNvPr id="16" name="Inhaltsplatzhalter 2">
             <a:extLst>
               <a:ext uri="{FF2B5EF4-FFF2-40B4-BE49-F238E27FC236}">
-                <a16:creationId xmlns:a16="http://schemas.microsoft.com/office/drawing/2014/main" id="{423FEB60-8FB5-7F10-EDD7-8AB4B3139EF6}"/>
+                <a16:creationId xmlns:a16="http://schemas.microsoft.com/office/drawing/2014/main" id="{C4B946DE-F802-2F36-2789-09D7F8604081}"/>
               </a:ext>
             </a:extLst>
           </p:cNvPr>
@@ -12899,13 +12213,13 @@
             <a:spLocks noGrp="1"/>
           </p:cNvSpPr>
           <p:nvPr>
-            <p:ph type="tbl" sz="quarter" idx="13" hasCustomPrompt="1"/>
+            <p:ph sz="half" idx="13" hasCustomPrompt="1"/>
           </p:nvPr>
         </p:nvSpPr>
         <p:spPr>
           <a:xfrm>
-            <a:off x="4048759" y="1917065"/>
-            <a:ext cx="7591799" cy="4297680"/>
+            <a:off x="6301305" y="1965095"/>
+            <a:ext cx="5339397" cy="3995650"/>
           </a:xfrm>
         </p:spPr>
         <p:txBody>
@@ -12913,19 +12227,76 @@
             <a:normAutofit/>
           </a:bodyPr>
           <a:lstStyle>
-            <a:lvl1pPr>
-              <a:defRPr lang="de-DE" sz="2000">
+            <a:lvl1pPr marL="0" indent="0">
+              <a:buNone/>
+              <a:defRPr lang="de-DE" sz="1800">
                 <a:solidFill>
                   <a:schemeClr val="tx1"/>
                 </a:solidFill>
               </a:defRPr>
             </a:lvl1pPr>
+            <a:lvl2pPr>
+              <a:defRPr lang="de-DE" sz="1800">
+                <a:solidFill>
+                  <a:schemeClr val="tx1"/>
+                </a:solidFill>
+              </a:defRPr>
+            </a:lvl2pPr>
+            <a:lvl3pPr>
+              <a:defRPr lang="de-DE" sz="1800">
+                <a:solidFill>
+                  <a:schemeClr val="tx1"/>
+                </a:solidFill>
+              </a:defRPr>
+            </a:lvl3pPr>
+            <a:lvl4pPr>
+              <a:defRPr lang="de-DE" sz="1800">
+                <a:solidFill>
+                  <a:schemeClr val="tx1"/>
+                </a:solidFill>
+              </a:defRPr>
+            </a:lvl4pPr>
+            <a:lvl5pPr>
+              <a:defRPr lang="de-DE" sz="1800">
+                <a:solidFill>
+                  <a:schemeClr val="tx1"/>
+                </a:solidFill>
+              </a:defRPr>
+            </a:lvl5pPr>
           </a:lstStyle>
           <a:p>
-            <a:pPr rtl="0"/>
+            <a:pPr lvl="0" rtl="0"/>
             <a:r>
               <a:rPr lang="de-DE"/>
-              <a:t>Tabelle durch Klicken auf Symbol hinzufügen</a:t>
+              <a:t>Klicken, um Inhalt hinzuzufügen</a:t>
+            </a:r>
+          </a:p>
+          <a:p>
+            <a:pPr lvl="1" rtl="0"/>
+            <a:r>
+              <a:rPr lang="de-DE"/>
+              <a:t>Zweite Ebene</a:t>
+            </a:r>
+          </a:p>
+          <a:p>
+            <a:pPr lvl="2" rtl="0"/>
+            <a:r>
+              <a:rPr lang="de-DE"/>
+              <a:t>Dritte Ebene</a:t>
+            </a:r>
+          </a:p>
+          <a:p>
+            <a:pPr lvl="3" rtl="0"/>
+            <a:r>
+              <a:rPr lang="de-DE"/>
+              <a:t>Vierte Ebene</a:t>
+            </a:r>
+          </a:p>
+          <a:p>
+            <a:pPr lvl="4" rtl="0"/>
+            <a:r>
+              <a:rPr lang="de-DE"/>
+              <a:t>Fünfte Ebene</a:t>
             </a:r>
           </a:p>
         </p:txBody>
@@ -12935,7 +12306,7 @@
           <p:cNvPr id="5" name="Datumsplatzhalter 4">
             <a:extLst>
               <a:ext uri="{FF2B5EF4-FFF2-40B4-BE49-F238E27FC236}">
-                <a16:creationId xmlns:a16="http://schemas.microsoft.com/office/drawing/2014/main" id="{C6CFCEB5-4092-FD13-478E-51CD74FDB82E}"/>
+                <a16:creationId xmlns:a16="http://schemas.microsoft.com/office/drawing/2014/main" id="{BB99A8AF-0998-4613-B1D8-C14ECBFFDF67}"/>
               </a:ext>
             </a:extLst>
           </p:cNvPr>
@@ -12969,7 +12340,7 @@
           <p:cNvPr id="6" name="Fußzeilenplatzhalter 5">
             <a:extLst>
               <a:ext uri="{FF2B5EF4-FFF2-40B4-BE49-F238E27FC236}">
-                <a16:creationId xmlns:a16="http://schemas.microsoft.com/office/drawing/2014/main" id="{5D077A4D-E7C0-912D-293F-D93F0CB5CA49}"/>
+                <a16:creationId xmlns:a16="http://schemas.microsoft.com/office/drawing/2014/main" id="{66E44EAA-B8A9-4428-A9DF-1174DA940990}"/>
               </a:ext>
             </a:extLst>
           </p:cNvPr>
@@ -12999,7 +12370,7 @@
           <p:cNvPr id="7" name="Foliennummernplatzhalter 6">
             <a:extLst>
               <a:ext uri="{FF2B5EF4-FFF2-40B4-BE49-F238E27FC236}">
-                <a16:creationId xmlns:a16="http://schemas.microsoft.com/office/drawing/2014/main" id="{CA6AA9E1-334B-5F8F-8A92-67DD095F7838}"/>
+                <a16:creationId xmlns:a16="http://schemas.microsoft.com/office/drawing/2014/main" id="{19E5C381-C899-4BF9-B584-2D78074D1CB2}"/>
               </a:ext>
             </a:extLst>
           </p:cNvPr>
@@ -13020,7 +12391,7 @@
           </a:lstStyle>
           <a:p>
             <a:pPr rtl="0"/>
-            <a:fld id="{CBD12358-51D2-46B3-9BDE-DF29528B9454}" type="slidenum">
+            <a:fld id="{DBA1B0FB-D917-4C8C-928F-313BD683BF39}" type="slidenum">
               <a:rPr lang="de-DE" smtClean="0"/>
               <a:t>‹Nr.›</a:t>
             </a:fld>
@@ -13031,7 +12402,7 @@
     </p:spTree>
     <p:extLst>
       <p:ext uri="{BB962C8B-B14F-4D97-AF65-F5344CB8AC3E}">
-        <p14:creationId xmlns:p14="http://schemas.microsoft.com/office/powerpoint/2010/main" val="2019083638"/>
+        <p14:creationId xmlns:p14="http://schemas.microsoft.com/office/powerpoint/2010/main" val="3617165047"/>
       </p:ext>
     </p:extLst>
   </p:cSld>
@@ -13346,11 +12717,9 @@
     <p:sldLayoutId id="2147483698" r:id="rId6"/>
     <p:sldLayoutId id="2147483704" r:id="rId7"/>
     <p:sldLayoutId id="2147483699" r:id="rId8"/>
-    <p:sldLayoutId id="2147483700" r:id="rId9"/>
-    <p:sldLayoutId id="2147483688" r:id="rId10"/>
-    <p:sldLayoutId id="2147483701" r:id="rId11"/>
-    <p:sldLayoutId id="2147483686" r:id="rId12"/>
-    <p:sldLayoutId id="2147483685" r:id="rId13"/>
+    <p:sldLayoutId id="2147483688" r:id="rId9"/>
+    <p:sldLayoutId id="2147483686" r:id="rId10"/>
+    <p:sldLayoutId id="2147483685" r:id="rId11"/>
   </p:sldLayoutIdLst>
   <p:hf sldNum="0" hdr="0" ftr="0" dt="0"/>
   <p:txStyles>
@@ -13902,10 +13271,27 @@
             </a:defPPr>
           </a:lstStyle>
           <a:p>
-            <a:pPr rtl="0"/>
+            <a:pPr algn="ctr"/>
+            <a:r>
+              <a:rPr lang="de-DE" dirty="0"/>
+              <a:t>UNO</a:t>
+            </a:r>
+            <a:br>
+              <a:rPr lang="de-DE" dirty="0"/>
+            </a:br>
+            <a:br>
+              <a:rPr lang="de-DE" dirty="0"/>
+            </a:br>
             <a:r>
               <a:rPr lang="de-DE" dirty="0"/>
               <a:t>KI-Agenten</a:t>
+            </a:r>
+            <a:br>
+              <a:rPr lang="de-DE" dirty="0"/>
+            </a:br>
+            <a:r>
+              <a:rPr lang="de-DE" dirty="0"/>
+              <a:t>verstehen</a:t>
             </a:r>
           </a:p>
         </p:txBody>
@@ -13958,6 +13344,310 @@
 </file>
 
 <file path=ppt/slides/slide10.xml><?xml version="1.0" encoding="utf-8"?>
+<p:sld xmlns:a="http://schemas.openxmlformats.org/drawingml/2006/main" xmlns:r="http://schemas.openxmlformats.org/officeDocument/2006/relationships" xmlns:p="http://schemas.openxmlformats.org/presentationml/2006/main">
+  <p:cSld>
+    <p:spTree>
+      <p:nvGrpSpPr>
+        <p:cNvPr id="1" name="">
+          <a:extLst>
+            <a:ext uri="{FF2B5EF4-FFF2-40B4-BE49-F238E27FC236}">
+              <a16:creationId xmlns:a16="http://schemas.microsoft.com/office/drawing/2014/main" id="{E3A455EB-3BC6-B5A0-2735-DD5EF6AFEBF9}"/>
+            </a:ext>
+          </a:extLst>
+        </p:cNvPr>
+        <p:cNvGrpSpPr/>
+        <p:nvPr/>
+      </p:nvGrpSpPr>
+      <p:grpSpPr>
+        <a:xfrm>
+          <a:off x="0" y="0"/>
+          <a:ext cx="0" cy="0"/>
+          <a:chOff x="0" y="0"/>
+          <a:chExt cx="0" cy="0"/>
+        </a:xfrm>
+      </p:grpSpPr>
+      <p:sp>
+        <p:nvSpPr>
+          <p:cNvPr id="3" name="Titel 2">
+            <a:extLst>
+              <a:ext uri="{FF2B5EF4-FFF2-40B4-BE49-F238E27FC236}">
+                <a16:creationId xmlns:a16="http://schemas.microsoft.com/office/drawing/2014/main" id="{2E76DC4E-2D3B-F875-D948-827EEF1A170F}"/>
+              </a:ext>
+            </a:extLst>
+          </p:cNvPr>
+          <p:cNvSpPr>
+            <a:spLocks noGrp="1"/>
+          </p:cNvSpPr>
+          <p:nvPr>
+            <p:ph type="title"/>
+          </p:nvPr>
+        </p:nvSpPr>
+        <p:spPr>
+          <a:xfrm>
+            <a:off x="550863" y="508635"/>
+            <a:ext cx="11090274" cy="773024"/>
+          </a:xfrm>
+        </p:spPr>
+        <p:txBody>
+          <a:bodyPr rtlCol="0"/>
+          <a:lstStyle>
+            <a:defPPr>
+              <a:defRPr lang="de-DE"/>
+            </a:defPPr>
+          </a:lstStyle>
+          <a:p>
+            <a:pPr algn="ctr" rtl="0"/>
+            <a:r>
+              <a:rPr lang="de-DE" dirty="0"/>
+              <a:t>Umgebungen</a:t>
+            </a:r>
+          </a:p>
+        </p:txBody>
+      </p:sp>
+      <p:pic>
+        <p:nvPicPr>
+          <p:cNvPr id="9" name="Inhaltsplatzhalter 8">
+            <a:extLst>
+              <a:ext uri="{FF2B5EF4-FFF2-40B4-BE49-F238E27FC236}">
+                <a16:creationId xmlns:a16="http://schemas.microsoft.com/office/drawing/2014/main" id="{E7461B8F-C142-EF85-B61D-CEBD17223721}"/>
+              </a:ext>
+            </a:extLst>
+          </p:cNvPr>
+          <p:cNvPicPr>
+            <a:picLocks noGrp="1" noChangeAspect="1"/>
+          </p:cNvPicPr>
+          <p:nvPr>
+            <p:ph sz="half" idx="1"/>
+          </p:nvPr>
+        </p:nvPicPr>
+        <p:blipFill>
+          <a:blip r:embed="rId3">
+            <a:extLst>
+              <a:ext uri="{28A0092B-C50C-407E-A947-70E740481C1C}">
+                <a14:useLocalDpi xmlns:a14="http://schemas.microsoft.com/office/drawing/2010/main" val="0"/>
+              </a:ext>
+            </a:extLst>
+          </a:blip>
+          <a:stretch>
+            <a:fillRect/>
+          </a:stretch>
+        </p:blipFill>
+        <p:spPr>
+          <a:xfrm>
+            <a:off x="550863" y="2563988"/>
+            <a:ext cx="5435600" cy="3061937"/>
+          </a:xfrm>
+          <a:prstGeom prst="rect">
+            <a:avLst/>
+          </a:prstGeom>
+        </p:spPr>
+      </p:pic>
+      <p:sp>
+        <p:nvSpPr>
+          <p:cNvPr id="7" name="Inhaltsplatzhalter 6">
+            <a:extLst>
+              <a:ext uri="{FF2B5EF4-FFF2-40B4-BE49-F238E27FC236}">
+                <a16:creationId xmlns:a16="http://schemas.microsoft.com/office/drawing/2014/main" id="{34CD47AC-C5DB-1AEC-B306-35A7FD3B5C37}"/>
+              </a:ext>
+            </a:extLst>
+          </p:cNvPr>
+          <p:cNvSpPr>
+            <a:spLocks noGrp="1"/>
+          </p:cNvSpPr>
+          <p:nvPr>
+            <p:ph sz="half" idx="13"/>
+          </p:nvPr>
+        </p:nvSpPr>
+        <p:spPr/>
+        <p:txBody>
+          <a:bodyPr>
+            <a:normAutofit/>
+          </a:bodyPr>
+          <a:lstStyle/>
+          <a:p>
+            <a:pPr marL="285750" indent="-285750">
+              <a:buFont typeface="Arial" panose="020B0604020202020204" pitchFamily="34" charset="0"/>
+              <a:buChar char="•"/>
+            </a:pPr>
+            <a:r>
+              <a:rPr lang="de-AT" sz="2800" dirty="0"/>
+              <a:t>Terminal</a:t>
+            </a:r>
+          </a:p>
+          <a:p>
+            <a:pPr marL="285750" indent="-285750">
+              <a:buFont typeface="Arial" panose="020B0604020202020204" pitchFamily="34" charset="0"/>
+              <a:buChar char="•"/>
+            </a:pPr>
+            <a:r>
+              <a:rPr lang="de-AT" sz="2800" dirty="0" err="1"/>
+              <a:t>WebApp</a:t>
+            </a:r>
+            <a:endParaRPr lang="de-AT" sz="2800" dirty="0"/>
+          </a:p>
+          <a:p>
+            <a:pPr marL="285750" indent="-285750">
+              <a:buFont typeface="Arial" panose="020B0604020202020204" pitchFamily="34" charset="0"/>
+              <a:buChar char="•"/>
+            </a:pPr>
+            <a:r>
+              <a:rPr lang="de-AT" sz="2800" dirty="0"/>
+              <a:t>Game / </a:t>
+            </a:r>
+            <a:r>
+              <a:rPr lang="de-AT" sz="2800" dirty="0" err="1"/>
+              <a:t>GameStatus</a:t>
+            </a:r>
+            <a:endParaRPr lang="de-AT" sz="2800" dirty="0"/>
+          </a:p>
+          <a:p>
+            <a:pPr marL="285750" indent="-285750">
+              <a:buFont typeface="Arial" panose="020B0604020202020204" pitchFamily="34" charset="0"/>
+              <a:buChar char="•"/>
+            </a:pPr>
+            <a:r>
+              <a:rPr lang="de-AT" sz="2800" dirty="0" err="1"/>
+              <a:t>DatenBank</a:t>
+            </a:r>
+            <a:endParaRPr lang="de-AT" sz="2800" dirty="0"/>
+          </a:p>
+          <a:p>
+            <a:pPr marL="285750" indent="-285750">
+              <a:buFont typeface="Arial" panose="020B0604020202020204" pitchFamily="34" charset="0"/>
+              <a:buChar char="•"/>
+            </a:pPr>
+            <a:r>
+              <a:rPr lang="de-AT" sz="2800" dirty="0"/>
+              <a:t>Chat</a:t>
+            </a:r>
+          </a:p>
+        </p:txBody>
+      </p:sp>
+    </p:spTree>
+    <p:extLst>
+      <p:ext uri="{BB962C8B-B14F-4D97-AF65-F5344CB8AC3E}">
+        <p14:creationId xmlns:p14="http://schemas.microsoft.com/office/powerpoint/2010/main" val="4117357335"/>
+      </p:ext>
+    </p:extLst>
+  </p:cSld>
+  <p:clrMapOvr>
+    <a:masterClrMapping/>
+  </p:clrMapOvr>
+</p:sld>
+</file>
+
+<file path=ppt/slides/slide11.xml><?xml version="1.0" encoding="utf-8"?>
+<p:sld xmlns:a="http://schemas.openxmlformats.org/drawingml/2006/main" xmlns:r="http://schemas.openxmlformats.org/officeDocument/2006/relationships" xmlns:p="http://schemas.openxmlformats.org/presentationml/2006/main">
+  <p:cSld>
+    <p:spTree>
+      <p:nvGrpSpPr>
+        <p:cNvPr id="1" name=""/>
+        <p:cNvGrpSpPr/>
+        <p:nvPr/>
+      </p:nvGrpSpPr>
+      <p:grpSpPr>
+        <a:xfrm>
+          <a:off x="0" y="0"/>
+          <a:ext cx="0" cy="0"/>
+          <a:chOff x="0" y="0"/>
+          <a:chExt cx="0" cy="0"/>
+        </a:xfrm>
+      </p:grpSpPr>
+      <p:pic>
+        <p:nvPicPr>
+          <p:cNvPr id="5" name="Bildplatzhalter 7" descr="Digitaler Hintergrund für Datenpunkte">
+            <a:extLst>
+              <a:ext uri="{FF2B5EF4-FFF2-40B4-BE49-F238E27FC236}">
+                <a16:creationId xmlns:a16="http://schemas.microsoft.com/office/drawing/2014/main" id="{1358CD3B-43A8-5BF7-2E60-B0563F068D11}"/>
+              </a:ext>
+            </a:extLst>
+          </p:cNvPr>
+          <p:cNvPicPr>
+            <a:picLocks noGrp="1" noChangeAspect="1"/>
+          </p:cNvPicPr>
+          <p:nvPr>
+            <p:ph type="pic" sz="quarter" idx="13"/>
+          </p:nvPr>
+        </p:nvPicPr>
+        <p:blipFill>
+          <a:blip r:embed="rId3">
+            <a:alphaModFix amt="45000"/>
+            <a:extLst>
+              <a:ext uri="{28A0092B-C50C-407E-A947-70E740481C1C}">
+                <a14:useLocalDpi xmlns:a14="http://schemas.microsoft.com/office/drawing/2010/main" val="0"/>
+              </a:ext>
+            </a:extLst>
+          </a:blip>
+          <a:srcRect/>
+          <a:stretch/>
+        </p:blipFill>
+        <p:spPr>
+          <a:xfrm>
+            <a:off x="0" y="0"/>
+            <a:ext cx="12192000" cy="6858000"/>
+          </a:xfrm>
+        </p:spPr>
+      </p:pic>
+      <p:sp>
+        <p:nvSpPr>
+          <p:cNvPr id="7" name="Titel 6">
+            <a:extLst>
+              <a:ext uri="{FF2B5EF4-FFF2-40B4-BE49-F238E27FC236}">
+                <a16:creationId xmlns:a16="http://schemas.microsoft.com/office/drawing/2014/main" id="{8A84D4AF-8D29-5A55-F3F8-1E928E3B08FF}"/>
+              </a:ext>
+            </a:extLst>
+          </p:cNvPr>
+          <p:cNvSpPr>
+            <a:spLocks noGrp="1"/>
+          </p:cNvSpPr>
+          <p:nvPr>
+            <p:ph type="ctrTitle"/>
+          </p:nvPr>
+        </p:nvSpPr>
+        <p:spPr>
+          <a:xfrm>
+            <a:off x="1524000" y="1376680"/>
+            <a:ext cx="9144000" cy="2286000"/>
+          </a:xfrm>
+        </p:spPr>
+        <p:txBody>
+          <a:bodyPr rtlCol="0"/>
+          <a:lstStyle>
+            <a:defPPr>
+              <a:defRPr lang="de-DE"/>
+            </a:defPPr>
+          </a:lstStyle>
+          <a:p>
+            <a:pPr rtl="0"/>
+            <a:r>
+              <a:rPr lang="de-DE" dirty="0"/>
+              <a:t>Quick Installation </a:t>
+            </a:r>
+            <a:r>
+              <a:rPr lang="de-DE" dirty="0" err="1"/>
+              <a:t>of</a:t>
+            </a:r>
+            <a:r>
+              <a:rPr lang="de-DE" dirty="0"/>
+              <a:t> a simple lokal KI-Agent</a:t>
+            </a:r>
+          </a:p>
+        </p:txBody>
+      </p:sp>
+    </p:spTree>
+    <p:extLst>
+      <p:ext uri="{BB962C8B-B14F-4D97-AF65-F5344CB8AC3E}">
+        <p14:creationId xmlns:p14="http://schemas.microsoft.com/office/powerpoint/2010/main" val="2855514139"/>
+      </p:ext>
+    </p:extLst>
+  </p:cSld>
+  <p:clrMapOvr>
+    <a:masterClrMapping/>
+  </p:clrMapOvr>
+</p:sld>
+</file>
+
+<file path=ppt/slides/slide12.xml><?xml version="1.0" encoding="utf-8"?>
 <p:sld xmlns:a="http://schemas.openxmlformats.org/drawingml/2006/main" xmlns:r="http://schemas.openxmlformats.org/officeDocument/2006/relationships" xmlns:p="http://schemas.openxmlformats.org/presentationml/2006/main">
   <p:cSld>
     <p:spTree>
@@ -14450,45 +14140,6 @@
       </p:grpSp>
       <p:sp>
         <p:nvSpPr>
-          <p:cNvPr id="2" name="Titel 1">
-            <a:extLst>
-              <a:ext uri="{FF2B5EF4-FFF2-40B4-BE49-F238E27FC236}">
-                <a16:creationId xmlns:a16="http://schemas.microsoft.com/office/drawing/2014/main" id="{338A15DE-D135-0710-9984-A0A55E960CB0}"/>
-              </a:ext>
-            </a:extLst>
-          </p:cNvPr>
-          <p:cNvSpPr>
-            <a:spLocks noGrp="1"/>
-          </p:cNvSpPr>
-          <p:nvPr>
-            <p:ph type="title"/>
-          </p:nvPr>
-        </p:nvSpPr>
-        <p:spPr>
-          <a:xfrm>
-            <a:off x="600974" y="196900"/>
-            <a:ext cx="4899628" cy="2331490"/>
-          </a:xfrm>
-          <a:noFill/>
-        </p:spPr>
-        <p:txBody>
-          <a:bodyPr rtlCol="0" anchor="b"/>
-          <a:lstStyle>
-            <a:defPPr>
-              <a:defRPr lang="de-DE"/>
-            </a:defPPr>
-          </a:lstStyle>
-          <a:p>
-            <a:pPr rtl="0"/>
-            <a:r>
-              <a:rPr lang="de-DE" dirty="0"/>
-              <a:t>Wirkung der Rede</a:t>
-            </a:r>
-          </a:p>
-        </p:txBody>
-      </p:sp>
-      <p:sp>
-        <p:nvSpPr>
           <p:cNvPr id="3" name="Inhaltsplatzhalter 2">
             <a:extLst>
               <a:ext uri="{FF2B5EF4-FFF2-40B4-BE49-F238E27FC236}">
@@ -14505,8 +14156,8 @@
         </p:nvSpPr>
         <p:spPr>
           <a:xfrm>
-            <a:off x="583162" y="2827209"/>
-            <a:ext cx="4917440" cy="3442144"/>
+            <a:off x="578822" y="562130"/>
+            <a:ext cx="5335090" cy="5688767"/>
           </a:xfrm>
           <a:noFill/>
         </p:spPr>
@@ -14520,18 +14171,130 @@
             </a:defPPr>
           </a:lstStyle>
           <a:p>
-            <a:pPr rtl="0"/>
+            <a:pPr marL="285750" indent="-285750" rtl="0">
+              <a:buFont typeface="Arial" panose="020B0604020202020204" pitchFamily="34" charset="0"/>
+              <a:buChar char="•"/>
+            </a:pPr>
             <a:r>
               <a:rPr lang="de-DE" dirty="0"/>
-              <a:t>Ihre Fähigkeit, effektiv zu kommunizieren, wird einen bleibenden Eindruck bei Ihrem Publikum hinterlassen.</a:t>
+              <a:t>Python installieren</a:t>
             </a:r>
           </a:p>
           <a:p>
-            <a:pPr rtl="0"/>
+            <a:pPr marL="285750" indent="-285750" rtl="0">
+              <a:buFont typeface="Arial" panose="020B0604020202020204" pitchFamily="34" charset="0"/>
+              <a:buChar char="•"/>
+            </a:pPr>
             <a:r>
               <a:rPr lang="de-DE" dirty="0"/>
-              <a:t>Zu einer effektiven Kommunikation gehört nicht nur die Übermittlung einer Botschaft, sondern auch die Auseinandersetzung mit den Erfahrungen, Werten und Emotionen der Zuhörer.</a:t>
+              <a:t>(Virtuelle Umgebung erstellen – </a:t>
             </a:r>
+            <a:r>
+              <a:rPr lang="de-DE" dirty="0" err="1"/>
+              <a:t>best</a:t>
+            </a:r>
+            <a:r>
+              <a:rPr lang="de-DE" dirty="0"/>
+              <a:t> </a:t>
+            </a:r>
+            <a:r>
+              <a:rPr lang="de-DE" dirty="0" err="1"/>
+              <a:t>practice</a:t>
+            </a:r>
+            <a:r>
+              <a:rPr lang="de-DE" dirty="0"/>
+              <a:t>)</a:t>
+            </a:r>
+          </a:p>
+          <a:p>
+            <a:pPr marL="285750" indent="-285750" rtl="0">
+              <a:buFont typeface="Arial" panose="020B0604020202020204" pitchFamily="34" charset="0"/>
+              <a:buChar char="•"/>
+            </a:pPr>
+            <a:r>
+              <a:rPr lang="de-DE" dirty="0" err="1"/>
+              <a:t>Ollama</a:t>
+            </a:r>
+            <a:r>
+              <a:rPr lang="de-DE" dirty="0"/>
+              <a:t> installieren</a:t>
+            </a:r>
+          </a:p>
+          <a:p>
+            <a:pPr marL="285750" indent="-285750" rtl="0">
+              <a:buFont typeface="Arial" panose="020B0604020202020204" pitchFamily="34" charset="0"/>
+              <a:buChar char="•"/>
+            </a:pPr>
+            <a:r>
+              <a:rPr lang="de-DE" dirty="0"/>
+              <a:t>Modell herunterladen – z.B. </a:t>
+            </a:r>
+            <a:r>
+              <a:rPr lang="de-DE" dirty="0" err="1"/>
+              <a:t>ollama</a:t>
+            </a:r>
+            <a:r>
+              <a:rPr lang="de-DE" dirty="0"/>
+              <a:t> pull </a:t>
+            </a:r>
+            <a:r>
+              <a:rPr lang="de-DE" dirty="0" err="1"/>
+              <a:t>llama</a:t>
+            </a:r>
+            <a:r>
+              <a:rPr lang="de-DE" dirty="0"/>
+              <a:t> 3.2</a:t>
+            </a:r>
+          </a:p>
+          <a:p>
+            <a:pPr marL="285750" indent="-285750" rtl="0">
+              <a:buFont typeface="Arial" panose="020B0604020202020204" pitchFamily="34" charset="0"/>
+              <a:buChar char="•"/>
+            </a:pPr>
+            <a:r>
+              <a:rPr lang="de-DE" dirty="0"/>
+              <a:t>KI-Agent programmieren / oder einen „Kollegen“ programmieren lassen</a:t>
+            </a:r>
+          </a:p>
+          <a:p>
+            <a:pPr marL="285750" indent="-285750" rtl="0">
+              <a:buFont typeface="Arial" panose="020B0604020202020204" pitchFamily="34" charset="0"/>
+              <a:buChar char="•"/>
+            </a:pPr>
+            <a:r>
+              <a:rPr lang="de-DE" dirty="0"/>
+              <a:t>Python-Agent verwendet </a:t>
+            </a:r>
+            <a:r>
+              <a:rPr lang="de-DE" dirty="0" err="1"/>
+              <a:t>llama</a:t>
+            </a:r>
+            <a:r>
+              <a:rPr lang="de-DE" dirty="0"/>
+              <a:t> 3.2 </a:t>
+            </a:r>
+          </a:p>
+          <a:p>
+            <a:pPr marL="285750" indent="-285750" rtl="0">
+              <a:buFont typeface="Arial" panose="020B0604020202020204" pitchFamily="34" charset="0"/>
+              <a:buChar char="•"/>
+            </a:pPr>
+            <a:r>
+              <a:rPr lang="de-DE" dirty="0"/>
+              <a:t>Inkl. </a:t>
+            </a:r>
+            <a:r>
+              <a:rPr lang="de-DE" dirty="0" err="1"/>
+              <a:t>SystemPromts</a:t>
+            </a:r>
+            <a:r>
+              <a:rPr lang="de-DE" dirty="0"/>
+              <a:t>, Tools, Speicher, Logik, Umgebung</a:t>
+            </a:r>
+          </a:p>
+          <a:p>
+            <a:pPr rtl="0"/>
+            <a:endParaRPr lang="de-DE" dirty="0"/>
           </a:p>
         </p:txBody>
       </p:sp>
@@ -14661,6 +14424,36 @@
           </a:p>
         </p:txBody>
       </p:sp>
+      <p:pic>
+        <p:nvPicPr>
+          <p:cNvPr id="10" name="Grafik 9">
+            <a:extLst>
+              <a:ext uri="{FF2B5EF4-FFF2-40B4-BE49-F238E27FC236}">
+                <a16:creationId xmlns:a16="http://schemas.microsoft.com/office/drawing/2014/main" id="{E0AB5B2C-AAFE-A929-4FBF-2EC9D5E5F755}"/>
+              </a:ext>
+            </a:extLst>
+          </p:cNvPr>
+          <p:cNvPicPr>
+            <a:picLocks noChangeAspect="1"/>
+          </p:cNvPicPr>
+          <p:nvPr/>
+        </p:nvPicPr>
+        <p:blipFill>
+          <a:blip r:embed="rId4"/>
+          <a:stretch>
+            <a:fillRect/>
+          </a:stretch>
+        </p:blipFill>
+        <p:spPr>
+          <a:xfrm>
+            <a:off x="2049462" y="4840502"/>
+            <a:ext cx="3791145" cy="463574"/>
+          </a:xfrm>
+          <a:prstGeom prst="rect">
+            <a:avLst/>
+          </a:prstGeom>
+        </p:spPr>
+      </p:pic>
     </p:spTree>
     <p:extLst>
       <p:ext uri="{BB962C8B-B14F-4D97-AF65-F5344CB8AC3E}">
@@ -14674,1651 +14467,7 @@
 </p:sld>
 </file>
 
-<file path=ppt/slides/slide11.xml><?xml version="1.0" encoding="utf-8"?>
-<p:sld xmlns:a="http://schemas.openxmlformats.org/drawingml/2006/main" xmlns:r="http://schemas.openxmlformats.org/officeDocument/2006/relationships" xmlns:p="http://schemas.openxmlformats.org/presentationml/2006/main">
-  <p:cSld>
-    <p:spTree>
-      <p:nvGrpSpPr>
-        <p:cNvPr id="1" name=""/>
-        <p:cNvGrpSpPr/>
-        <p:nvPr/>
-      </p:nvGrpSpPr>
-      <p:grpSpPr>
-        <a:xfrm>
-          <a:off x="0" y="0"/>
-          <a:ext cx="0" cy="0"/>
-          <a:chOff x="0" y="0"/>
-          <a:chExt cx="0" cy="0"/>
-        </a:xfrm>
-      </p:grpSpPr>
-      <p:sp>
-        <p:nvSpPr>
-          <p:cNvPr id="2" name="Titel 1">
-            <a:extLst>
-              <a:ext uri="{FF2B5EF4-FFF2-40B4-BE49-F238E27FC236}">
-                <a16:creationId xmlns:a16="http://schemas.microsoft.com/office/drawing/2014/main" id="{B7545968-70F7-0180-6448-3547E442EF4A}"/>
-              </a:ext>
-            </a:extLst>
-          </p:cNvPr>
-          <p:cNvSpPr>
-            <a:spLocks noGrp="1"/>
-          </p:cNvSpPr>
-          <p:nvPr>
-            <p:ph type="title"/>
-          </p:nvPr>
-        </p:nvSpPr>
-        <p:spPr>
-          <a:xfrm>
-            <a:off x="550863" y="550801"/>
-            <a:ext cx="11090275" cy="1237360"/>
-          </a:xfrm>
-          <a:noFill/>
-        </p:spPr>
-        <p:txBody>
-          <a:bodyPr rtlCol="0" anchor="t">
-            <a:noAutofit/>
-          </a:bodyPr>
-          <a:lstStyle>
-            <a:defPPr>
-              <a:defRPr lang="de-DE"/>
-            </a:defPPr>
-          </a:lstStyle>
-          <a:p>
-            <a:pPr rtl="0"/>
-            <a:r>
-              <a:rPr lang="de-DE" dirty="0"/>
-              <a:t>Dynamischer Vortrag</a:t>
-            </a:r>
-          </a:p>
-        </p:txBody>
-      </p:sp>
-      <p:sp>
-        <p:nvSpPr>
-          <p:cNvPr id="8" name="Inhaltsplatzhalter 7">
-            <a:extLst>
-              <a:ext uri="{FF2B5EF4-FFF2-40B4-BE49-F238E27FC236}">
-                <a16:creationId xmlns:a16="http://schemas.microsoft.com/office/drawing/2014/main" id="{215CE58D-2739-522B-7C3A-6A7C985360C0}"/>
-              </a:ext>
-            </a:extLst>
-          </p:cNvPr>
-          <p:cNvSpPr>
-            <a:spLocks noGrp="1"/>
-          </p:cNvSpPr>
-          <p:nvPr>
-            <p:ph sz="half" idx="1"/>
-          </p:nvPr>
-        </p:nvSpPr>
-        <p:spPr>
-          <a:xfrm>
-            <a:off x="553719" y="1917065"/>
-            <a:ext cx="3095567" cy="4297680"/>
-          </a:xfrm>
-          <a:noFill/>
-        </p:spPr>
-        <p:txBody>
-          <a:bodyPr vert="horz" lIns="0" tIns="0" rIns="91440" bIns="45720" rtlCol="0" anchor="t">
-            <a:normAutofit/>
-          </a:bodyPr>
-          <a:lstStyle>
-            <a:defPPr>
-              <a:defRPr lang="de-DE"/>
-            </a:defPPr>
-          </a:lstStyle>
-          <a:p>
-            <a:pPr rtl="0"/>
-            <a:r>
-              <a:rPr lang="de-DE" dirty="0"/>
-              <a:t>Erfahren Sie, wie Sie Energie in Ihren Vortrag einfließen lassen, um einen bleibenden Eindruck zu hinterlassen.</a:t>
-            </a:r>
-          </a:p>
-          <a:p>
-            <a:pPr rtl="0"/>
-            <a:r>
-              <a:rPr lang="de-DE" dirty="0"/>
-              <a:t>Eines der Ziele einer effektiven Kommunikation besteht darin, Ihre Zielgruppe zu motivieren.</a:t>
-            </a:r>
-          </a:p>
-        </p:txBody>
-      </p:sp>
-      <p:graphicFrame>
-        <p:nvGraphicFramePr>
-          <p:cNvPr id="16" name="Tabellenplatzhalter 2">
-            <a:extLst>
-              <a:ext uri="{FF2B5EF4-FFF2-40B4-BE49-F238E27FC236}">
-                <a16:creationId xmlns:a16="http://schemas.microsoft.com/office/drawing/2014/main" id="{1904F965-D30E-5A83-B17B-7D030326E77B}"/>
-              </a:ext>
-            </a:extLst>
-          </p:cNvPr>
-          <p:cNvGraphicFramePr>
-            <a:graphicFrameLocks noGrp="1"/>
-          </p:cNvGraphicFramePr>
-          <p:nvPr>
-            <p:ph type="tbl" sz="quarter" idx="13"/>
-            <p:extLst>
-              <p:ext uri="{D42A27DB-BD31-4B8C-83A1-F6EECF244321}">
-                <p14:modId xmlns:p14="http://schemas.microsoft.com/office/powerpoint/2010/main" val="1395063446"/>
-              </p:ext>
-            </p:extLst>
-          </p:nvPr>
-        </p:nvGraphicFramePr>
-        <p:xfrm>
-          <a:off x="4048125" y="1917700"/>
-          <a:ext cx="7601960" cy="4297679"/>
-        </p:xfrm>
-        <a:graphic>
-          <a:graphicData uri="http://schemas.openxmlformats.org/drawingml/2006/table">
-            <a:tbl>
-              <a:tblPr firstRow="1" bandRow="1">
-                <a:tableStyleId>{72833802-FEF1-4C79-8D5D-14CF1EAF98D9}</a:tableStyleId>
-              </a:tblPr>
-              <a:tblGrid>
-                <a:gridCol w="3137704">
-                  <a:extLst>
-                    <a:ext uri="{9D8B030D-6E8A-4147-A177-3AD203B41FA5}">
-                      <a16:colId xmlns:a16="http://schemas.microsoft.com/office/drawing/2014/main" val="127040821"/>
-                    </a:ext>
-                  </a:extLst>
-                </a:gridCol>
-                <a:gridCol w="1932972">
-                  <a:extLst>
-                    <a:ext uri="{9D8B030D-6E8A-4147-A177-3AD203B41FA5}">
-                      <a16:colId xmlns:a16="http://schemas.microsoft.com/office/drawing/2014/main" val="149845700"/>
-                    </a:ext>
-                  </a:extLst>
-                </a:gridCol>
-                <a:gridCol w="1273215">
-                  <a:extLst>
-                    <a:ext uri="{9D8B030D-6E8A-4147-A177-3AD203B41FA5}">
-                      <a16:colId xmlns:a16="http://schemas.microsoft.com/office/drawing/2014/main" val="3119692462"/>
-                    </a:ext>
-                  </a:extLst>
-                </a:gridCol>
-                <a:gridCol w="1258069">
-                  <a:extLst>
-                    <a:ext uri="{9D8B030D-6E8A-4147-A177-3AD203B41FA5}">
-                      <a16:colId xmlns:a16="http://schemas.microsoft.com/office/drawing/2014/main" val="3472639139"/>
-                    </a:ext>
-                  </a:extLst>
-                </a:gridCol>
-              </a:tblGrid>
-              <a:tr h="669277">
-                <a:tc>
-                  <a:txBody>
-                    <a:bodyPr/>
-                    <a:lstStyle>
-                      <a:defPPr>
-                        <a:defRPr lang="de-DE"/>
-                      </a:defPPr>
-                    </a:lstStyle>
-                    <a:p>
-                      <a:pPr algn="l" rtl="0"/>
-                      <a:r>
-                        <a:rPr lang="de-DE" b="0" dirty="0"/>
-                        <a:t>Metrik</a:t>
-                      </a:r>
-                      <a:endParaRPr lang="de-DE" b="0" i="0" dirty="0">
-                        <a:latin typeface="Gill Sans MT" panose="020B0502020104020203" pitchFamily="34" charset="77"/>
-                      </a:endParaRPr>
-                    </a:p>
-                  </a:txBody>
-                  <a:tcPr anchor="ctr"/>
-                </a:tc>
-                <a:tc>
-                  <a:txBody>
-                    <a:bodyPr/>
-                    <a:lstStyle>
-                      <a:defPPr>
-                        <a:defRPr lang="de-DE"/>
-                      </a:defPPr>
-                    </a:lstStyle>
-                    <a:p>
-                      <a:pPr algn="l" rtl="0"/>
-                      <a:r>
-                        <a:rPr lang="de-DE" b="0"/>
-                        <a:t>Messung</a:t>
-                      </a:r>
-                      <a:endParaRPr lang="de-DE" b="0" i="0" dirty="0">
-                        <a:latin typeface="Gill Sans MT" panose="020B0502020104020203" pitchFamily="34" charset="77"/>
-                      </a:endParaRPr>
-                    </a:p>
-                  </a:txBody>
-                  <a:tcPr anchor="ctr"/>
-                </a:tc>
-                <a:tc>
-                  <a:txBody>
-                    <a:bodyPr/>
-                    <a:lstStyle>
-                      <a:defPPr>
-                        <a:defRPr lang="de-DE"/>
-                      </a:defPPr>
-                    </a:lstStyle>
-                    <a:p>
-                      <a:pPr algn="l" rtl="0"/>
-                      <a:r>
-                        <a:rPr lang="de-DE" b="0"/>
-                        <a:t>Ziel</a:t>
-                      </a:r>
-                      <a:endParaRPr lang="de-DE" b="0" i="0" dirty="0">
-                        <a:latin typeface="Gill Sans MT" panose="020B0502020104020203" pitchFamily="34" charset="77"/>
-                      </a:endParaRPr>
-                    </a:p>
-                  </a:txBody>
-                  <a:tcPr anchor="ctr"/>
-                </a:tc>
-                <a:tc>
-                  <a:txBody>
-                    <a:bodyPr/>
-                    <a:lstStyle>
-                      <a:defPPr>
-                        <a:defRPr lang="de-DE"/>
-                      </a:defPPr>
-                    </a:lstStyle>
-                    <a:p>
-                      <a:pPr algn="l" rtl="0"/>
-                      <a:r>
-                        <a:rPr lang="de-DE" b="0"/>
-                        <a:t>Tatsächlich</a:t>
-                      </a:r>
-                      <a:endParaRPr lang="de-DE" b="0" i="0" dirty="0">
-                        <a:latin typeface="Gill Sans MT" panose="020B0502020104020203" pitchFamily="34" charset="77"/>
-                      </a:endParaRPr>
-                    </a:p>
-                  </a:txBody>
-                  <a:tcPr anchor="ctr"/>
-                </a:tc>
-                <a:extLst>
-                  <a:ext uri="{0D108BD9-81ED-4DB2-BD59-A6C34878D82A}">
-                    <a16:rowId xmlns:a16="http://schemas.microsoft.com/office/drawing/2014/main" val="3298013591"/>
-                  </a:ext>
-                </a:extLst>
-              </a:tr>
-              <a:tr h="669277">
-                <a:tc>
-                  <a:txBody>
-                    <a:bodyPr/>
-                    <a:lstStyle>
-                      <a:defPPr>
-                        <a:defRPr lang="de-DE"/>
-                      </a:defPPr>
-                    </a:lstStyle>
-                    <a:p>
-                      <a:pPr algn="l" rtl="0"/>
-                      <a:r>
-                        <a:rPr lang="de-DE" b="0"/>
-                        <a:t>Anwesenheit des Publikums</a:t>
-                      </a:r>
-                      <a:endParaRPr lang="de-DE" b="0" i="0" dirty="0">
-                        <a:latin typeface="Gill Sans MT" panose="020B0502020104020203" pitchFamily="34" charset="77"/>
-                      </a:endParaRPr>
-                    </a:p>
-                  </a:txBody>
-                  <a:tcPr anchor="ctr"/>
-                </a:tc>
-                <a:tc>
-                  <a:txBody>
-                    <a:bodyPr/>
-                    <a:lstStyle>
-                      <a:defPPr>
-                        <a:defRPr lang="de-DE"/>
-                      </a:defPPr>
-                    </a:lstStyle>
-                    <a:p>
-                      <a:pPr algn="l" rtl="0"/>
-                      <a:r>
-                        <a:rPr lang="de-DE" b="0" dirty="0"/>
-                        <a:t>Anzahl der Teilnehmer</a:t>
-                      </a:r>
-                      <a:endParaRPr lang="de-DE" b="0" i="0" dirty="0">
-                        <a:latin typeface="Gill Sans MT" panose="020B0502020104020203" pitchFamily="34" charset="77"/>
-                      </a:endParaRPr>
-                    </a:p>
-                  </a:txBody>
-                  <a:tcPr anchor="ctr"/>
-                </a:tc>
-                <a:tc>
-                  <a:txBody>
-                    <a:bodyPr/>
-                    <a:lstStyle>
-                      <a:defPPr>
-                        <a:defRPr lang="de-DE"/>
-                      </a:defPPr>
-                    </a:lstStyle>
-                    <a:p>
-                      <a:pPr algn="l" rtl="0"/>
-                      <a:r>
-                        <a:rPr lang="de-DE" b="0"/>
-                        <a:t>150</a:t>
-                      </a:r>
-                      <a:endParaRPr lang="de-DE" b="0" i="0" dirty="0">
-                        <a:latin typeface="Gill Sans MT" panose="020B0502020104020203" pitchFamily="34" charset="77"/>
-                      </a:endParaRPr>
-                    </a:p>
-                  </a:txBody>
-                  <a:tcPr anchor="ctr"/>
-                </a:tc>
-                <a:tc>
-                  <a:txBody>
-                    <a:bodyPr/>
-                    <a:lstStyle>
-                      <a:defPPr>
-                        <a:defRPr lang="de-DE"/>
-                      </a:defPPr>
-                    </a:lstStyle>
-                    <a:p>
-                      <a:pPr algn="l" rtl="0"/>
-                      <a:r>
-                        <a:rPr lang="de-DE" b="0"/>
-                        <a:t>120</a:t>
-                      </a:r>
-                      <a:endParaRPr lang="de-DE" b="0" i="0" dirty="0">
-                        <a:latin typeface="Gill Sans MT" panose="020B0502020104020203" pitchFamily="34" charset="77"/>
-                      </a:endParaRPr>
-                    </a:p>
-                  </a:txBody>
-                  <a:tcPr anchor="ctr"/>
-                </a:tc>
-                <a:extLst>
-                  <a:ext uri="{0D108BD9-81ED-4DB2-BD59-A6C34878D82A}">
-                    <a16:rowId xmlns:a16="http://schemas.microsoft.com/office/drawing/2014/main" val="3873867931"/>
-                  </a:ext>
-                </a:extLst>
-              </a:tr>
-              <a:tr h="669277">
-                <a:tc>
-                  <a:txBody>
-                    <a:bodyPr/>
-                    <a:lstStyle>
-                      <a:defPPr>
-                        <a:defRPr lang="de-DE"/>
-                      </a:defPPr>
-                    </a:lstStyle>
-                    <a:p>
-                      <a:pPr algn="l" rtl="0"/>
-                      <a:r>
-                        <a:rPr lang="de-DE" b="0"/>
-                        <a:t>Vortragsdauer</a:t>
-                      </a:r>
-                      <a:endParaRPr lang="de-DE" b="0" i="0" dirty="0">
-                        <a:latin typeface="Gill Sans MT" panose="020B0502020104020203" pitchFamily="34" charset="77"/>
-                      </a:endParaRPr>
-                    </a:p>
-                  </a:txBody>
-                  <a:tcPr anchor="ctr"/>
-                </a:tc>
-                <a:tc>
-                  <a:txBody>
-                    <a:bodyPr/>
-                    <a:lstStyle>
-                      <a:defPPr>
-                        <a:defRPr lang="de-DE"/>
-                      </a:defPPr>
-                    </a:lstStyle>
-                    <a:p>
-                      <a:pPr algn="l" rtl="0"/>
-                      <a:r>
-                        <a:rPr lang="de-DE" b="0"/>
-                        <a:t>Minuten</a:t>
-                      </a:r>
-                      <a:endParaRPr lang="de-DE" b="0" i="0" dirty="0">
-                        <a:latin typeface="Gill Sans MT" panose="020B0502020104020203" pitchFamily="34" charset="77"/>
-                      </a:endParaRPr>
-                    </a:p>
-                  </a:txBody>
-                  <a:tcPr anchor="ctr"/>
-                </a:tc>
-                <a:tc>
-                  <a:txBody>
-                    <a:bodyPr/>
-                    <a:lstStyle>
-                      <a:defPPr>
-                        <a:defRPr lang="de-DE"/>
-                      </a:defPPr>
-                    </a:lstStyle>
-                    <a:p>
-                      <a:pPr algn="l" rtl="0"/>
-                      <a:r>
-                        <a:rPr lang="de-DE" b="0"/>
-                        <a:t>60</a:t>
-                      </a:r>
-                      <a:endParaRPr lang="de-DE" b="0" i="0" dirty="0">
-                        <a:latin typeface="Gill Sans MT" panose="020B0502020104020203" pitchFamily="34" charset="77"/>
-                      </a:endParaRPr>
-                    </a:p>
-                  </a:txBody>
-                  <a:tcPr anchor="ctr"/>
-                </a:tc>
-                <a:tc>
-                  <a:txBody>
-                    <a:bodyPr/>
-                    <a:lstStyle>
-                      <a:defPPr>
-                        <a:defRPr lang="de-DE"/>
-                      </a:defPPr>
-                    </a:lstStyle>
-                    <a:p>
-                      <a:pPr algn="l" rtl="0"/>
-                      <a:r>
-                        <a:rPr lang="de-DE" b="0"/>
-                        <a:t>75</a:t>
-                      </a:r>
-                      <a:endParaRPr lang="de-DE" b="0" i="0" dirty="0">
-                        <a:latin typeface="Gill Sans MT" panose="020B0502020104020203" pitchFamily="34" charset="77"/>
-                      </a:endParaRPr>
-                    </a:p>
-                  </a:txBody>
-                  <a:tcPr anchor="ctr"/>
-                </a:tc>
-                <a:extLst>
-                  <a:ext uri="{0D108BD9-81ED-4DB2-BD59-A6C34878D82A}">
-                    <a16:rowId xmlns:a16="http://schemas.microsoft.com/office/drawing/2014/main" val="85209771"/>
-                  </a:ext>
-                </a:extLst>
-              </a:tr>
-              <a:tr h="669277">
-                <a:tc>
-                  <a:txBody>
-                    <a:bodyPr/>
-                    <a:lstStyle>
-                      <a:defPPr>
-                        <a:defRPr lang="de-DE"/>
-                      </a:defPPr>
-                    </a:lstStyle>
-                    <a:p>
-                      <a:pPr algn="l" rtl="0"/>
-                      <a:r>
-                        <a:rPr lang="de-DE" b="0"/>
-                        <a:t>Frage-Antwort-Interaktion</a:t>
-                      </a:r>
-                      <a:endParaRPr lang="de-DE" b="0" i="0" dirty="0">
-                        <a:latin typeface="Gill Sans MT" panose="020B0502020104020203" pitchFamily="34" charset="77"/>
-                      </a:endParaRPr>
-                    </a:p>
-                  </a:txBody>
-                  <a:tcPr anchor="ctr"/>
-                </a:tc>
-                <a:tc>
-                  <a:txBody>
-                    <a:bodyPr/>
-                    <a:lstStyle>
-                      <a:defPPr>
-                        <a:defRPr lang="de-DE"/>
-                      </a:defPPr>
-                    </a:lstStyle>
-                    <a:p>
-                      <a:pPr algn="l" rtl="0"/>
-                      <a:r>
-                        <a:rPr lang="de-DE" b="0" dirty="0"/>
-                        <a:t>Anzahl der Fragen</a:t>
-                      </a:r>
-                      <a:endParaRPr lang="de-DE" b="0" i="0" dirty="0">
-                        <a:latin typeface="Gill Sans MT" panose="020B0502020104020203" pitchFamily="34" charset="77"/>
-                      </a:endParaRPr>
-                    </a:p>
-                  </a:txBody>
-                  <a:tcPr anchor="ctr"/>
-                </a:tc>
-                <a:tc>
-                  <a:txBody>
-                    <a:bodyPr/>
-                    <a:lstStyle>
-                      <a:defPPr>
-                        <a:defRPr lang="de-DE"/>
-                      </a:defPPr>
-                    </a:lstStyle>
-                    <a:p>
-                      <a:pPr algn="l" rtl="0"/>
-                      <a:r>
-                        <a:rPr lang="de-DE" b="0"/>
-                        <a:t>10</a:t>
-                      </a:r>
-                      <a:endParaRPr lang="de-DE" b="0" i="0" dirty="0">
-                        <a:latin typeface="Gill Sans MT" panose="020B0502020104020203" pitchFamily="34" charset="77"/>
-                      </a:endParaRPr>
-                    </a:p>
-                  </a:txBody>
-                  <a:tcPr anchor="ctr"/>
-                </a:tc>
-                <a:tc>
-                  <a:txBody>
-                    <a:bodyPr/>
-                    <a:lstStyle>
-                      <a:defPPr>
-                        <a:defRPr lang="de-DE"/>
-                      </a:defPPr>
-                    </a:lstStyle>
-                    <a:p>
-                      <a:pPr algn="l" rtl="0"/>
-                      <a:r>
-                        <a:rPr lang="de-DE" b="0"/>
-                        <a:t>15</a:t>
-                      </a:r>
-                      <a:endParaRPr lang="de-DE" b="0" i="0" dirty="0">
-                        <a:latin typeface="Gill Sans MT" panose="020B0502020104020203" pitchFamily="34" charset="77"/>
-                      </a:endParaRPr>
-                    </a:p>
-                  </a:txBody>
-                  <a:tcPr anchor="ctr"/>
-                </a:tc>
-                <a:extLst>
-                  <a:ext uri="{0D108BD9-81ED-4DB2-BD59-A6C34878D82A}">
-                    <a16:rowId xmlns:a16="http://schemas.microsoft.com/office/drawing/2014/main" val="4061031278"/>
-                  </a:ext>
-                </a:extLst>
-              </a:tr>
-              <a:tr h="669277">
-                <a:tc>
-                  <a:txBody>
-                    <a:bodyPr/>
-                    <a:lstStyle>
-                      <a:defPPr>
-                        <a:defRPr lang="de-DE"/>
-                      </a:defPPr>
-                    </a:lstStyle>
-                    <a:p>
-                      <a:pPr algn="l" rtl="0"/>
-                      <a:r>
-                        <a:rPr lang="de-DE" b="0"/>
-                        <a:t>Positives Feedback</a:t>
-                      </a:r>
-                      <a:endParaRPr lang="de-DE" b="0" i="0" dirty="0">
-                        <a:latin typeface="Gill Sans MT" panose="020B0502020104020203" pitchFamily="34" charset="77"/>
-                      </a:endParaRPr>
-                    </a:p>
-                  </a:txBody>
-                  <a:tcPr anchor="ctr"/>
-                </a:tc>
-                <a:tc>
-                  <a:txBody>
-                    <a:bodyPr/>
-                    <a:lstStyle>
-                      <a:defPPr>
-                        <a:defRPr lang="de-DE"/>
-                      </a:defPPr>
-                    </a:lstStyle>
-                    <a:p>
-                      <a:pPr algn="l" rtl="0"/>
-                      <a:r>
-                        <a:rPr lang="de-DE" b="0"/>
-                        <a:t>Prozentsatz (%)</a:t>
-                      </a:r>
-                      <a:endParaRPr lang="de-DE" b="0" i="0" dirty="0">
-                        <a:latin typeface="Gill Sans MT" panose="020B0502020104020203" pitchFamily="34" charset="77"/>
-                      </a:endParaRPr>
-                    </a:p>
-                  </a:txBody>
-                  <a:tcPr anchor="ctr"/>
-                </a:tc>
-                <a:tc>
-                  <a:txBody>
-                    <a:bodyPr/>
-                    <a:lstStyle>
-                      <a:defPPr>
-                        <a:defRPr lang="de-DE"/>
-                      </a:defPPr>
-                    </a:lstStyle>
-                    <a:p>
-                      <a:pPr algn="l" rtl="0"/>
-                      <a:r>
-                        <a:rPr lang="de-DE" b="0"/>
-                        <a:t>90</a:t>
-                      </a:r>
-                      <a:endParaRPr lang="de-DE" b="0" i="0" dirty="0">
-                        <a:latin typeface="Gill Sans MT" panose="020B0502020104020203" pitchFamily="34" charset="77"/>
-                      </a:endParaRPr>
-                    </a:p>
-                  </a:txBody>
-                  <a:tcPr anchor="ctr"/>
-                </a:tc>
-                <a:tc>
-                  <a:txBody>
-                    <a:bodyPr/>
-                    <a:lstStyle>
-                      <a:defPPr>
-                        <a:defRPr lang="de-DE"/>
-                      </a:defPPr>
-                    </a:lstStyle>
-                    <a:p>
-                      <a:pPr algn="l" rtl="0"/>
-                      <a:r>
-                        <a:rPr lang="de-DE" b="0"/>
-                        <a:t>95</a:t>
-                      </a:r>
-                      <a:endParaRPr lang="de-DE" b="0" i="0" dirty="0">
-                        <a:latin typeface="Gill Sans MT" panose="020B0502020104020203" pitchFamily="34" charset="77"/>
-                      </a:endParaRPr>
-                    </a:p>
-                  </a:txBody>
-                  <a:tcPr anchor="ctr"/>
-                </a:tc>
-                <a:extLst>
-                  <a:ext uri="{0D108BD9-81ED-4DB2-BD59-A6C34878D82A}">
-                    <a16:rowId xmlns:a16="http://schemas.microsoft.com/office/drawing/2014/main" val="3591840781"/>
-                  </a:ext>
-                </a:extLst>
-              </a:tr>
-              <a:tr h="951294">
-                <a:tc>
-                  <a:txBody>
-                    <a:bodyPr/>
-                    <a:lstStyle>
-                      <a:defPPr>
-                        <a:defRPr lang="de-DE"/>
-                      </a:defPPr>
-                    </a:lstStyle>
-                    <a:p>
-                      <a:pPr algn="l" rtl="0"/>
-                      <a:r>
-                        <a:rPr lang="de-DE" b="0"/>
-                        <a:t>Rate der Informationsspeicherung</a:t>
-                      </a:r>
-                      <a:endParaRPr lang="de-DE" b="0" i="0" dirty="0">
-                        <a:latin typeface="Gill Sans MT" panose="020B0502020104020203" pitchFamily="34" charset="77"/>
-                      </a:endParaRPr>
-                    </a:p>
-                  </a:txBody>
-                  <a:tcPr anchor="ctr"/>
-                </a:tc>
-                <a:tc>
-                  <a:txBody>
-                    <a:bodyPr/>
-                    <a:lstStyle>
-                      <a:defPPr>
-                        <a:defRPr lang="de-DE"/>
-                      </a:defPPr>
-                    </a:lstStyle>
-                    <a:p>
-                      <a:pPr algn="l" rtl="0"/>
-                      <a:r>
-                        <a:rPr lang="de-DE" b="0"/>
-                        <a:t>Prozentsatz (%)</a:t>
-                      </a:r>
-                      <a:endParaRPr lang="de-DE" b="0" i="0" dirty="0">
-                        <a:latin typeface="Gill Sans MT" panose="020B0502020104020203" pitchFamily="34" charset="77"/>
-                      </a:endParaRPr>
-                    </a:p>
-                  </a:txBody>
-                  <a:tcPr anchor="ctr"/>
-                </a:tc>
-                <a:tc>
-                  <a:txBody>
-                    <a:bodyPr/>
-                    <a:lstStyle>
-                      <a:defPPr>
-                        <a:defRPr lang="de-DE"/>
-                      </a:defPPr>
-                    </a:lstStyle>
-                    <a:p>
-                      <a:pPr algn="l" rtl="0"/>
-                      <a:r>
-                        <a:rPr lang="de-DE" b="0"/>
-                        <a:t>80</a:t>
-                      </a:r>
-                      <a:endParaRPr lang="de-DE" b="0" i="0" dirty="0">
-                        <a:latin typeface="Gill Sans MT" panose="020B0502020104020203" pitchFamily="34" charset="77"/>
-                      </a:endParaRPr>
-                    </a:p>
-                  </a:txBody>
-                  <a:tcPr anchor="ctr"/>
-                </a:tc>
-                <a:tc>
-                  <a:txBody>
-                    <a:bodyPr/>
-                    <a:lstStyle>
-                      <a:defPPr>
-                        <a:defRPr lang="de-DE"/>
-                      </a:defPPr>
-                    </a:lstStyle>
-                    <a:p>
-                      <a:pPr algn="l" rtl="0"/>
-                      <a:r>
-                        <a:rPr lang="de-DE" b="0" dirty="0"/>
-                        <a:t>85</a:t>
-                      </a:r>
-                      <a:endParaRPr lang="de-DE" b="0" i="0" dirty="0">
-                        <a:latin typeface="Gill Sans MT" panose="020B0502020104020203" pitchFamily="34" charset="77"/>
-                      </a:endParaRPr>
-                    </a:p>
-                  </a:txBody>
-                  <a:tcPr anchor="ctr"/>
-                </a:tc>
-                <a:extLst>
-                  <a:ext uri="{0D108BD9-81ED-4DB2-BD59-A6C34878D82A}">
-                    <a16:rowId xmlns:a16="http://schemas.microsoft.com/office/drawing/2014/main" val="335389741"/>
-                  </a:ext>
-                </a:extLst>
-              </a:tr>
-            </a:tbl>
-          </a:graphicData>
-        </a:graphic>
-      </p:graphicFrame>
-    </p:spTree>
-    <p:extLst>
-      <p:ext uri="{BB962C8B-B14F-4D97-AF65-F5344CB8AC3E}">
-        <p14:creationId xmlns:p14="http://schemas.microsoft.com/office/powerpoint/2010/main" val="314440392"/>
-      </p:ext>
-    </p:extLst>
-  </p:cSld>
-  <p:clrMapOvr>
-    <a:masterClrMapping/>
-  </p:clrMapOvr>
-</p:sld>
-</file>
-
-<file path=ppt/slides/slide12.xml><?xml version="1.0" encoding="utf-8"?>
-<p:sld xmlns:a="http://schemas.openxmlformats.org/drawingml/2006/main" xmlns:r="http://schemas.openxmlformats.org/officeDocument/2006/relationships" xmlns:p="http://schemas.openxmlformats.org/presentationml/2006/main">
-  <p:cSld>
-    <p:spTree>
-      <p:nvGrpSpPr>
-        <p:cNvPr id="1" name=""/>
-        <p:cNvGrpSpPr/>
-        <p:nvPr/>
-      </p:nvGrpSpPr>
-      <p:grpSpPr>
-        <a:xfrm>
-          <a:off x="0" y="0"/>
-          <a:ext cx="0" cy="0"/>
-          <a:chOff x="0" y="0"/>
-          <a:chExt cx="0" cy="0"/>
-        </a:xfrm>
-      </p:grpSpPr>
-      <p:sp>
-        <p:nvSpPr>
-          <p:cNvPr id="2" name="Titel 1">
-            <a:extLst>
-              <a:ext uri="{FF2B5EF4-FFF2-40B4-BE49-F238E27FC236}">
-                <a16:creationId xmlns:a16="http://schemas.microsoft.com/office/drawing/2014/main" id="{5D030A76-B788-B363-104E-266B7C7F7208}"/>
-              </a:ext>
-            </a:extLst>
-          </p:cNvPr>
-          <p:cNvSpPr>
-            <a:spLocks noGrp="1"/>
-          </p:cNvSpPr>
-          <p:nvPr>
-            <p:ph type="title"/>
-          </p:nvPr>
-        </p:nvSpPr>
-        <p:spPr>
-          <a:xfrm>
-            <a:off x="550863" y="488315"/>
-            <a:ext cx="11090274" cy="1332000"/>
-          </a:xfrm>
-          <a:noFill/>
-        </p:spPr>
-        <p:txBody>
-          <a:bodyPr lIns="0" rtlCol="0">
-            <a:normAutofit/>
-          </a:bodyPr>
-          <a:lstStyle>
-            <a:defPPr>
-              <a:defRPr lang="de-DE"/>
-            </a:defPPr>
-          </a:lstStyle>
-          <a:p>
-            <a:pPr rtl="0"/>
-            <a:r>
-              <a:rPr lang="de-DE" dirty="0"/>
-              <a:t>Letzte Tipps und Erkenntnisse</a:t>
-            </a:r>
-          </a:p>
-        </p:txBody>
-      </p:sp>
-      <p:sp>
-        <p:nvSpPr>
-          <p:cNvPr id="3" name="Inhaltsplatzhalter 2">
-            <a:extLst>
-              <a:ext uri="{FF2B5EF4-FFF2-40B4-BE49-F238E27FC236}">
-                <a16:creationId xmlns:a16="http://schemas.microsoft.com/office/drawing/2014/main" id="{05948542-FCE1-3AE6-C6C9-17975609DF70}"/>
-              </a:ext>
-            </a:extLst>
-          </p:cNvPr>
-          <p:cNvSpPr>
-            <a:spLocks noGrp="1"/>
-          </p:cNvSpPr>
-          <p:nvPr>
-            <p:ph sz="half" idx="1"/>
-          </p:nvPr>
-        </p:nvSpPr>
-        <p:spPr>
-          <a:xfrm>
-            <a:off x="550862" y="1965095"/>
-            <a:ext cx="5617182" cy="3995650"/>
-          </a:xfrm>
-          <a:noFill/>
-        </p:spPr>
-        <p:txBody>
-          <a:bodyPr vert="horz" lIns="0" tIns="45720" rIns="91440" bIns="45720" rtlCol="0" anchor="t">
-            <a:normAutofit fontScale="92500" lnSpcReduction="10000"/>
-          </a:bodyPr>
-          <a:lstStyle>
-            <a:defPPr>
-              <a:defRPr lang="de-DE"/>
-            </a:defPPr>
-          </a:lstStyle>
-          <a:p>
-            <a:pPr rtl="0"/>
-            <a:r>
-              <a:rPr lang="de-DE" dirty="0"/>
-              <a:t>Konsequentes Üben</a:t>
-            </a:r>
-          </a:p>
-          <a:p>
-            <a:pPr lvl="1" rtl="0"/>
-            <a:r>
-              <a:rPr lang="de-DE" dirty="0"/>
-              <a:t>Stärken Ihrer Vertrautheit</a:t>
-            </a:r>
-          </a:p>
-          <a:p>
-            <a:pPr rtl="0"/>
-            <a:r>
-              <a:rPr lang="de-DE" dirty="0"/>
-              <a:t>Vortragsstil verfeinern</a:t>
-            </a:r>
-          </a:p>
-          <a:p>
-            <a:pPr lvl="1" rtl="0"/>
-            <a:r>
-              <a:rPr lang="de-DE" dirty="0"/>
-              <a:t>Tempo, Tonfall und Betonung</a:t>
-            </a:r>
-          </a:p>
-          <a:p>
-            <a:pPr rtl="0"/>
-            <a:r>
-              <a:rPr lang="de-DE" dirty="0"/>
-              <a:t>Timing und Übergänge</a:t>
-            </a:r>
-          </a:p>
-          <a:p>
-            <a:pPr lvl="1" rtl="0"/>
-            <a:r>
-              <a:rPr lang="de-DE" dirty="0"/>
-              <a:t>Streben Sie einen nahtlosen, professionellen Vortrag an.</a:t>
-            </a:r>
-          </a:p>
-          <a:p>
-            <a:pPr rtl="0"/>
-            <a:r>
-              <a:rPr lang="de-DE" dirty="0"/>
-              <a:t>Übungspublikum</a:t>
-            </a:r>
-          </a:p>
-          <a:p>
-            <a:pPr lvl="1" rtl="0"/>
-            <a:r>
-              <a:rPr lang="de-DE" dirty="0"/>
-              <a:t>Bitten Sie Ihre Kollegen, zuzuhören und Feedback zu geben.</a:t>
-            </a:r>
-          </a:p>
-          <a:p>
-            <a:pPr lvl="1" rtl="0"/>
-            <a:endParaRPr lang="de-DE" dirty="0"/>
-          </a:p>
-        </p:txBody>
-      </p:sp>
-      <p:sp>
-        <p:nvSpPr>
-          <p:cNvPr id="4" name="Inhaltsplatzhalter 3">
-            <a:extLst>
-              <a:ext uri="{FF2B5EF4-FFF2-40B4-BE49-F238E27FC236}">
-                <a16:creationId xmlns:a16="http://schemas.microsoft.com/office/drawing/2014/main" id="{3EE67564-0457-E486-97D0-8109D2C97B3F}"/>
-              </a:ext>
-            </a:extLst>
-          </p:cNvPr>
-          <p:cNvSpPr>
-            <a:spLocks noGrp="1"/>
-          </p:cNvSpPr>
-          <p:nvPr>
-            <p:ph sz="half" idx="13"/>
-          </p:nvPr>
-        </p:nvSpPr>
-        <p:spPr>
-          <a:xfrm>
-            <a:off x="6301305" y="1965095"/>
-            <a:ext cx="5339397" cy="3995650"/>
-          </a:xfrm>
-          <a:noFill/>
-        </p:spPr>
-        <p:txBody>
-          <a:bodyPr lIns="0" rtlCol="0">
-            <a:normAutofit/>
-          </a:bodyPr>
-          <a:lstStyle>
-            <a:defPPr>
-              <a:defRPr lang="de-DE"/>
-            </a:defPPr>
-          </a:lstStyle>
-          <a:p>
-            <a:pPr rtl="0"/>
-            <a:r>
-              <a:rPr lang="de-DE" sz="1700" dirty="0"/>
-              <a:t>Feedback einholen</a:t>
-            </a:r>
-          </a:p>
-          <a:p>
-            <a:pPr rtl="0"/>
-            <a:r>
-              <a:rPr lang="de-DE" sz="1700" dirty="0"/>
-              <a:t>Über Leistung nachdenken</a:t>
-            </a:r>
-          </a:p>
-          <a:p>
-            <a:pPr rtl="0"/>
-            <a:r>
-              <a:rPr lang="de-DE" sz="1700" dirty="0"/>
-              <a:t>Erkunden neuer Techniken</a:t>
-            </a:r>
-          </a:p>
-          <a:p>
-            <a:pPr rtl="0"/>
-            <a:r>
-              <a:rPr lang="de-DE" sz="1700" dirty="0"/>
-              <a:t>Persönliche Ziele festlegen</a:t>
-            </a:r>
-          </a:p>
-          <a:p>
-            <a:pPr rtl="0"/>
-            <a:r>
-              <a:rPr lang="de-DE" sz="1700" dirty="0"/>
-              <a:t>Wiederholen und Anpassen</a:t>
-            </a:r>
-          </a:p>
-        </p:txBody>
-      </p:sp>
-    </p:spTree>
-    <p:extLst>
-      <p:ext uri="{BB962C8B-B14F-4D97-AF65-F5344CB8AC3E}">
-        <p14:creationId xmlns:p14="http://schemas.microsoft.com/office/powerpoint/2010/main" val="118667928"/>
-      </p:ext>
-    </p:extLst>
-  </p:cSld>
-  <p:clrMapOvr>
-    <a:masterClrMapping/>
-  </p:clrMapOvr>
-</p:sld>
-</file>
-
 <file path=ppt/slides/slide13.xml><?xml version="1.0" encoding="utf-8"?>
-<p:sld xmlns:a="http://schemas.openxmlformats.org/drawingml/2006/main" xmlns:r="http://schemas.openxmlformats.org/officeDocument/2006/relationships" xmlns:p="http://schemas.openxmlformats.org/presentationml/2006/main">
-  <p:cSld>
-    <p:spTree>
-      <p:nvGrpSpPr>
-        <p:cNvPr id="1" name=""/>
-        <p:cNvGrpSpPr/>
-        <p:nvPr/>
-      </p:nvGrpSpPr>
-      <p:grpSpPr>
-        <a:xfrm>
-          <a:off x="0" y="0"/>
-          <a:ext cx="0" cy="0"/>
-          <a:chOff x="0" y="0"/>
-          <a:chExt cx="0" cy="0"/>
-        </a:xfrm>
-      </p:grpSpPr>
-      <p:sp>
-        <p:nvSpPr>
-          <p:cNvPr id="2" name="Titel 1">
-            <a:extLst>
-              <a:ext uri="{FF2B5EF4-FFF2-40B4-BE49-F238E27FC236}">
-                <a16:creationId xmlns:a16="http://schemas.microsoft.com/office/drawing/2014/main" id="{D1FC59F6-9B22-C211-4B4C-A2FD4B914C46}"/>
-              </a:ext>
-            </a:extLst>
-          </p:cNvPr>
-          <p:cNvSpPr>
-            <a:spLocks noGrp="1"/>
-          </p:cNvSpPr>
-          <p:nvPr>
-            <p:ph type="title"/>
-          </p:nvPr>
-        </p:nvSpPr>
-        <p:spPr>
-          <a:xfrm>
-            <a:off x="550863" y="560961"/>
-            <a:ext cx="11090275" cy="1186560"/>
-          </a:xfrm>
-          <a:noFill/>
-        </p:spPr>
-        <p:txBody>
-          <a:bodyPr rtlCol="0" anchor="t"/>
-          <a:lstStyle>
-            <a:defPPr>
-              <a:defRPr lang="de-DE"/>
-            </a:defPPr>
-          </a:lstStyle>
-          <a:p>
-            <a:pPr rtl="0"/>
-            <a:r>
-              <a:rPr lang="de-DE" dirty="0"/>
-              <a:t>Metriken zum Einsatz als Referent*in</a:t>
-            </a:r>
-          </a:p>
-        </p:txBody>
-      </p:sp>
-      <p:graphicFrame>
-        <p:nvGraphicFramePr>
-          <p:cNvPr id="13" name="Tabellenplatzhalter 3">
-            <a:extLst>
-              <a:ext uri="{FF2B5EF4-FFF2-40B4-BE49-F238E27FC236}">
-                <a16:creationId xmlns:a16="http://schemas.microsoft.com/office/drawing/2014/main" id="{24F0E16C-0C56-89A4-2FE9-7D5EBE3963CC}"/>
-              </a:ext>
-            </a:extLst>
-          </p:cNvPr>
-          <p:cNvGraphicFramePr>
-            <a:graphicFrameLocks noGrp="1"/>
-          </p:cNvGraphicFramePr>
-          <p:nvPr>
-            <p:ph sz="half" idx="1"/>
-            <p:extLst>
-              <p:ext uri="{D42A27DB-BD31-4B8C-83A1-F6EECF244321}">
-                <p14:modId xmlns:p14="http://schemas.microsoft.com/office/powerpoint/2010/main" val="3567261769"/>
-              </p:ext>
-            </p:extLst>
-          </p:nvPr>
-        </p:nvGraphicFramePr>
-        <p:xfrm>
-          <a:off x="550863" y="1917700"/>
-          <a:ext cx="11090276" cy="4297680"/>
-        </p:xfrm>
-        <a:graphic>
-          <a:graphicData uri="http://schemas.openxmlformats.org/drawingml/2006/table">
-            <a:tbl>
-              <a:tblPr firstRow="1" bandRow="1">
-                <a:tableStyleId>{72833802-FEF1-4C79-8D5D-14CF1EAF98D9}</a:tableStyleId>
-              </a:tblPr>
-              <a:tblGrid>
-                <a:gridCol w="4032713">
-                  <a:extLst>
-                    <a:ext uri="{9D8B030D-6E8A-4147-A177-3AD203B41FA5}">
-                      <a16:colId xmlns:a16="http://schemas.microsoft.com/office/drawing/2014/main" val="2382218087"/>
-                    </a:ext>
-                  </a:extLst>
-                </a:gridCol>
-                <a:gridCol w="3391382">
-                  <a:extLst>
-                    <a:ext uri="{9D8B030D-6E8A-4147-A177-3AD203B41FA5}">
-                      <a16:colId xmlns:a16="http://schemas.microsoft.com/office/drawing/2014/main" val="3953468724"/>
-                    </a:ext>
-                  </a:extLst>
-                </a:gridCol>
-                <a:gridCol w="1851949">
-                  <a:extLst>
-                    <a:ext uri="{9D8B030D-6E8A-4147-A177-3AD203B41FA5}">
-                      <a16:colId xmlns:a16="http://schemas.microsoft.com/office/drawing/2014/main" val="4277526474"/>
-                    </a:ext>
-                  </a:extLst>
-                </a:gridCol>
-                <a:gridCol w="1814232">
-                  <a:extLst>
-                    <a:ext uri="{9D8B030D-6E8A-4147-A177-3AD203B41FA5}">
-                      <a16:colId xmlns:a16="http://schemas.microsoft.com/office/drawing/2014/main" val="2438884888"/>
-                    </a:ext>
-                  </a:extLst>
-                </a:gridCol>
-              </a:tblGrid>
-              <a:tr h="716280">
-                <a:tc>
-                  <a:txBody>
-                    <a:bodyPr/>
-                    <a:lstStyle>
-                      <a:defPPr>
-                        <a:defRPr lang="de-DE"/>
-                      </a:defPPr>
-                    </a:lstStyle>
-                    <a:p>
-                      <a:pPr algn="l" rtl="0"/>
-                      <a:r>
-                        <a:rPr lang="de-DE" b="0"/>
-                        <a:t>Einflussfaktor</a:t>
-                      </a:r>
-                      <a:endParaRPr lang="de-DE" b="0" i="0" dirty="0">
-                        <a:latin typeface="Gill Sans MT" panose="020B0502020104020203" pitchFamily="34" charset="77"/>
-                      </a:endParaRPr>
-                    </a:p>
-                  </a:txBody>
-                  <a:tcPr anchor="ctr"/>
-                </a:tc>
-                <a:tc>
-                  <a:txBody>
-                    <a:bodyPr/>
-                    <a:lstStyle>
-                      <a:defPPr>
-                        <a:defRPr lang="de-DE"/>
-                      </a:defPPr>
-                    </a:lstStyle>
-                    <a:p>
-                      <a:pPr algn="l" rtl="0"/>
-                      <a:r>
-                        <a:rPr lang="de-DE" b="0"/>
-                        <a:t>Messung</a:t>
-                      </a:r>
-                      <a:endParaRPr lang="de-DE" b="0" i="0" dirty="0">
-                        <a:latin typeface="Gill Sans MT" panose="020B0502020104020203" pitchFamily="34" charset="77"/>
-                      </a:endParaRPr>
-                    </a:p>
-                  </a:txBody>
-                  <a:tcPr anchor="ctr"/>
-                </a:tc>
-                <a:tc>
-                  <a:txBody>
-                    <a:bodyPr/>
-                    <a:lstStyle>
-                      <a:defPPr>
-                        <a:defRPr lang="de-DE"/>
-                      </a:defPPr>
-                    </a:lstStyle>
-                    <a:p>
-                      <a:pPr algn="l" rtl="0"/>
-                      <a:r>
-                        <a:rPr lang="de-DE" b="0"/>
-                        <a:t>Ziel</a:t>
-                      </a:r>
-                      <a:endParaRPr lang="de-DE" b="0" i="0" dirty="0">
-                        <a:latin typeface="Gill Sans MT" panose="020B0502020104020203" pitchFamily="34" charset="77"/>
-                      </a:endParaRPr>
-                    </a:p>
-                  </a:txBody>
-                  <a:tcPr anchor="ctr"/>
-                </a:tc>
-                <a:tc>
-                  <a:txBody>
-                    <a:bodyPr/>
-                    <a:lstStyle>
-                      <a:defPPr>
-                        <a:defRPr lang="de-DE"/>
-                      </a:defPPr>
-                    </a:lstStyle>
-                    <a:p>
-                      <a:pPr algn="l" rtl="0"/>
-                      <a:r>
-                        <a:rPr lang="de-DE" b="0"/>
-                        <a:t>Erreicht</a:t>
-                      </a:r>
-                      <a:endParaRPr lang="de-DE" b="0" i="0" dirty="0">
-                        <a:latin typeface="Gill Sans MT" panose="020B0502020104020203" pitchFamily="34" charset="77"/>
-                      </a:endParaRPr>
-                    </a:p>
-                  </a:txBody>
-                  <a:tcPr anchor="ctr"/>
-                </a:tc>
-                <a:extLst>
-                  <a:ext uri="{0D108BD9-81ED-4DB2-BD59-A6C34878D82A}">
-                    <a16:rowId xmlns:a16="http://schemas.microsoft.com/office/drawing/2014/main" val="2857107962"/>
-                  </a:ext>
-                </a:extLst>
-              </a:tr>
-              <a:tr h="716280">
-                <a:tc>
-                  <a:txBody>
-                    <a:bodyPr/>
-                    <a:lstStyle>
-                      <a:defPPr>
-                        <a:defRPr lang="de-DE"/>
-                      </a:defPPr>
-                    </a:lstStyle>
-                    <a:p>
-                      <a:pPr algn="l" rtl="0"/>
-                      <a:r>
-                        <a:rPr lang="de-DE" b="0"/>
-                        <a:t>Publikumsinteraktion</a:t>
-                      </a:r>
-                      <a:endParaRPr lang="de-DE" b="0" i="0" dirty="0">
-                        <a:latin typeface="Gill Sans MT" panose="020B0502020104020203" pitchFamily="34" charset="77"/>
-                      </a:endParaRPr>
-                    </a:p>
-                  </a:txBody>
-                  <a:tcPr anchor="ctr"/>
-                </a:tc>
-                <a:tc>
-                  <a:txBody>
-                    <a:bodyPr/>
-                    <a:lstStyle>
-                      <a:defPPr>
-                        <a:defRPr lang="de-DE"/>
-                      </a:defPPr>
-                    </a:lstStyle>
-                    <a:p>
-                      <a:pPr algn="l" rtl="0"/>
-                      <a:r>
-                        <a:rPr lang="de-DE" b="0"/>
-                        <a:t>Prozentsatz (%)</a:t>
-                      </a:r>
-                      <a:endParaRPr lang="de-DE" b="0" i="0" dirty="0">
-                        <a:latin typeface="Gill Sans MT" panose="020B0502020104020203" pitchFamily="34" charset="77"/>
-                      </a:endParaRPr>
-                    </a:p>
-                  </a:txBody>
-                  <a:tcPr anchor="ctr"/>
-                </a:tc>
-                <a:tc>
-                  <a:txBody>
-                    <a:bodyPr/>
-                    <a:lstStyle>
-                      <a:defPPr>
-                        <a:defRPr lang="de-DE"/>
-                      </a:defPPr>
-                    </a:lstStyle>
-                    <a:p>
-                      <a:pPr algn="l" rtl="0"/>
-                      <a:r>
-                        <a:rPr lang="de-DE" b="0"/>
-                        <a:t>85</a:t>
-                      </a:r>
-                      <a:endParaRPr lang="de-DE" b="0" i="0" dirty="0">
-                        <a:latin typeface="Gill Sans MT" panose="020B0502020104020203" pitchFamily="34" charset="77"/>
-                      </a:endParaRPr>
-                    </a:p>
-                  </a:txBody>
-                  <a:tcPr anchor="ctr"/>
-                </a:tc>
-                <a:tc>
-                  <a:txBody>
-                    <a:bodyPr/>
-                    <a:lstStyle>
-                      <a:defPPr>
-                        <a:defRPr lang="de-DE"/>
-                      </a:defPPr>
-                    </a:lstStyle>
-                    <a:p>
-                      <a:pPr algn="l" rtl="0"/>
-                      <a:r>
-                        <a:rPr lang="de-DE" b="0"/>
-                        <a:t>88</a:t>
-                      </a:r>
-                      <a:endParaRPr lang="de-DE" b="0" i="0" dirty="0">
-                        <a:latin typeface="Gill Sans MT" panose="020B0502020104020203" pitchFamily="34" charset="77"/>
-                      </a:endParaRPr>
-                    </a:p>
-                  </a:txBody>
-                  <a:tcPr anchor="ctr"/>
-                </a:tc>
-                <a:extLst>
-                  <a:ext uri="{0D108BD9-81ED-4DB2-BD59-A6C34878D82A}">
-                    <a16:rowId xmlns:a16="http://schemas.microsoft.com/office/drawing/2014/main" val="1671386868"/>
-                  </a:ext>
-                </a:extLst>
-              </a:tr>
-              <a:tr h="716280">
-                <a:tc>
-                  <a:txBody>
-                    <a:bodyPr/>
-                    <a:lstStyle>
-                      <a:defPPr>
-                        <a:defRPr lang="de-DE"/>
-                      </a:defPPr>
-                    </a:lstStyle>
-                    <a:p>
-                      <a:pPr algn="l" rtl="0"/>
-                      <a:r>
-                        <a:rPr lang="de-DE" b="0"/>
-                        <a:t>Wissen bewahren</a:t>
-                      </a:r>
-                      <a:endParaRPr lang="de-DE" b="0" i="0" dirty="0">
-                        <a:latin typeface="Gill Sans MT" panose="020B0502020104020203" pitchFamily="34" charset="77"/>
-                      </a:endParaRPr>
-                    </a:p>
-                  </a:txBody>
-                  <a:tcPr anchor="ctr"/>
-                </a:tc>
-                <a:tc>
-                  <a:txBody>
-                    <a:bodyPr/>
-                    <a:lstStyle>
-                      <a:defPPr>
-                        <a:defRPr lang="de-DE"/>
-                      </a:defPPr>
-                    </a:lstStyle>
-                    <a:p>
-                      <a:pPr algn="l" rtl="0"/>
-                      <a:r>
-                        <a:rPr lang="de-DE" b="0"/>
-                        <a:t>Prozentsatz (%)</a:t>
-                      </a:r>
-                      <a:endParaRPr lang="de-DE" b="0" i="0" dirty="0">
-                        <a:latin typeface="Gill Sans MT" panose="020B0502020104020203" pitchFamily="34" charset="77"/>
-                      </a:endParaRPr>
-                    </a:p>
-                  </a:txBody>
-                  <a:tcPr anchor="ctr"/>
-                </a:tc>
-                <a:tc>
-                  <a:txBody>
-                    <a:bodyPr/>
-                    <a:lstStyle>
-                      <a:defPPr>
-                        <a:defRPr lang="de-DE"/>
-                      </a:defPPr>
-                    </a:lstStyle>
-                    <a:p>
-                      <a:pPr algn="l" rtl="0"/>
-                      <a:r>
-                        <a:rPr lang="de-DE" b="0"/>
-                        <a:t>75</a:t>
-                      </a:r>
-                      <a:endParaRPr lang="de-DE" b="0" i="0" dirty="0">
-                        <a:latin typeface="Gill Sans MT" panose="020B0502020104020203" pitchFamily="34" charset="77"/>
-                      </a:endParaRPr>
-                    </a:p>
-                  </a:txBody>
-                  <a:tcPr anchor="ctr"/>
-                </a:tc>
-                <a:tc>
-                  <a:txBody>
-                    <a:bodyPr/>
-                    <a:lstStyle>
-                      <a:defPPr>
-                        <a:defRPr lang="de-DE"/>
-                      </a:defPPr>
-                    </a:lstStyle>
-                    <a:p>
-                      <a:pPr algn="l" rtl="0"/>
-                      <a:r>
-                        <a:rPr lang="de-DE" b="0"/>
-                        <a:t>80</a:t>
-                      </a:r>
-                      <a:endParaRPr lang="de-DE" b="0" i="0" dirty="0">
-                        <a:latin typeface="Gill Sans MT" panose="020B0502020104020203" pitchFamily="34" charset="77"/>
-                      </a:endParaRPr>
-                    </a:p>
-                  </a:txBody>
-                  <a:tcPr anchor="ctr"/>
-                </a:tc>
-                <a:extLst>
-                  <a:ext uri="{0D108BD9-81ED-4DB2-BD59-A6C34878D82A}">
-                    <a16:rowId xmlns:a16="http://schemas.microsoft.com/office/drawing/2014/main" val="380626418"/>
-                  </a:ext>
-                </a:extLst>
-              </a:tr>
-              <a:tr h="716280">
-                <a:tc>
-                  <a:txBody>
-                    <a:bodyPr/>
-                    <a:lstStyle>
-                      <a:defPPr>
-                        <a:defRPr lang="de-DE"/>
-                      </a:defPPr>
-                    </a:lstStyle>
-                    <a:p>
-                      <a:pPr algn="l" rtl="0"/>
-                      <a:r>
-                        <a:rPr lang="de-DE" b="0" dirty="0"/>
-                        <a:t>Umfragen nach der Präsentation</a:t>
-                      </a:r>
-                      <a:endParaRPr lang="de-DE" b="0" i="0" dirty="0">
-                        <a:latin typeface="Gill Sans MT" panose="020B0502020104020203" pitchFamily="34" charset="77"/>
-                      </a:endParaRPr>
-                    </a:p>
-                  </a:txBody>
-                  <a:tcPr anchor="ctr"/>
-                </a:tc>
-                <a:tc>
-                  <a:txBody>
-                    <a:bodyPr/>
-                    <a:lstStyle>
-                      <a:defPPr>
-                        <a:defRPr lang="de-DE"/>
-                      </a:defPPr>
-                    </a:lstStyle>
-                    <a:p>
-                      <a:pPr algn="l" rtl="0"/>
-                      <a:r>
-                        <a:rPr lang="de-DE" b="0"/>
-                        <a:t>Durchschnittliche Bewertung</a:t>
-                      </a:r>
-                      <a:endParaRPr lang="de-DE" b="0" i="0" dirty="0">
-                        <a:latin typeface="Gill Sans MT" panose="020B0502020104020203" pitchFamily="34" charset="77"/>
-                      </a:endParaRPr>
-                    </a:p>
-                  </a:txBody>
-                  <a:tcPr anchor="ctr"/>
-                </a:tc>
-                <a:tc>
-                  <a:txBody>
-                    <a:bodyPr/>
-                    <a:lstStyle>
-                      <a:defPPr>
-                        <a:defRPr lang="de-DE"/>
-                      </a:defPPr>
-                    </a:lstStyle>
-                    <a:p>
-                      <a:pPr algn="l" rtl="0"/>
-                      <a:r>
-                        <a:rPr lang="de-DE" b="0"/>
-                        <a:t>4,2</a:t>
-                      </a:r>
-                      <a:endParaRPr lang="de-DE" b="0" i="0" dirty="0">
-                        <a:latin typeface="Gill Sans MT" panose="020B0502020104020203" pitchFamily="34" charset="77"/>
-                      </a:endParaRPr>
-                    </a:p>
-                  </a:txBody>
-                  <a:tcPr anchor="ctr"/>
-                </a:tc>
-                <a:tc>
-                  <a:txBody>
-                    <a:bodyPr/>
-                    <a:lstStyle>
-                      <a:defPPr>
-                        <a:defRPr lang="de-DE"/>
-                      </a:defPPr>
-                    </a:lstStyle>
-                    <a:p>
-                      <a:pPr algn="l" rtl="0"/>
-                      <a:r>
-                        <a:rPr lang="de-DE" b="0"/>
-                        <a:t>4,5</a:t>
-                      </a:r>
-                      <a:endParaRPr lang="de-DE" b="0" i="0" dirty="0">
-                        <a:latin typeface="Gill Sans MT" panose="020B0502020104020203" pitchFamily="34" charset="77"/>
-                      </a:endParaRPr>
-                    </a:p>
-                  </a:txBody>
-                  <a:tcPr anchor="ctr"/>
-                </a:tc>
-                <a:extLst>
-                  <a:ext uri="{0D108BD9-81ED-4DB2-BD59-A6C34878D82A}">
-                    <a16:rowId xmlns:a16="http://schemas.microsoft.com/office/drawing/2014/main" val="2132482967"/>
-                  </a:ext>
-                </a:extLst>
-              </a:tr>
-              <a:tr h="716280">
-                <a:tc>
-                  <a:txBody>
-                    <a:bodyPr/>
-                    <a:lstStyle>
-                      <a:defPPr>
-                        <a:defRPr lang="de-DE"/>
-                      </a:defPPr>
-                    </a:lstStyle>
-                    <a:p>
-                      <a:pPr algn="l" rtl="0"/>
-                      <a:r>
-                        <a:rPr lang="de-DE" b="0"/>
-                        <a:t>Empfehlungsrate</a:t>
-                      </a:r>
-                      <a:endParaRPr lang="de-DE" b="0" i="0" dirty="0">
-                        <a:latin typeface="Gill Sans MT" panose="020B0502020104020203" pitchFamily="34" charset="77"/>
-                      </a:endParaRPr>
-                    </a:p>
-                  </a:txBody>
-                  <a:tcPr anchor="ctr"/>
-                </a:tc>
-                <a:tc>
-                  <a:txBody>
-                    <a:bodyPr/>
-                    <a:lstStyle>
-                      <a:defPPr>
-                        <a:defRPr lang="de-DE"/>
-                      </a:defPPr>
-                    </a:lstStyle>
-                    <a:p>
-                      <a:pPr algn="l" rtl="0"/>
-                      <a:r>
-                        <a:rPr lang="de-DE" b="0"/>
-                        <a:t>Prozentsatz (%)</a:t>
-                      </a:r>
-                      <a:endParaRPr lang="de-DE" b="0" i="0" dirty="0">
-                        <a:latin typeface="Gill Sans MT" panose="020B0502020104020203" pitchFamily="34" charset="77"/>
-                      </a:endParaRPr>
-                    </a:p>
-                  </a:txBody>
-                  <a:tcPr anchor="ctr"/>
-                </a:tc>
-                <a:tc>
-                  <a:txBody>
-                    <a:bodyPr/>
-                    <a:lstStyle>
-                      <a:defPPr>
-                        <a:defRPr lang="de-DE"/>
-                      </a:defPPr>
-                    </a:lstStyle>
-                    <a:p>
-                      <a:pPr algn="l" rtl="0"/>
-                      <a:r>
-                        <a:rPr lang="de-DE" b="0"/>
-                        <a:t>10</a:t>
-                      </a:r>
-                      <a:endParaRPr lang="de-DE" b="0" i="0" dirty="0">
-                        <a:latin typeface="Gill Sans MT" panose="020B0502020104020203" pitchFamily="34" charset="77"/>
-                      </a:endParaRPr>
-                    </a:p>
-                  </a:txBody>
-                  <a:tcPr anchor="ctr"/>
-                </a:tc>
-                <a:tc>
-                  <a:txBody>
-                    <a:bodyPr/>
-                    <a:lstStyle>
-                      <a:defPPr>
-                        <a:defRPr lang="de-DE"/>
-                      </a:defPPr>
-                    </a:lstStyle>
-                    <a:p>
-                      <a:pPr algn="l" rtl="0"/>
-                      <a:r>
-                        <a:rPr lang="de-DE" b="0"/>
-                        <a:t>12</a:t>
-                      </a:r>
-                      <a:endParaRPr lang="de-DE" b="0" i="0" dirty="0">
-                        <a:latin typeface="Gill Sans MT" panose="020B0502020104020203" pitchFamily="34" charset="77"/>
-                      </a:endParaRPr>
-                    </a:p>
-                  </a:txBody>
-                  <a:tcPr anchor="ctr"/>
-                </a:tc>
-                <a:extLst>
-                  <a:ext uri="{0D108BD9-81ED-4DB2-BD59-A6C34878D82A}">
-                    <a16:rowId xmlns:a16="http://schemas.microsoft.com/office/drawing/2014/main" val="3936251906"/>
-                  </a:ext>
-                </a:extLst>
-              </a:tr>
-              <a:tr h="716280">
-                <a:tc>
-                  <a:txBody>
-                    <a:bodyPr/>
-                    <a:lstStyle>
-                      <a:defPPr>
-                        <a:defRPr lang="de-DE"/>
-                      </a:defPPr>
-                    </a:lstStyle>
-                    <a:p>
-                      <a:pPr algn="l" rtl="0"/>
-                      <a:r>
-                        <a:rPr lang="de-DE" b="0"/>
-                        <a:t>Möglichkeiten der Zusammenarbeit</a:t>
-                      </a:r>
-                      <a:endParaRPr lang="de-DE" b="0" i="0" dirty="0">
-                        <a:latin typeface="Gill Sans MT" panose="020B0502020104020203" pitchFamily="34" charset="77"/>
-                      </a:endParaRPr>
-                    </a:p>
-                  </a:txBody>
-                  <a:tcPr anchor="ctr"/>
-                </a:tc>
-                <a:tc>
-                  <a:txBody>
-                    <a:bodyPr/>
-                    <a:lstStyle>
-                      <a:defPPr>
-                        <a:defRPr lang="de-DE"/>
-                      </a:defPPr>
-                    </a:lstStyle>
-                    <a:p>
-                      <a:pPr algn="l" rtl="0"/>
-                      <a:r>
-                        <a:rPr lang="de-DE" b="0"/>
-                        <a:t>Anzahl der Möglichkeiten</a:t>
-                      </a:r>
-                      <a:endParaRPr lang="de-DE" b="0" i="0" dirty="0">
-                        <a:latin typeface="Gill Sans MT" panose="020B0502020104020203" pitchFamily="34" charset="77"/>
-                      </a:endParaRPr>
-                    </a:p>
-                  </a:txBody>
-                  <a:tcPr anchor="ctr"/>
-                </a:tc>
-                <a:tc>
-                  <a:txBody>
-                    <a:bodyPr/>
-                    <a:lstStyle>
-                      <a:defPPr>
-                        <a:defRPr lang="de-DE"/>
-                      </a:defPPr>
-                    </a:lstStyle>
-                    <a:p>
-                      <a:pPr algn="l" rtl="0"/>
-                      <a:r>
-                        <a:rPr lang="de-DE" b="0"/>
-                        <a:t>8</a:t>
-                      </a:r>
-                      <a:endParaRPr lang="de-DE" b="0" i="0" dirty="0">
-                        <a:latin typeface="Gill Sans MT" panose="020B0502020104020203" pitchFamily="34" charset="77"/>
-                      </a:endParaRPr>
-                    </a:p>
-                  </a:txBody>
-                  <a:tcPr anchor="ctr"/>
-                </a:tc>
-                <a:tc>
-                  <a:txBody>
-                    <a:bodyPr/>
-                    <a:lstStyle>
-                      <a:defPPr>
-                        <a:defRPr lang="de-DE"/>
-                      </a:defPPr>
-                    </a:lstStyle>
-                    <a:p>
-                      <a:pPr algn="l" rtl="0"/>
-                      <a:r>
-                        <a:rPr lang="de-DE" b="0" dirty="0"/>
-                        <a:t>10</a:t>
-                      </a:r>
-                      <a:endParaRPr lang="de-DE" b="0" i="0" dirty="0">
-                        <a:latin typeface="Gill Sans MT" panose="020B0502020104020203" pitchFamily="34" charset="77"/>
-                      </a:endParaRPr>
-                    </a:p>
-                  </a:txBody>
-                  <a:tcPr anchor="ctr"/>
-                </a:tc>
-                <a:extLst>
-                  <a:ext uri="{0D108BD9-81ED-4DB2-BD59-A6C34878D82A}">
-                    <a16:rowId xmlns:a16="http://schemas.microsoft.com/office/drawing/2014/main" val="568537164"/>
-                  </a:ext>
-                </a:extLst>
-              </a:tr>
-            </a:tbl>
-          </a:graphicData>
-        </a:graphic>
-      </p:graphicFrame>
-    </p:spTree>
-    <p:extLst>
-      <p:ext uri="{BB962C8B-B14F-4D97-AF65-F5344CB8AC3E}">
-        <p14:creationId xmlns:p14="http://schemas.microsoft.com/office/powerpoint/2010/main" val="849465297"/>
-      </p:ext>
-    </p:extLst>
-  </p:cSld>
-  <p:clrMapOvr>
-    <a:masterClrMapping/>
-  </p:clrMapOvr>
-</p:sld>
-</file>
-
-<file path=ppt/slides/slide14.xml><?xml version="1.0" encoding="utf-8"?>
 <p:sld xmlns:a="http://schemas.openxmlformats.org/drawingml/2006/main" xmlns:r="http://schemas.openxmlformats.org/officeDocument/2006/relationships" xmlns:p="http://schemas.openxmlformats.org/presentationml/2006/main">
   <p:cSld>
     <p:spTree>
@@ -16411,29 +14560,34 @@
           <a:p>
             <a:pPr rtl="0"/>
             <a:r>
-              <a:rPr lang="de-DE"/>
-              <a:t>Brita Tamm</a:t>
+              <a:rPr lang="de-DE" dirty="0"/>
+              <a:t>(an die „Kollegen“ die uns beim Studium helfen)</a:t>
             </a:r>
           </a:p>
           <a:p>
             <a:pPr rtl="0"/>
             <a:r>
-              <a:rPr lang="de-DE"/>
-              <a:t>502-555-0152</a:t>
+              <a:rPr lang="de-DE" dirty="0"/>
+              <a:t>Daniel Huber</a:t>
             </a:r>
           </a:p>
           <a:p>
             <a:pPr rtl="0"/>
             <a:r>
-              <a:rPr lang="de-DE"/>
-              <a:t>brita@firstupconsultants.com</a:t>
+              <a:rPr lang="de-DE" dirty="0"/>
+              <a:t>Maximilian </a:t>
             </a:r>
+            <a:r>
+              <a:rPr lang="de-DE" dirty="0" err="1"/>
+              <a:t>Starlinger</a:t>
+            </a:r>
+            <a:endParaRPr lang="de-DE" dirty="0"/>
           </a:p>
           <a:p>
             <a:pPr rtl="0"/>
             <a:r>
-              <a:rPr lang="de-DE"/>
-              <a:t>www.firstupconsultants.com</a:t>
+              <a:rPr lang="de-DE" dirty="0"/>
+              <a:t>„Kollege“</a:t>
             </a:r>
           </a:p>
         </p:txBody>
@@ -16535,115 +14689,7 @@
             <a:pPr algn="ctr" rtl="0"/>
             <a:r>
               <a:rPr lang="de-DE" dirty="0"/>
-              <a:t>Unterschiede von </a:t>
-            </a:r>
-            <a:r>
-              <a:rPr lang="de-DE" dirty="0" err="1"/>
-              <a:t>LLM‘s</a:t>
-            </a:r>
-            <a:r>
-              <a:rPr lang="de-DE" dirty="0"/>
-              <a:t> zu KI-Agenten</a:t>
-            </a:r>
-          </a:p>
-        </p:txBody>
-      </p:sp>
-      <p:sp>
-        <p:nvSpPr>
-          <p:cNvPr id="3" name="Inhaltsplatzhalter 2">
-            <a:extLst>
-              <a:ext uri="{FF2B5EF4-FFF2-40B4-BE49-F238E27FC236}">
-                <a16:creationId xmlns:a16="http://schemas.microsoft.com/office/drawing/2014/main" id="{1ABCA07C-1908-B1EB-82FA-EC63DAAF4CF4}"/>
-              </a:ext>
-            </a:extLst>
-          </p:cNvPr>
-          <p:cNvSpPr>
-            <a:spLocks noGrp="1"/>
-          </p:cNvSpPr>
-          <p:nvPr>
-            <p:ph sz="quarter" idx="13"/>
-          </p:nvPr>
-        </p:nvSpPr>
-        <p:spPr>
-          <a:xfrm>
-            <a:off x="550863" y="2419350"/>
-            <a:ext cx="5545137" cy="3913188"/>
-          </a:xfrm>
-        </p:spPr>
-        <p:txBody>
-          <a:bodyPr rtlCol="0">
-            <a:normAutofit/>
-          </a:bodyPr>
-          <a:lstStyle>
-            <a:defPPr>
-              <a:defRPr lang="de-DE"/>
-            </a:defPPr>
-          </a:lstStyle>
-          <a:p>
-            <a:pPr algn="ctr" rtl="0"/>
-            <a:r>
-              <a:rPr lang="de-DE" b="1" dirty="0"/>
-              <a:t>Large Language Model</a:t>
-            </a:r>
-          </a:p>
-          <a:p>
-            <a:pPr marL="285750" indent="-285750" rtl="0">
-              <a:buFont typeface="Arial" panose="020B0604020202020204" pitchFamily="34" charset="0"/>
-              <a:buChar char="•"/>
-            </a:pPr>
-            <a:r>
-              <a:rPr lang="de-DE" dirty="0"/>
-              <a:t>Text verstehen</a:t>
-            </a:r>
-          </a:p>
-          <a:p>
-            <a:pPr marL="285750" indent="-285750" rtl="0">
-              <a:buFont typeface="Arial" panose="020B0604020202020204" pitchFamily="34" charset="0"/>
-              <a:buChar char="•"/>
-            </a:pPr>
-            <a:r>
-              <a:rPr lang="de-DE" dirty="0"/>
-              <a:t>Text erzeugen</a:t>
-            </a:r>
-          </a:p>
-          <a:p>
-            <a:pPr marL="285750" indent="-285750" rtl="0">
-              <a:buFont typeface="Arial" panose="020B0604020202020204" pitchFamily="34" charset="0"/>
-              <a:buChar char="•"/>
-            </a:pPr>
-            <a:r>
-              <a:rPr lang="de-DE" dirty="0"/>
-              <a:t>Wissen anwenden</a:t>
-            </a:r>
-          </a:p>
-          <a:p>
-            <a:pPr marL="285750" indent="-285750" rtl="0">
-              <a:buFont typeface="Arial" panose="020B0604020202020204" pitchFamily="34" charset="0"/>
-              <a:buChar char="•"/>
-            </a:pPr>
-            <a:r>
-              <a:rPr lang="de-DE" dirty="0"/>
-              <a:t>Muster erkennen</a:t>
-            </a:r>
-          </a:p>
-          <a:p>
-            <a:pPr marL="285750" indent="-285750" rtl="0">
-              <a:buFont typeface="Arial" panose="020B0604020202020204" pitchFamily="34" charset="0"/>
-              <a:buChar char="•"/>
-            </a:pPr>
-            <a:r>
-              <a:rPr lang="de-DE" dirty="0"/>
-              <a:t>Vorschläge machen</a:t>
-            </a:r>
-          </a:p>
-          <a:p>
-            <a:pPr marL="285750" indent="-285750" rtl="0">
-              <a:buFont typeface="Arial" panose="020B0604020202020204" pitchFamily="34" charset="0"/>
-              <a:buChar char="•"/>
-            </a:pPr>
-            <a:r>
-              <a:rPr lang="de-DE" dirty="0"/>
-              <a:t>Ein LLM macht aber von sich aus nichts            außerhalb der Antwort.</a:t>
+              <a:t>KI-Agenten sind mehr als nur ein LLM</a:t>
             </a:r>
           </a:p>
         </p:txBody>
@@ -16664,7 +14710,7 @@
         </p:nvSpPr>
         <p:spPr>
           <a:xfrm>
-            <a:off x="6096000" y="2419350"/>
+            <a:off x="758031" y="2044700"/>
             <a:ext cx="5545137" cy="3913188"/>
           </a:xfrm>
           <a:prstGeom prst="rect">
@@ -16858,20 +14904,20 @@
             </a:lvl9pPr>
           </a:lstStyle>
           <a:p>
-            <a:pPr algn="ctr"/>
-            <a:r>
-              <a:rPr lang="de-DE" b="1" dirty="0"/>
-              <a:t>KI-Agent</a:t>
-            </a:r>
-          </a:p>
-          <a:p>
             <a:pPr marL="285750" indent="-285750">
               <a:buFont typeface="Arial" panose="020B0604020202020204" pitchFamily="34" charset="0"/>
               <a:buChar char="•"/>
             </a:pPr>
             <a:r>
-              <a:rPr lang="de-DE" dirty="0"/>
-              <a:t>Hat ein LLM als Inhalt – denkt, entscheidet, formuliert</a:t>
+              <a:rPr lang="de-DE" sz="2400" dirty="0"/>
+              <a:t>Hat ein LLM als Inhalt</a:t>
+            </a:r>
+          </a:p>
+          <a:p>
+            <a:pPr marL="971550" lvl="1" indent="-285750"/>
+            <a:r>
+              <a:rPr lang="de-DE" sz="2400" dirty="0"/>
+              <a:t>denkt, entscheidet, formuliert</a:t>
             </a:r>
           </a:p>
           <a:p>
@@ -16880,8 +14926,15 @@
               <a:buChar char="•"/>
             </a:pPr>
             <a:r>
-              <a:rPr lang="de-DE" dirty="0"/>
-              <a:t>System Prompt – Regeln und Rolle des Agenten</a:t>
+              <a:rPr lang="de-DE" sz="2400" dirty="0"/>
+              <a:t>System Prompt</a:t>
+            </a:r>
+          </a:p>
+          <a:p>
+            <a:pPr marL="971550" lvl="1" indent="-285750"/>
+            <a:r>
+              <a:rPr lang="de-DE" sz="2400" dirty="0"/>
+              <a:t>Regeln und Rolle des Agenten</a:t>
             </a:r>
           </a:p>
           <a:p>
@@ -16890,38 +14943,15 @@
               <a:buChar char="•"/>
             </a:pPr>
             <a:r>
-              <a:rPr lang="de-DE" dirty="0"/>
-              <a:t>Tools – z.B. Datei schreiben, API aufrufen, Datenbank abfragen</a:t>
+              <a:rPr lang="de-DE" sz="2400" dirty="0"/>
+              <a:t>Tools</a:t>
             </a:r>
           </a:p>
           <a:p>
-            <a:pPr marL="285750" indent="-285750">
-              <a:buFont typeface="Arial" panose="020B0604020202020204" pitchFamily="34" charset="0"/>
-              <a:buChar char="•"/>
-            </a:pPr>
+            <a:pPr marL="971550" lvl="1" indent="-285750"/>
             <a:r>
-              <a:rPr lang="de-DE" dirty="0"/>
-              <a:t>Speicher / Zustand merkt sich Zwischenergebnisse</a:t>
-            </a:r>
-          </a:p>
-          <a:p>
-            <a:pPr marL="285750" indent="-285750">
-              <a:buFont typeface="Arial" panose="020B0604020202020204" pitchFamily="34" charset="0"/>
-              <a:buChar char="•"/>
-            </a:pPr>
-            <a:r>
-              <a:rPr lang="de-DE" dirty="0"/>
-              <a:t>Entscheidungslogik – wählt nächste Aktion</a:t>
-            </a:r>
-          </a:p>
-          <a:p>
-            <a:pPr marL="285750" indent="-285750">
-              <a:buFont typeface="Arial" panose="020B0604020202020204" pitchFamily="34" charset="0"/>
-              <a:buChar char="•"/>
-            </a:pPr>
-            <a:r>
-              <a:rPr lang="de-DE" dirty="0"/>
-              <a:t>Umgebung – Spiel, Web-App, API, Dateisystem usw.</a:t>
+              <a:rPr lang="de-DE" sz="2400" dirty="0"/>
+              <a:t>z.B. Datei schreiben, API aufrufen, Datenbank abfragen</a:t>
             </a:r>
           </a:p>
         </p:txBody>
@@ -16940,6 +14970,335 @@
 </file>
 
 <file path=ppt/slides/slide3.xml><?xml version="1.0" encoding="utf-8"?>
+<p:sld xmlns:a="http://schemas.openxmlformats.org/drawingml/2006/main" xmlns:r="http://schemas.openxmlformats.org/officeDocument/2006/relationships" xmlns:p="http://schemas.openxmlformats.org/presentationml/2006/main">
+  <p:cSld>
+    <p:spTree>
+      <p:nvGrpSpPr>
+        <p:cNvPr id="1" name="">
+          <a:extLst>
+            <a:ext uri="{FF2B5EF4-FFF2-40B4-BE49-F238E27FC236}">
+              <a16:creationId xmlns:a16="http://schemas.microsoft.com/office/drawing/2014/main" id="{9F85FE91-5407-8DD4-2106-367E2FED0CB5}"/>
+            </a:ext>
+          </a:extLst>
+        </p:cNvPr>
+        <p:cNvGrpSpPr/>
+        <p:nvPr/>
+      </p:nvGrpSpPr>
+      <p:grpSpPr>
+        <a:xfrm>
+          <a:off x="0" y="0"/>
+          <a:ext cx="0" cy="0"/>
+          <a:chOff x="0" y="0"/>
+          <a:chExt cx="0" cy="0"/>
+        </a:xfrm>
+      </p:grpSpPr>
+      <p:sp>
+        <p:nvSpPr>
+          <p:cNvPr id="2" name="Titel 1">
+            <a:extLst>
+              <a:ext uri="{FF2B5EF4-FFF2-40B4-BE49-F238E27FC236}">
+                <a16:creationId xmlns:a16="http://schemas.microsoft.com/office/drawing/2014/main" id="{DC43C935-B626-8079-5EE3-F457EFD50043}"/>
+              </a:ext>
+            </a:extLst>
+          </p:cNvPr>
+          <p:cNvSpPr>
+            <a:spLocks noGrp="1"/>
+          </p:cNvSpPr>
+          <p:nvPr>
+            <p:ph type="title"/>
+          </p:nvPr>
+        </p:nvSpPr>
+        <p:spPr>
+          <a:xfrm>
+            <a:off x="550863" y="483924"/>
+            <a:ext cx="11090275" cy="1073027"/>
+          </a:xfrm>
+        </p:spPr>
+        <p:txBody>
+          <a:bodyPr rtlCol="0"/>
+          <a:lstStyle>
+            <a:defPPr>
+              <a:defRPr lang="de-DE"/>
+            </a:defPPr>
+          </a:lstStyle>
+          <a:p>
+            <a:pPr algn="ctr" rtl="0"/>
+            <a:r>
+              <a:rPr lang="de-DE" dirty="0"/>
+              <a:t>KI-Agenten sind mehr als nur ein LLM</a:t>
+            </a:r>
+          </a:p>
+        </p:txBody>
+      </p:sp>
+      <p:sp>
+        <p:nvSpPr>
+          <p:cNvPr id="4" name="Inhaltsplatzhalter 2">
+            <a:extLst>
+              <a:ext uri="{FF2B5EF4-FFF2-40B4-BE49-F238E27FC236}">
+                <a16:creationId xmlns:a16="http://schemas.microsoft.com/office/drawing/2014/main" id="{D68EFB1F-B9AB-BB03-DC0A-89D6D1A4AFD0}"/>
+              </a:ext>
+            </a:extLst>
+          </p:cNvPr>
+          <p:cNvSpPr txBox="1">
+            <a:spLocks/>
+          </p:cNvSpPr>
+          <p:nvPr/>
+        </p:nvSpPr>
+        <p:spPr>
+          <a:xfrm>
+            <a:off x="770731" y="2019300"/>
+            <a:ext cx="6017419" cy="3913188"/>
+          </a:xfrm>
+          <a:prstGeom prst="rect">
+            <a:avLst/>
+          </a:prstGeom>
+        </p:spPr>
+        <p:txBody>
+          <a:bodyPr vert="horz" wrap="square" lIns="0" tIns="0" rIns="0" bIns="0" rtlCol="0">
+            <a:noAutofit/>
+          </a:bodyPr>
+          <a:lstStyle>
+            <a:defPPr>
+              <a:defRPr lang="de-DE"/>
+            </a:defPPr>
+            <a:lvl1pPr marL="0" indent="0" algn="l" defTabSz="914400" rtl="0" eaLnBrk="1" latinLnBrk="0" hangingPunct="1">
+              <a:lnSpc>
+                <a:spcPct val="110000"/>
+              </a:lnSpc>
+              <a:spcBef>
+                <a:spcPts val="1000"/>
+              </a:spcBef>
+              <a:spcAft>
+                <a:spcPts val="800"/>
+              </a:spcAft>
+              <a:buFont typeface="Arial" panose="020B0604020202020204" pitchFamily="34" charset="0"/>
+              <a:buNone/>
+              <a:defRPr lang="de-DE" sz="1800" kern="1200">
+                <a:solidFill>
+                  <a:schemeClr val="tx1"/>
+                </a:solidFill>
+                <a:latin typeface="+mn-lt"/>
+                <a:ea typeface="+mn-ea"/>
+                <a:cs typeface="+mn-cs"/>
+              </a:defRPr>
+            </a:lvl1pPr>
+            <a:lvl2pPr marL="685800" indent="-228600" algn="l" defTabSz="914400" rtl="0" eaLnBrk="1" latinLnBrk="0" hangingPunct="1">
+              <a:lnSpc>
+                <a:spcPct val="110000"/>
+              </a:lnSpc>
+              <a:spcBef>
+                <a:spcPts val="500"/>
+              </a:spcBef>
+              <a:spcAft>
+                <a:spcPts val="800"/>
+              </a:spcAft>
+              <a:buFont typeface="Arial" panose="020B0604020202020204" pitchFamily="34" charset="0"/>
+              <a:buChar char="•"/>
+              <a:defRPr lang="de-DE" sz="1200" kern="1200">
+                <a:solidFill>
+                  <a:schemeClr val="tx1"/>
+                </a:solidFill>
+                <a:latin typeface="+mn-lt"/>
+                <a:ea typeface="+mn-ea"/>
+                <a:cs typeface="+mn-cs"/>
+              </a:defRPr>
+            </a:lvl2pPr>
+            <a:lvl3pPr marL="1143000" indent="-228600" algn="l" defTabSz="914400" rtl="0" eaLnBrk="1" latinLnBrk="0" hangingPunct="1">
+              <a:lnSpc>
+                <a:spcPct val="110000"/>
+              </a:lnSpc>
+              <a:spcBef>
+                <a:spcPts val="500"/>
+              </a:spcBef>
+              <a:spcAft>
+                <a:spcPts val="800"/>
+              </a:spcAft>
+              <a:buFont typeface="Arial" panose="020B0604020202020204" pitchFamily="34" charset="0"/>
+              <a:buChar char="•"/>
+              <a:defRPr lang="de-DE" sz="1200" kern="1200">
+                <a:solidFill>
+                  <a:schemeClr val="tx1"/>
+                </a:solidFill>
+                <a:latin typeface="+mn-lt"/>
+                <a:ea typeface="+mn-ea"/>
+                <a:cs typeface="+mn-cs"/>
+              </a:defRPr>
+            </a:lvl3pPr>
+            <a:lvl4pPr marL="1600200" indent="-228600" algn="l" defTabSz="914400" rtl="0" eaLnBrk="1" latinLnBrk="0" hangingPunct="1">
+              <a:lnSpc>
+                <a:spcPct val="110000"/>
+              </a:lnSpc>
+              <a:spcBef>
+                <a:spcPts val="500"/>
+              </a:spcBef>
+              <a:spcAft>
+                <a:spcPts val="800"/>
+              </a:spcAft>
+              <a:buFont typeface="Arial" panose="020B0604020202020204" pitchFamily="34" charset="0"/>
+              <a:buChar char="•"/>
+              <a:defRPr lang="de-DE" sz="1200" kern="1200">
+                <a:solidFill>
+                  <a:schemeClr val="tx1"/>
+                </a:solidFill>
+                <a:latin typeface="+mn-lt"/>
+                <a:ea typeface="+mn-ea"/>
+                <a:cs typeface="+mn-cs"/>
+              </a:defRPr>
+            </a:lvl4pPr>
+            <a:lvl5pPr marL="2057400" indent="-228600" algn="l" defTabSz="914400" rtl="0" eaLnBrk="1" latinLnBrk="0" hangingPunct="1">
+              <a:lnSpc>
+                <a:spcPct val="110000"/>
+              </a:lnSpc>
+              <a:spcBef>
+                <a:spcPts val="500"/>
+              </a:spcBef>
+              <a:spcAft>
+                <a:spcPts val="800"/>
+              </a:spcAft>
+              <a:buFont typeface="Arial" panose="020B0604020202020204" pitchFamily="34" charset="0"/>
+              <a:buChar char="•"/>
+              <a:defRPr lang="de-DE" sz="1200" kern="1200">
+                <a:solidFill>
+                  <a:schemeClr val="tx1"/>
+                </a:solidFill>
+                <a:latin typeface="+mn-lt"/>
+                <a:ea typeface="+mn-ea"/>
+                <a:cs typeface="+mn-cs"/>
+              </a:defRPr>
+            </a:lvl5pPr>
+            <a:lvl6pPr marL="2514600" indent="-228600" algn="l" defTabSz="914400" rtl="0" eaLnBrk="1" latinLnBrk="0" hangingPunct="1">
+              <a:lnSpc>
+                <a:spcPct val="90000"/>
+              </a:lnSpc>
+              <a:spcBef>
+                <a:spcPts val="500"/>
+              </a:spcBef>
+              <a:buFont typeface="Arial" panose="020B0604020202020204" pitchFamily="34" charset="0"/>
+              <a:buChar char="•"/>
+              <a:defRPr lang="de-DE" sz="1800" kern="1200">
+                <a:solidFill>
+                  <a:schemeClr val="tx1"/>
+                </a:solidFill>
+                <a:latin typeface="+mn-lt"/>
+                <a:ea typeface="+mn-ea"/>
+                <a:cs typeface="+mn-cs"/>
+              </a:defRPr>
+            </a:lvl6pPr>
+            <a:lvl7pPr marL="2971800" indent="-228600" algn="l" defTabSz="914400" rtl="0" eaLnBrk="1" latinLnBrk="0" hangingPunct="1">
+              <a:lnSpc>
+                <a:spcPct val="90000"/>
+              </a:lnSpc>
+              <a:spcBef>
+                <a:spcPts val="500"/>
+              </a:spcBef>
+              <a:buFont typeface="Arial" panose="020B0604020202020204" pitchFamily="34" charset="0"/>
+              <a:buChar char="•"/>
+              <a:defRPr lang="de-DE" sz="1800" kern="1200">
+                <a:solidFill>
+                  <a:schemeClr val="tx1"/>
+                </a:solidFill>
+                <a:latin typeface="+mn-lt"/>
+                <a:ea typeface="+mn-ea"/>
+                <a:cs typeface="+mn-cs"/>
+              </a:defRPr>
+            </a:lvl7pPr>
+            <a:lvl8pPr marL="3429000" indent="-228600" algn="l" defTabSz="914400" rtl="0" eaLnBrk="1" latinLnBrk="0" hangingPunct="1">
+              <a:lnSpc>
+                <a:spcPct val="90000"/>
+              </a:lnSpc>
+              <a:spcBef>
+                <a:spcPts val="500"/>
+              </a:spcBef>
+              <a:buFont typeface="Arial" panose="020B0604020202020204" pitchFamily="34" charset="0"/>
+              <a:buChar char="•"/>
+              <a:defRPr lang="de-DE" sz="1800" kern="1200">
+                <a:solidFill>
+                  <a:schemeClr val="tx1"/>
+                </a:solidFill>
+                <a:latin typeface="+mn-lt"/>
+                <a:ea typeface="+mn-ea"/>
+                <a:cs typeface="+mn-cs"/>
+              </a:defRPr>
+            </a:lvl8pPr>
+            <a:lvl9pPr marL="3886200" indent="-228600" algn="l" defTabSz="914400" rtl="0" eaLnBrk="1" latinLnBrk="0" hangingPunct="1">
+              <a:lnSpc>
+                <a:spcPct val="90000"/>
+              </a:lnSpc>
+              <a:spcBef>
+                <a:spcPts val="500"/>
+              </a:spcBef>
+              <a:buFont typeface="Arial" panose="020B0604020202020204" pitchFamily="34" charset="0"/>
+              <a:buChar char="•"/>
+              <a:defRPr lang="de-DE" sz="1800" kern="1200">
+                <a:solidFill>
+                  <a:schemeClr val="tx1"/>
+                </a:solidFill>
+                <a:latin typeface="+mn-lt"/>
+                <a:ea typeface="+mn-ea"/>
+                <a:cs typeface="+mn-cs"/>
+              </a:defRPr>
+            </a:lvl9pPr>
+          </a:lstStyle>
+          <a:p>
+            <a:pPr marL="285750" indent="-285750">
+              <a:buFont typeface="Arial" panose="020B0604020202020204" pitchFamily="34" charset="0"/>
+              <a:buChar char="•"/>
+            </a:pPr>
+            <a:r>
+              <a:rPr lang="de-DE" sz="2400" dirty="0"/>
+              <a:t>Speicher / Zustand merkt sich Zwischenergebnisse</a:t>
+            </a:r>
+          </a:p>
+          <a:p>
+            <a:pPr marL="285750" indent="-285750">
+              <a:buFont typeface="Arial" panose="020B0604020202020204" pitchFamily="34" charset="0"/>
+              <a:buChar char="•"/>
+            </a:pPr>
+            <a:r>
+              <a:rPr lang="de-DE" sz="2400" dirty="0"/>
+              <a:t>Entscheidungslogik</a:t>
+            </a:r>
+          </a:p>
+          <a:p>
+            <a:pPr marL="971550" lvl="1" indent="-285750"/>
+            <a:r>
+              <a:rPr lang="de-DE" sz="2400" dirty="0"/>
+              <a:t>wählt nächste Aktion</a:t>
+            </a:r>
+          </a:p>
+          <a:p>
+            <a:pPr marL="285750" indent="-285750">
+              <a:buFont typeface="Arial" panose="020B0604020202020204" pitchFamily="34" charset="0"/>
+              <a:buChar char="•"/>
+            </a:pPr>
+            <a:r>
+              <a:rPr lang="de-DE" sz="2400" dirty="0"/>
+              <a:t>Umgebung</a:t>
+            </a:r>
+          </a:p>
+          <a:p>
+            <a:pPr marL="971550" lvl="1" indent="-285750"/>
+            <a:r>
+              <a:rPr lang="de-DE" sz="2400" dirty="0"/>
+              <a:t>Spiel, Web-App, API, Dateisystem usw.</a:t>
+            </a:r>
+          </a:p>
+        </p:txBody>
+      </p:sp>
+    </p:spTree>
+    <p:extLst>
+      <p:ext uri="{BB962C8B-B14F-4D97-AF65-F5344CB8AC3E}">
+        <p14:creationId xmlns:p14="http://schemas.microsoft.com/office/powerpoint/2010/main" val="897801919"/>
+      </p:ext>
+    </p:extLst>
+  </p:cSld>
+  <p:clrMapOvr>
+    <a:masterClrMapping/>
+  </p:clrMapOvr>
+</p:sld>
+</file>
+
+<file path=ppt/slides/slide4.xml><?xml version="1.0" encoding="utf-8"?>
 <p:sld xmlns:a="http://schemas.openxmlformats.org/drawingml/2006/main" xmlns:r="http://schemas.openxmlformats.org/officeDocument/2006/relationships" xmlns:p="http://schemas.openxmlformats.org/presentationml/2006/main">
   <p:cSld>
     <p:spTree>
@@ -17049,7 +15408,7 @@
 </p:sld>
 </file>
 
-<file path=ppt/slides/slide4.xml><?xml version="1.0" encoding="utf-8"?>
+<file path=ppt/slides/slide5.xml><?xml version="1.0" encoding="utf-8"?>
 <p:sld xmlns:a="http://schemas.openxmlformats.org/drawingml/2006/main" xmlns:r="http://schemas.openxmlformats.org/officeDocument/2006/relationships" xmlns:p="http://schemas.openxmlformats.org/presentationml/2006/main">
   <p:cSld>
     <p:spTree>
@@ -17318,7 +15677,7 @@
 </p:sld>
 </file>
 
-<file path=ppt/slides/slide5.xml><?xml version="1.0" encoding="utf-8"?>
+<file path=ppt/slides/slide6.xml><?xml version="1.0" encoding="utf-8"?>
 <p:sld xmlns:a="http://schemas.openxmlformats.org/drawingml/2006/main" xmlns:r="http://schemas.openxmlformats.org/officeDocument/2006/relationships" xmlns:p="http://schemas.openxmlformats.org/presentationml/2006/main">
   <p:cSld>
     <p:spTree>
@@ -17451,10 +15810,9 @@
           <a:p>
             <a:pPr algn="ctr"/>
             <a:r>
-              <a:rPr lang="en-US" sz="2800" dirty="0" err="1"/>
-              <a:t>Aufgaben</a:t>
+              <a:rPr lang="en-US" sz="2800" dirty="0"/>
+              <a:t>Aufgabe</a:t>
             </a:r>
-            <a:endParaRPr lang="en-US" sz="2800" dirty="0"/>
           </a:p>
           <a:p>
             <a:pPr algn="ctr"/>
@@ -17669,7 +16027,7 @@
 </p:sld>
 </file>
 
-<file path=ppt/slides/slide6.xml><?xml version="1.0" encoding="utf-8"?>
+<file path=ppt/slides/slide7.xml><?xml version="1.0" encoding="utf-8"?>
 <p:sld xmlns:a="http://schemas.openxmlformats.org/drawingml/2006/main" xmlns:r="http://schemas.openxmlformats.org/officeDocument/2006/relationships" xmlns:p="http://schemas.openxmlformats.org/presentationml/2006/main">
   <p:cSld>
     <p:spTree>
@@ -17836,7 +16194,7 @@
 </p:sld>
 </file>
 
-<file path=ppt/slides/slide7.xml><?xml version="1.0" encoding="utf-8"?>
+<file path=ppt/slides/slide8.xml><?xml version="1.0" encoding="utf-8"?>
 <p:sld xmlns:a="http://schemas.openxmlformats.org/drawingml/2006/main" xmlns:r="http://schemas.openxmlformats.org/officeDocument/2006/relationships" xmlns:p="http://schemas.openxmlformats.org/presentationml/2006/main">
   <p:cSld>
     <p:spTree>
@@ -17938,7 +16296,31 @@
             <a:pPr lvl="1" rtl="0"/>
             <a:r>
               <a:rPr lang="de-DE" dirty="0"/>
-              <a:t>Externer Speicher – Datenbanken, Dateien</a:t>
+              <a:t>Externer Speicher – Datenbanken, Dateien (</a:t>
+            </a:r>
+            <a:r>
+              <a:rPr lang="de-DE" dirty="0" err="1"/>
+              <a:t>zB</a:t>
+            </a:r>
+            <a:r>
+              <a:rPr lang="de-DE" dirty="0"/>
+              <a:t>. </a:t>
+            </a:r>
+            <a:r>
+              <a:rPr lang="de-DE" dirty="0" err="1"/>
+              <a:t>memory.json</a:t>
+            </a:r>
+            <a:r>
+              <a:rPr lang="de-DE" dirty="0"/>
+              <a:t> </a:t>
+            </a:r>
+            <a:r>
+              <a:rPr lang="de-DE" dirty="0" err="1"/>
+              <a:t>history.json</a:t>
+            </a:r>
+            <a:r>
+              <a:rPr lang="de-DE" dirty="0"/>
+              <a:t>)</a:t>
             </a:r>
           </a:p>
           <a:p>
@@ -18019,7 +16401,7 @@
 </p:sld>
 </file>
 
-<file path=ppt/slides/slide8.xml><?xml version="1.0" encoding="utf-8"?>
+<file path=ppt/slides/slide9.xml><?xml version="1.0" encoding="utf-8"?>
 <p:sld xmlns:a="http://schemas.openxmlformats.org/drawingml/2006/main" xmlns:r="http://schemas.openxmlformats.org/officeDocument/2006/relationships" xmlns:p="http://schemas.openxmlformats.org/presentationml/2006/main">
   <p:cSld>
     <p:spTree>
@@ -18154,147 +16536,6 @@
     <p:extLst>
       <p:ext uri="{BB962C8B-B14F-4D97-AF65-F5344CB8AC3E}">
         <p14:creationId xmlns:p14="http://schemas.microsoft.com/office/powerpoint/2010/main" val="281991564"/>
-      </p:ext>
-    </p:extLst>
-  </p:cSld>
-  <p:clrMapOvr>
-    <a:masterClrMapping/>
-  </p:clrMapOvr>
-</p:sld>
-</file>
-
-<file path=ppt/slides/slide9.xml><?xml version="1.0" encoding="utf-8"?>
-<p:sld xmlns:a="http://schemas.openxmlformats.org/drawingml/2006/main" xmlns:r="http://schemas.openxmlformats.org/officeDocument/2006/relationships" xmlns:p="http://schemas.openxmlformats.org/presentationml/2006/main">
-  <p:cSld>
-    <p:spTree>
-      <p:nvGrpSpPr>
-        <p:cNvPr id="1" name=""/>
-        <p:cNvGrpSpPr/>
-        <p:nvPr/>
-      </p:nvGrpSpPr>
-      <p:grpSpPr>
-        <a:xfrm>
-          <a:off x="0" y="0"/>
-          <a:ext cx="0" cy="0"/>
-          <a:chOff x="0" y="0"/>
-          <a:chExt cx="0" cy="0"/>
-        </a:xfrm>
-      </p:grpSpPr>
-      <p:pic>
-        <p:nvPicPr>
-          <p:cNvPr id="5" name="Bildplatzhalter 7" descr="Digitaler Hintergrund für Datenpunkte">
-            <a:extLst>
-              <a:ext uri="{FF2B5EF4-FFF2-40B4-BE49-F238E27FC236}">
-                <a16:creationId xmlns:a16="http://schemas.microsoft.com/office/drawing/2014/main" id="{1358CD3B-43A8-5BF7-2E60-B0563F068D11}"/>
-              </a:ext>
-            </a:extLst>
-          </p:cNvPr>
-          <p:cNvPicPr>
-            <a:picLocks noGrp="1" noChangeAspect="1"/>
-          </p:cNvPicPr>
-          <p:nvPr>
-            <p:ph type="pic" sz="quarter" idx="13"/>
-          </p:nvPr>
-        </p:nvPicPr>
-        <p:blipFill>
-          <a:blip r:embed="rId3">
-            <a:alphaModFix amt="45000"/>
-            <a:extLst>
-              <a:ext uri="{28A0092B-C50C-407E-A947-70E740481C1C}">
-                <a14:useLocalDpi xmlns:a14="http://schemas.microsoft.com/office/drawing/2010/main" val="0"/>
-              </a:ext>
-            </a:extLst>
-          </a:blip>
-          <a:srcRect/>
-          <a:stretch/>
-        </p:blipFill>
-        <p:spPr>
-          <a:xfrm>
-            <a:off x="0" y="0"/>
-            <a:ext cx="12192000" cy="6858000"/>
-          </a:xfrm>
-        </p:spPr>
-      </p:pic>
-      <p:sp>
-        <p:nvSpPr>
-          <p:cNvPr id="7" name="Titel 6">
-            <a:extLst>
-              <a:ext uri="{FF2B5EF4-FFF2-40B4-BE49-F238E27FC236}">
-                <a16:creationId xmlns:a16="http://schemas.microsoft.com/office/drawing/2014/main" id="{8A84D4AF-8D29-5A55-F3F8-1E928E3B08FF}"/>
-              </a:ext>
-            </a:extLst>
-          </p:cNvPr>
-          <p:cNvSpPr>
-            <a:spLocks noGrp="1"/>
-          </p:cNvSpPr>
-          <p:nvPr>
-            <p:ph type="ctrTitle"/>
-          </p:nvPr>
-        </p:nvSpPr>
-        <p:spPr>
-          <a:xfrm>
-            <a:off x="1524000" y="1376680"/>
-            <a:ext cx="9144000" cy="2286000"/>
-          </a:xfrm>
-        </p:spPr>
-        <p:txBody>
-          <a:bodyPr rtlCol="0"/>
-          <a:lstStyle>
-            <a:defPPr>
-              <a:defRPr lang="de-DE"/>
-            </a:defPPr>
-          </a:lstStyle>
-          <a:p>
-            <a:pPr rtl="0"/>
-            <a:r>
-              <a:rPr lang="de-DE" dirty="0"/>
-              <a:t>Auswählen visueller Hilfen</a:t>
-            </a:r>
-          </a:p>
-        </p:txBody>
-      </p:sp>
-      <p:sp>
-        <p:nvSpPr>
-          <p:cNvPr id="8" name="Untertitel 7">
-            <a:extLst>
-              <a:ext uri="{FF2B5EF4-FFF2-40B4-BE49-F238E27FC236}">
-                <a16:creationId xmlns:a16="http://schemas.microsoft.com/office/drawing/2014/main" id="{6450744F-A4B6-FD90-F6DA-4EF9A192E377}"/>
-              </a:ext>
-            </a:extLst>
-          </p:cNvPr>
-          <p:cNvSpPr>
-            <a:spLocks noGrp="1"/>
-          </p:cNvSpPr>
-          <p:nvPr>
-            <p:ph type="subTitle" idx="1"/>
-          </p:nvPr>
-        </p:nvSpPr>
-        <p:spPr>
-          <a:xfrm>
-            <a:off x="1524000" y="3799840"/>
-            <a:ext cx="9144000" cy="2286000"/>
-          </a:xfrm>
-        </p:spPr>
-        <p:txBody>
-          <a:bodyPr rtlCol="0"/>
-          <a:lstStyle>
-            <a:defPPr>
-              <a:defRPr lang="de-DE"/>
-            </a:defPPr>
-          </a:lstStyle>
-          <a:p>
-            <a:pPr rtl="0"/>
-            <a:r>
-              <a:rPr lang="de-DE" dirty="0"/>
-              <a:t>Verbessern Ihrer Präsentation</a:t>
-            </a:r>
-          </a:p>
-        </p:txBody>
-      </p:sp>
-    </p:spTree>
-    <p:extLst>
-      <p:ext uri="{BB962C8B-B14F-4D97-AF65-F5344CB8AC3E}">
-        <p14:creationId xmlns:p14="http://schemas.microsoft.com/office/powerpoint/2010/main" val="2855514139"/>
       </p:ext>
     </p:extLst>
   </p:cSld>
